--- a/pokemon_zukan_official_artwork/pokemon_zukan.pptx
+++ b/pokemon_zukan_official_artwork/pokemon_zukan.pptx
@@ -7,6 +7,14 @@
   <p:sldIdLst>
     <p:sldId id="256" r:id="rId7"/>
     <p:sldId id="257" r:id="rId8"/>
+    <p:sldId id="258" r:id="rId9"/>
+    <p:sldId id="259" r:id="rId10"/>
+    <p:sldId id="260" r:id="rId11"/>
+    <p:sldId id="261" r:id="rId12"/>
+    <p:sldId id="262" r:id="rId13"/>
+    <p:sldId id="263" r:id="rId14"/>
+    <p:sldId id="264" r:id="rId15"/>
+    <p:sldId id="265" r:id="rId16"/>
   </p:sldIdLst>
   <p:sldSz cx="7560000" cy="10692000" type="screen4x3"/>
   <p:notesSz cx="6858000" cy="9144000"/>
@@ -3155,14 +3163,14 @@
               <a:rPr sz="900" b="1">
                 <a:latin typeface="BIZ UDPGothic"/>
               </a:rPr>
-              <a:t>#004</a:t>
+              <a:t>#001</a:t>
             </a:r>
           </a:p>
         </p:txBody>
       </p:sp>
       <p:pic>
         <p:nvPicPr>
-          <p:cNvPr id="4" name="Picture 3" descr="glumanda.png"/>
+          <p:cNvPr id="4" name="Picture 3" descr="bisasam.png"/>
           <p:cNvPicPr>
             <a:picLocks noChangeAspect="1"/>
           </p:cNvPicPr>
@@ -3211,7 +3219,7 @@
               <a:rPr sz="1400" b="0">
                 <a:latin typeface="BIZ UDPGothic"/>
               </a:rPr>
-              <a:t>Glumanda</a:t>
+              <a:t>Bisasam</a:t>
             </a:r>
           </a:p>
         </p:txBody>
@@ -3243,7 +3251,7 @@
               <a:rPr sz="2400" b="1">
                 <a:latin typeface="BIZ UDPGothic"/>
               </a:rPr>
-              <a:t>ひ と か げ</a:t>
+              <a:t>ふ し ぎ だ ね</a:t>
             </a:r>
           </a:p>
         </p:txBody>
@@ -3275,7 +3283,7 @@
               <a:rPr sz="1500" b="0">
                 <a:latin typeface="BIZ UDPGothic"/>
               </a:rPr>
-              <a:t>ヒトカゲ</a:t>
+              <a:t>フシギダネ</a:t>
             </a:r>
           </a:p>
         </p:txBody>
@@ -3307,7 +3315,7 @@
               <a:rPr sz="900" b="0">
                 <a:latin typeface="BIZ UDPGothic"/>
               </a:rPr>
-              <a:t>タイプ：ほのお</a:t>
+              <a:t>タイプ：くさ / どく</a:t>
             </a:r>
           </a:p>
         </p:txBody>
@@ -3378,14 +3386,14 @@
               <a:rPr sz="900" b="1">
                 <a:latin typeface="BIZ UDPGothic"/>
               </a:rPr>
-              <a:t>#007</a:t>
+              <a:t>#002</a:t>
             </a:r>
           </a:p>
         </p:txBody>
       </p:sp>
       <p:pic>
         <p:nvPicPr>
-          <p:cNvPr id="11" name="Picture 10" descr="schiggy.png"/>
+          <p:cNvPr id="11" name="Picture 10" descr="bisaknosp.png"/>
           <p:cNvPicPr>
             <a:picLocks noChangeAspect="1"/>
           </p:cNvPicPr>
@@ -3434,7 +3442,7 @@
               <a:rPr sz="1400" b="0">
                 <a:latin typeface="BIZ UDPGothic"/>
               </a:rPr>
-              <a:t>Schiggy</a:t>
+              <a:t>Bisaknosp</a:t>
             </a:r>
           </a:p>
         </p:txBody>
@@ -3466,7 +3474,7 @@
               <a:rPr sz="2400" b="1">
                 <a:latin typeface="BIZ UDPGothic"/>
               </a:rPr>
-              <a:t>ぜ に が め</a:t>
+              <a:t>ふ し ぎ そ う</a:t>
             </a:r>
           </a:p>
         </p:txBody>
@@ -3498,7 +3506,7 @@
               <a:rPr sz="1500" b="0">
                 <a:latin typeface="BIZ UDPGothic"/>
               </a:rPr>
-              <a:t>ゼニガメ</a:t>
+              <a:t>フシギソウ</a:t>
             </a:r>
           </a:p>
         </p:txBody>
@@ -3530,7 +3538,7 @@
               <a:rPr sz="900" b="0">
                 <a:latin typeface="BIZ UDPGothic"/>
               </a:rPr>
-              <a:t>タイプ：みず</a:t>
+              <a:t>タイプ：くさ / どく</a:t>
             </a:r>
           </a:p>
         </p:txBody>
@@ -3601,14 +3609,14 @@
               <a:rPr sz="900" b="1">
                 <a:latin typeface="BIZ UDPGothic"/>
               </a:rPr>
-              <a:t>#001</a:t>
+              <a:t>#004</a:t>
             </a:r>
           </a:p>
         </p:txBody>
       </p:sp>
       <p:pic>
         <p:nvPicPr>
-          <p:cNvPr id="18" name="Picture 17" descr="bisasam.png"/>
+          <p:cNvPr id="18" name="Picture 17" descr="glumanda.png"/>
           <p:cNvPicPr>
             <a:picLocks noChangeAspect="1"/>
           </p:cNvPicPr>
@@ -3657,7 +3665,7 @@
               <a:rPr sz="1400" b="0">
                 <a:latin typeface="BIZ UDPGothic"/>
               </a:rPr>
-              <a:t>Bisasam</a:t>
+              <a:t>Glumanda</a:t>
             </a:r>
           </a:p>
         </p:txBody>
@@ -3689,7 +3697,7 @@
               <a:rPr sz="2400" b="1">
                 <a:latin typeface="BIZ UDPGothic"/>
               </a:rPr>
-              <a:t>ふ し ぎ だ ね</a:t>
+              <a:t>ひ と か げ</a:t>
             </a:r>
           </a:p>
         </p:txBody>
@@ -3721,7 +3729,7 @@
               <a:rPr sz="1500" b="0">
                 <a:latin typeface="BIZ UDPGothic"/>
               </a:rPr>
-              <a:t>フシギダネ</a:t>
+              <a:t>ヒトカゲ</a:t>
             </a:r>
           </a:p>
         </p:txBody>
@@ -3753,7 +3761,7 @@
               <a:rPr sz="900" b="0">
                 <a:latin typeface="BIZ UDPGothic"/>
               </a:rPr>
-              <a:t>タイプ：くさ / どく</a:t>
+              <a:t>タイプ：ほのお</a:t>
             </a:r>
           </a:p>
         </p:txBody>
@@ -3824,14 +3832,14 @@
               <a:rPr sz="900" b="1">
                 <a:latin typeface="BIZ UDPGothic"/>
               </a:rPr>
-              <a:t>#016</a:t>
+              <a:t>#007</a:t>
             </a:r>
           </a:p>
         </p:txBody>
       </p:sp>
       <p:pic>
         <p:nvPicPr>
-          <p:cNvPr id="25" name="Picture 24" descr="taubsi.png"/>
+          <p:cNvPr id="25" name="Picture 24" descr="schiggy.png"/>
           <p:cNvPicPr>
             <a:picLocks noChangeAspect="1"/>
           </p:cNvPicPr>
@@ -3880,7 +3888,7 @@
               <a:rPr sz="1400" b="0">
                 <a:latin typeface="BIZ UDPGothic"/>
               </a:rPr>
-              <a:t>Taubsi</a:t>
+              <a:t>Schiggy</a:t>
             </a:r>
           </a:p>
         </p:txBody>
@@ -3912,7 +3920,7 @@
               <a:rPr sz="2400" b="1">
                 <a:latin typeface="BIZ UDPGothic"/>
               </a:rPr>
-              <a:t>ぽ っ ぽ</a:t>
+              <a:t>ぜ に が め</a:t>
             </a:r>
           </a:p>
         </p:txBody>
@@ -3944,7 +3952,7 @@
               <a:rPr sz="1500" b="0">
                 <a:latin typeface="BIZ UDPGothic"/>
               </a:rPr>
-              <a:t>ポッポ</a:t>
+              <a:t>ゼニガメ</a:t>
             </a:r>
           </a:p>
         </p:txBody>
@@ -3976,7 +3984,248 @@
               <a:rPr sz="900" b="0">
                 <a:latin typeface="BIZ UDPGothic"/>
               </a:rPr>
-              <a:t>タイプ：ノーマル / ひこう</a:t>
+              <a:t>タイプ：みず</a:t>
+            </a:r>
+          </a:p>
+        </p:txBody>
+      </p:sp>
+    </p:spTree>
+  </p:cSld>
+  <p:clrMapOvr>
+    <a:masterClrMapping/>
+  </p:clrMapOvr>
+</p:sld>
+</file>
+
+<file path=ppt/slides/slide10.xml><?xml version="1.0" encoding="utf-8"?>
+<p:sld xmlns:a="http://schemas.openxmlformats.org/drawingml/2006/main" xmlns:p="http://schemas.openxmlformats.org/presentationml/2006/main" xmlns:r="http://schemas.openxmlformats.org/officeDocument/2006/relationships">
+  <p:cSld>
+    <p:spTree>
+      <p:nvGrpSpPr>
+        <p:cNvPr id="1" name=""/>
+        <p:cNvGrpSpPr/>
+        <p:nvPr/>
+      </p:nvGrpSpPr>
+      <p:grpSpPr/>
+      <p:sp>
+        <p:nvSpPr>
+          <p:cNvPr id="2" name="Rounded Rectangle 1"/>
+          <p:cNvSpPr/>
+          <p:nvPr/>
+        </p:nvSpPr>
+        <p:spPr>
+          <a:xfrm>
+            <a:off x="411480" y="320040"/>
+            <a:ext cx="3231360" cy="4888800"/>
+          </a:xfrm>
+          <a:prstGeom prst="roundRect">
+            <a:avLst/>
+          </a:prstGeom>
+          <a:noFill/>
+          <a:ln w="10160"/>
+        </p:spPr>
+        <p:style>
+          <a:lnRef idx="1">
+            <a:schemeClr val="accent1"/>
+          </a:lnRef>
+          <a:fillRef idx="3">
+            <a:schemeClr val="accent1"/>
+          </a:fillRef>
+          <a:effectRef idx="2">
+            <a:schemeClr val="accent1"/>
+          </a:effectRef>
+          <a:fontRef idx="minor">
+            <a:schemeClr val="lt1"/>
+          </a:fontRef>
+        </p:style>
+        <p:txBody>
+          <a:bodyPr rtlCol="0" anchor="ctr"/>
+          <a:lstStyle/>
+          <a:p>
+            <a:pPr algn="ctr"/>
+          </a:p>
+        </p:txBody>
+      </p:sp>
+      <p:sp>
+        <p:nvSpPr>
+          <p:cNvPr id="3" name="TextBox 2"/>
+          <p:cNvSpPr txBox="1"/>
+          <p:nvPr/>
+        </p:nvSpPr>
+        <p:spPr>
+          <a:xfrm>
+            <a:off x="484632" y="658368"/>
+            <a:ext cx="502920" cy="228600"/>
+          </a:xfrm>
+          <a:prstGeom prst="rect">
+            <a:avLst/>
+          </a:prstGeom>
+          <a:noFill/>
+        </p:spPr>
+        <p:txBody>
+          <a:bodyPr wrap="none">
+            <a:spAutoFit/>
+          </a:bodyPr>
+          <a:lstStyle/>
+          <a:p>
+            <a:pPr algn="ctr"/>
+            <a:r>
+              <a:rPr sz="900" b="1">
+                <a:latin typeface="BIZ UDPGothic"/>
+              </a:rPr>
+              <a:t>#382</a:t>
+            </a:r>
+          </a:p>
+        </p:txBody>
+      </p:sp>
+      <p:pic>
+        <p:nvPicPr>
+          <p:cNvPr id="4" name="Picture 3" descr="kyogre.png"/>
+          <p:cNvPicPr>
+            <a:picLocks noChangeAspect="1"/>
+          </p:cNvPicPr>
+          <p:nvPr/>
+        </p:nvPicPr>
+        <p:blipFill>
+          <a:blip r:embed="rId2"/>
+          <a:stretch>
+            <a:fillRect/>
+          </a:stretch>
+        </p:blipFill>
+        <p:spPr>
+          <a:xfrm>
+            <a:off x="1044180" y="1005840"/>
+            <a:ext cx="1965960" cy="1965960"/>
+          </a:xfrm>
+          <a:prstGeom prst="rect">
+            <a:avLst/>
+          </a:prstGeom>
+        </p:spPr>
+      </p:pic>
+      <p:sp>
+        <p:nvSpPr>
+          <p:cNvPr id="5" name="TextBox 4"/>
+          <p:cNvSpPr txBox="1"/>
+          <p:nvPr/>
+        </p:nvSpPr>
+        <p:spPr>
+          <a:xfrm>
+            <a:off x="521208" y="3291840"/>
+            <a:ext cx="3011904" cy="274320"/>
+          </a:xfrm>
+          <a:prstGeom prst="rect">
+            <a:avLst/>
+          </a:prstGeom>
+          <a:noFill/>
+        </p:spPr>
+        <p:txBody>
+          <a:bodyPr wrap="none">
+            <a:spAutoFit/>
+          </a:bodyPr>
+          <a:lstStyle/>
+          <a:p>
+            <a:pPr algn="ctr"/>
+            <a:r>
+              <a:rPr sz="1400" b="0">
+                <a:latin typeface="BIZ UDPGothic"/>
+              </a:rPr>
+              <a:t>Kyogre</a:t>
+            </a:r>
+          </a:p>
+        </p:txBody>
+      </p:sp>
+      <p:sp>
+        <p:nvSpPr>
+          <p:cNvPr id="6" name="TextBox 5"/>
+          <p:cNvSpPr txBox="1"/>
+          <p:nvPr/>
+        </p:nvSpPr>
+        <p:spPr>
+          <a:xfrm>
+            <a:off x="502920" y="3703320"/>
+            <a:ext cx="3048480" cy="384048"/>
+          </a:xfrm>
+          <a:prstGeom prst="rect">
+            <a:avLst/>
+          </a:prstGeom>
+          <a:noFill/>
+        </p:spPr>
+        <p:txBody>
+          <a:bodyPr wrap="none">
+            <a:spAutoFit/>
+          </a:bodyPr>
+          <a:lstStyle/>
+          <a:p>
+            <a:pPr algn="ctr"/>
+            <a:r>
+              <a:rPr sz="2400" b="1">
+                <a:latin typeface="BIZ UDPGothic"/>
+              </a:rPr>
+              <a:t>か い お ー が</a:t>
+            </a:r>
+          </a:p>
+        </p:txBody>
+      </p:sp>
+      <p:sp>
+        <p:nvSpPr>
+          <p:cNvPr id="7" name="TextBox 6"/>
+          <p:cNvSpPr txBox="1"/>
+          <p:nvPr/>
+        </p:nvSpPr>
+        <p:spPr>
+          <a:xfrm>
+            <a:off x="502920" y="4251960"/>
+            <a:ext cx="3048480" cy="320040"/>
+          </a:xfrm>
+          <a:prstGeom prst="rect">
+            <a:avLst/>
+          </a:prstGeom>
+          <a:noFill/>
+        </p:spPr>
+        <p:txBody>
+          <a:bodyPr wrap="none">
+            <a:spAutoFit/>
+          </a:bodyPr>
+          <a:lstStyle/>
+          <a:p>
+            <a:pPr algn="ctr"/>
+            <a:r>
+              <a:rPr sz="1500" b="0">
+                <a:latin typeface="BIZ UDPGothic"/>
+              </a:rPr>
+              <a:t>カイオーガ</a:t>
+            </a:r>
+          </a:p>
+        </p:txBody>
+      </p:sp>
+      <p:sp>
+        <p:nvSpPr>
+          <p:cNvPr id="8" name="TextBox 7"/>
+          <p:cNvSpPr txBox="1"/>
+          <p:nvPr/>
+        </p:nvSpPr>
+        <p:spPr>
+          <a:xfrm>
+            <a:off x="502920" y="4617720"/>
+            <a:ext cx="3048480" cy="228600"/>
+          </a:xfrm>
+          <a:prstGeom prst="rect">
+            <a:avLst/>
+          </a:prstGeom>
+          <a:noFill/>
+        </p:spPr>
+        <p:txBody>
+          <a:bodyPr wrap="none">
+            <a:spAutoFit/>
+          </a:bodyPr>
+          <a:lstStyle/>
+          <a:p>
+            <a:pPr algn="ctr"/>
+            <a:r>
+              <a:rPr sz="900" b="0">
+                <a:latin typeface="BIZ UDPGothic"/>
+              </a:rPr>
+              <a:t>タイプ：みず</a:t>
             </a:r>
           </a:p>
         </p:txBody>
@@ -4065,14 +4314,14 @@
               <a:rPr sz="900" b="1">
                 <a:latin typeface="BIZ UDPGothic"/>
               </a:rPr>
-              <a:t>#532</a:t>
+              <a:t>#016</a:t>
             </a:r>
           </a:p>
         </p:txBody>
       </p:sp>
       <p:pic>
         <p:nvPicPr>
-          <p:cNvPr id="4" name="Picture 3" descr="praktibalk.png"/>
+          <p:cNvPr id="4" name="Picture 3" descr="taubsi.png"/>
           <p:cNvPicPr>
             <a:picLocks noChangeAspect="1"/>
           </p:cNvPicPr>
@@ -4121,7 +4370,7 @@
               <a:rPr sz="1400" b="0">
                 <a:latin typeface="BIZ UDPGothic"/>
               </a:rPr>
-              <a:t>Praktibalk</a:t>
+              <a:t>Taubsi</a:t>
             </a:r>
           </a:p>
         </p:txBody>
@@ -4153,7 +4402,7 @@
               <a:rPr sz="2400" b="1">
                 <a:latin typeface="BIZ UDPGothic"/>
               </a:rPr>
-              <a:t>ど っ こ ら ー</a:t>
+              <a:t>ぽ っ ぽ</a:t>
             </a:r>
           </a:p>
         </p:txBody>
@@ -4185,7 +4434,7 @@
               <a:rPr sz="1500" b="0">
                 <a:latin typeface="BIZ UDPGothic"/>
               </a:rPr>
-              <a:t>ドッコラー</a:t>
+              <a:t>ポッポ</a:t>
             </a:r>
           </a:p>
         </p:txBody>
@@ -4217,7 +4466,7 @@
               <a:rPr sz="900" b="0">
                 <a:latin typeface="BIZ UDPGothic"/>
               </a:rPr>
-              <a:t>タイプ：かくとう</a:t>
+              <a:t>タイプ：ノーマル / ひこう</a:t>
             </a:r>
           </a:p>
         </p:txBody>
@@ -4288,14 +4537,14 @@
               <a:rPr sz="900" b="1">
                 <a:latin typeface="BIZ UDPGothic"/>
               </a:rPr>
-              <a:t>#123</a:t>
+              <a:t>#017</a:t>
             </a:r>
           </a:p>
         </p:txBody>
       </p:sp>
       <p:pic>
         <p:nvPicPr>
-          <p:cNvPr id="11" name="Picture 10" descr="sichlor.png"/>
+          <p:cNvPr id="11" name="Picture 10" descr="tauboga.png"/>
           <p:cNvPicPr>
             <a:picLocks noChangeAspect="1"/>
           </p:cNvPicPr>
@@ -4344,7 +4593,7 @@
               <a:rPr sz="1400" b="0">
                 <a:latin typeface="BIZ UDPGothic"/>
               </a:rPr>
-              <a:t>Sichlor</a:t>
+              <a:t>Tauboga</a:t>
             </a:r>
           </a:p>
         </p:txBody>
@@ -4376,7 +4625,7 @@
               <a:rPr sz="2400" b="1">
                 <a:latin typeface="BIZ UDPGothic"/>
               </a:rPr>
-              <a:t>す と ら い く</a:t>
+              <a:t>ぴ じ ょ ん</a:t>
             </a:r>
           </a:p>
         </p:txBody>
@@ -4408,7 +4657,7 @@
               <a:rPr sz="1500" b="0">
                 <a:latin typeface="BIZ UDPGothic"/>
               </a:rPr>
-              <a:t>ストライク</a:t>
+              <a:t>ピジョン</a:t>
             </a:r>
           </a:p>
         </p:txBody>
@@ -4440,7 +4689,7 @@
               <a:rPr sz="900" b="0">
                 <a:latin typeface="BIZ UDPGothic"/>
               </a:rPr>
-              <a:t>タイプ：むし / ひこう</a:t>
+              <a:t>タイプ：ノーマル / ひこう</a:t>
             </a:r>
           </a:p>
         </p:txBody>
@@ -4511,14 +4760,14 @@
               <a:rPr sz="900" b="1">
                 <a:latin typeface="BIZ UDPGothic"/>
               </a:rPr>
-              <a:t>#107</a:t>
+              <a:t>#043</a:t>
             </a:r>
           </a:p>
         </p:txBody>
       </p:sp>
       <p:pic>
         <p:nvPicPr>
-          <p:cNvPr id="18" name="Picture 17" descr="nockchan.png"/>
+          <p:cNvPr id="18" name="Picture 17" descr="myrapla.png"/>
           <p:cNvPicPr>
             <a:picLocks noChangeAspect="1"/>
           </p:cNvPicPr>
@@ -4567,7 +4816,7 @@
               <a:rPr sz="1400" b="0">
                 <a:latin typeface="BIZ UDPGothic"/>
               </a:rPr>
-              <a:t>Nockchan</a:t>
+              <a:t>Myrapla</a:t>
             </a:r>
           </a:p>
         </p:txBody>
@@ -4599,7 +4848,7 @@
               <a:rPr sz="2400" b="1">
                 <a:latin typeface="BIZ UDPGothic"/>
               </a:rPr>
-              <a:t>え び わ ら ー</a:t>
+              <a:t>な ぞ の く さ</a:t>
             </a:r>
           </a:p>
         </p:txBody>
@@ -4631,7 +4880,7 @@
               <a:rPr sz="1500" b="0">
                 <a:latin typeface="BIZ UDPGothic"/>
               </a:rPr>
-              <a:t>エビワラー</a:t>
+              <a:t>ナゾノクサ</a:t>
             </a:r>
           </a:p>
         </p:txBody>
@@ -4663,7 +4912,7 @@
               <a:rPr sz="900" b="0">
                 <a:latin typeface="BIZ UDPGothic"/>
               </a:rPr>
-              <a:t>タイプ：かくとう</a:t>
+              <a:t>タイプ：くさ / どく</a:t>
             </a:r>
           </a:p>
         </p:txBody>
@@ -4734,14 +4983,14 @@
               <a:rPr sz="900" b="1">
                 <a:latin typeface="BIZ UDPGothic"/>
               </a:rPr>
-              <a:t>#529</a:t>
+              <a:t>#048</a:t>
             </a:r>
           </a:p>
         </p:txBody>
       </p:sp>
       <p:pic>
         <p:nvPicPr>
-          <p:cNvPr id="25" name="Picture 24" descr="moguryu.png"/>
+          <p:cNvPr id="25" name="Picture 24" descr="bluzuk.png"/>
           <p:cNvPicPr>
             <a:picLocks noChangeAspect="1"/>
           </p:cNvPicPr>
@@ -4790,7 +5039,7 @@
               <a:rPr sz="1400" b="0">
                 <a:latin typeface="BIZ UDPGothic"/>
               </a:rPr>
-              <a:t>Rotomurf</a:t>
+              <a:t>Bluzuk</a:t>
             </a:r>
           </a:p>
         </p:txBody>
@@ -4822,7 +5071,7 @@
               <a:rPr sz="2400" b="1">
                 <a:latin typeface="BIZ UDPGothic"/>
               </a:rPr>
-              <a:t>も ぐ り ゅ ー</a:t>
+              <a:t>こ ん ぱ ん</a:t>
             </a:r>
           </a:p>
         </p:txBody>
@@ -4854,7 +5103,7 @@
               <a:rPr sz="1500" b="0">
                 <a:latin typeface="BIZ UDPGothic"/>
               </a:rPr>
-              <a:t>モグリュー</a:t>
+              <a:t>コンパン</a:t>
             </a:r>
           </a:p>
         </p:txBody>
@@ -4886,7 +5135,6377 @@
               <a:rPr sz="900" b="0">
                 <a:latin typeface="BIZ UDPGothic"/>
               </a:rPr>
+              <a:t>タイプ：むし / どく</a:t>
+            </a:r>
+          </a:p>
+        </p:txBody>
+      </p:sp>
+    </p:spTree>
+  </p:cSld>
+  <p:clrMapOvr>
+    <a:masterClrMapping/>
+  </p:clrMapOvr>
+</p:sld>
+</file>
+
+<file path=ppt/slides/slide3.xml><?xml version="1.0" encoding="utf-8"?>
+<p:sld xmlns:a="http://schemas.openxmlformats.org/drawingml/2006/main" xmlns:p="http://schemas.openxmlformats.org/presentationml/2006/main" xmlns:r="http://schemas.openxmlformats.org/officeDocument/2006/relationships">
+  <p:cSld>
+    <p:spTree>
+      <p:nvGrpSpPr>
+        <p:cNvPr id="1" name=""/>
+        <p:cNvGrpSpPr/>
+        <p:nvPr/>
+      </p:nvGrpSpPr>
+      <p:grpSpPr/>
+      <p:sp>
+        <p:nvSpPr>
+          <p:cNvPr id="2" name="Rounded Rectangle 1"/>
+          <p:cNvSpPr/>
+          <p:nvPr/>
+        </p:nvSpPr>
+        <p:spPr>
+          <a:xfrm>
+            <a:off x="411480" y="320040"/>
+            <a:ext cx="3231360" cy="4888800"/>
+          </a:xfrm>
+          <a:prstGeom prst="roundRect">
+            <a:avLst/>
+          </a:prstGeom>
+          <a:noFill/>
+          <a:ln w="10160"/>
+        </p:spPr>
+        <p:style>
+          <a:lnRef idx="1">
+            <a:schemeClr val="accent1"/>
+          </a:lnRef>
+          <a:fillRef idx="3">
+            <a:schemeClr val="accent1"/>
+          </a:fillRef>
+          <a:effectRef idx="2">
+            <a:schemeClr val="accent1"/>
+          </a:effectRef>
+          <a:fontRef idx="minor">
+            <a:schemeClr val="lt1"/>
+          </a:fontRef>
+        </p:style>
+        <p:txBody>
+          <a:bodyPr rtlCol="0" anchor="ctr"/>
+          <a:lstStyle/>
+          <a:p>
+            <a:pPr algn="ctr"/>
+          </a:p>
+        </p:txBody>
+      </p:sp>
+      <p:sp>
+        <p:nvSpPr>
+          <p:cNvPr id="3" name="TextBox 2"/>
+          <p:cNvSpPr txBox="1"/>
+          <p:nvPr/>
+        </p:nvSpPr>
+        <p:spPr>
+          <a:xfrm>
+            <a:off x="484632" y="658368"/>
+            <a:ext cx="502920" cy="228600"/>
+          </a:xfrm>
+          <a:prstGeom prst="rect">
+            <a:avLst/>
+          </a:prstGeom>
+          <a:noFill/>
+        </p:spPr>
+        <p:txBody>
+          <a:bodyPr wrap="none">
+            <a:spAutoFit/>
+          </a:bodyPr>
+          <a:lstStyle/>
+          <a:p>
+            <a:pPr algn="ctr"/>
+            <a:r>
+              <a:rPr sz="900" b="1">
+                <a:latin typeface="BIZ UDPGothic"/>
+              </a:rPr>
+              <a:t>#069</a:t>
+            </a:r>
+          </a:p>
+        </p:txBody>
+      </p:sp>
+      <p:pic>
+        <p:nvPicPr>
+          <p:cNvPr id="4" name="Picture 3" descr="knofensa.png"/>
+          <p:cNvPicPr>
+            <a:picLocks noChangeAspect="1"/>
+          </p:cNvPicPr>
+          <p:nvPr/>
+        </p:nvPicPr>
+        <p:blipFill>
+          <a:blip r:embed="rId2"/>
+          <a:stretch>
+            <a:fillRect/>
+          </a:stretch>
+        </p:blipFill>
+        <p:spPr>
+          <a:xfrm>
+            <a:off x="1044180" y="1005840"/>
+            <a:ext cx="1965960" cy="1965960"/>
+          </a:xfrm>
+          <a:prstGeom prst="rect">
+            <a:avLst/>
+          </a:prstGeom>
+        </p:spPr>
+      </p:pic>
+      <p:sp>
+        <p:nvSpPr>
+          <p:cNvPr id="5" name="TextBox 4"/>
+          <p:cNvSpPr txBox="1"/>
+          <p:nvPr/>
+        </p:nvSpPr>
+        <p:spPr>
+          <a:xfrm>
+            <a:off x="521208" y="3291840"/>
+            <a:ext cx="3011904" cy="274320"/>
+          </a:xfrm>
+          <a:prstGeom prst="rect">
+            <a:avLst/>
+          </a:prstGeom>
+          <a:noFill/>
+        </p:spPr>
+        <p:txBody>
+          <a:bodyPr wrap="none">
+            <a:spAutoFit/>
+          </a:bodyPr>
+          <a:lstStyle/>
+          <a:p>
+            <a:pPr algn="ctr"/>
+            <a:r>
+              <a:rPr sz="1400" b="0">
+                <a:latin typeface="BIZ UDPGothic"/>
+              </a:rPr>
+              <a:t>Knofensa</a:t>
+            </a:r>
+          </a:p>
+        </p:txBody>
+      </p:sp>
+      <p:sp>
+        <p:nvSpPr>
+          <p:cNvPr id="6" name="TextBox 5"/>
+          <p:cNvSpPr txBox="1"/>
+          <p:nvPr/>
+        </p:nvSpPr>
+        <p:spPr>
+          <a:xfrm>
+            <a:off x="502920" y="3703320"/>
+            <a:ext cx="3048480" cy="384048"/>
+          </a:xfrm>
+          <a:prstGeom prst="rect">
+            <a:avLst/>
+          </a:prstGeom>
+          <a:noFill/>
+        </p:spPr>
+        <p:txBody>
+          <a:bodyPr wrap="none">
+            <a:spAutoFit/>
+          </a:bodyPr>
+          <a:lstStyle/>
+          <a:p>
+            <a:pPr algn="ctr"/>
+            <a:r>
+              <a:rPr sz="2400" b="1">
+                <a:latin typeface="BIZ UDPGothic"/>
+              </a:rPr>
+              <a:t>ま だ つ ぼ み</a:t>
+            </a:r>
+          </a:p>
+        </p:txBody>
+      </p:sp>
+      <p:sp>
+        <p:nvSpPr>
+          <p:cNvPr id="7" name="TextBox 6"/>
+          <p:cNvSpPr txBox="1"/>
+          <p:nvPr/>
+        </p:nvSpPr>
+        <p:spPr>
+          <a:xfrm>
+            <a:off x="502920" y="4251960"/>
+            <a:ext cx="3048480" cy="320040"/>
+          </a:xfrm>
+          <a:prstGeom prst="rect">
+            <a:avLst/>
+          </a:prstGeom>
+          <a:noFill/>
+        </p:spPr>
+        <p:txBody>
+          <a:bodyPr wrap="none">
+            <a:spAutoFit/>
+          </a:bodyPr>
+          <a:lstStyle/>
+          <a:p>
+            <a:pPr algn="ctr"/>
+            <a:r>
+              <a:rPr sz="1500" b="0">
+                <a:latin typeface="BIZ UDPGothic"/>
+              </a:rPr>
+              <a:t>マダツボミ</a:t>
+            </a:r>
+          </a:p>
+        </p:txBody>
+      </p:sp>
+      <p:sp>
+        <p:nvSpPr>
+          <p:cNvPr id="8" name="TextBox 7"/>
+          <p:cNvSpPr txBox="1"/>
+          <p:nvPr/>
+        </p:nvSpPr>
+        <p:spPr>
+          <a:xfrm>
+            <a:off x="502920" y="4617720"/>
+            <a:ext cx="3048480" cy="228600"/>
+          </a:xfrm>
+          <a:prstGeom prst="rect">
+            <a:avLst/>
+          </a:prstGeom>
+          <a:noFill/>
+        </p:spPr>
+        <p:txBody>
+          <a:bodyPr wrap="none">
+            <a:spAutoFit/>
+          </a:bodyPr>
+          <a:lstStyle/>
+          <a:p>
+            <a:pPr algn="ctr"/>
+            <a:r>
+              <a:rPr sz="900" b="0">
+                <a:latin typeface="BIZ UDPGothic"/>
+              </a:rPr>
+              <a:t>タイプ：くさ / どく</a:t>
+            </a:r>
+          </a:p>
+        </p:txBody>
+      </p:sp>
+      <p:sp>
+        <p:nvSpPr>
+          <p:cNvPr id="9" name="Rounded Rectangle 8"/>
+          <p:cNvSpPr/>
+          <p:nvPr/>
+        </p:nvSpPr>
+        <p:spPr>
+          <a:xfrm>
+            <a:off x="3917160" y="320040"/>
+            <a:ext cx="3231360" cy="4888800"/>
+          </a:xfrm>
+          <a:prstGeom prst="roundRect">
+            <a:avLst/>
+          </a:prstGeom>
+          <a:noFill/>
+          <a:ln w="10160"/>
+        </p:spPr>
+        <p:style>
+          <a:lnRef idx="1">
+            <a:schemeClr val="accent1"/>
+          </a:lnRef>
+          <a:fillRef idx="3">
+            <a:schemeClr val="accent1"/>
+          </a:fillRef>
+          <a:effectRef idx="2">
+            <a:schemeClr val="accent1"/>
+          </a:effectRef>
+          <a:fontRef idx="minor">
+            <a:schemeClr val="lt1"/>
+          </a:fontRef>
+        </p:style>
+        <p:txBody>
+          <a:bodyPr rtlCol="0" anchor="ctr"/>
+          <a:lstStyle/>
+          <a:p>
+            <a:pPr algn="ctr"/>
+          </a:p>
+        </p:txBody>
+      </p:sp>
+      <p:sp>
+        <p:nvSpPr>
+          <p:cNvPr id="10" name="TextBox 9"/>
+          <p:cNvSpPr txBox="1"/>
+          <p:nvPr/>
+        </p:nvSpPr>
+        <p:spPr>
+          <a:xfrm>
+            <a:off x="3990312" y="658368"/>
+            <a:ext cx="502920" cy="228600"/>
+          </a:xfrm>
+          <a:prstGeom prst="rect">
+            <a:avLst/>
+          </a:prstGeom>
+          <a:noFill/>
+        </p:spPr>
+        <p:txBody>
+          <a:bodyPr wrap="none">
+            <a:spAutoFit/>
+          </a:bodyPr>
+          <a:lstStyle/>
+          <a:p>
+            <a:pPr algn="ctr"/>
+            <a:r>
+              <a:rPr sz="900" b="1">
+                <a:latin typeface="BIZ UDPGothic"/>
+              </a:rPr>
+              <a:t>#079</a:t>
+            </a:r>
+          </a:p>
+        </p:txBody>
+      </p:sp>
+      <p:pic>
+        <p:nvPicPr>
+          <p:cNvPr id="11" name="Picture 10" descr="flegmon.png"/>
+          <p:cNvPicPr>
+            <a:picLocks noChangeAspect="1"/>
+          </p:cNvPicPr>
+          <p:nvPr/>
+        </p:nvPicPr>
+        <p:blipFill>
+          <a:blip r:embed="rId3"/>
+          <a:stretch>
+            <a:fillRect/>
+          </a:stretch>
+        </p:blipFill>
+        <p:spPr>
+          <a:xfrm>
+            <a:off x="4549860" y="1005840"/>
+            <a:ext cx="1965960" cy="1965960"/>
+          </a:xfrm>
+          <a:prstGeom prst="rect">
+            <a:avLst/>
+          </a:prstGeom>
+        </p:spPr>
+      </p:pic>
+      <p:sp>
+        <p:nvSpPr>
+          <p:cNvPr id="12" name="TextBox 11"/>
+          <p:cNvSpPr txBox="1"/>
+          <p:nvPr/>
+        </p:nvSpPr>
+        <p:spPr>
+          <a:xfrm>
+            <a:off x="4026888" y="3291840"/>
+            <a:ext cx="3011904" cy="274320"/>
+          </a:xfrm>
+          <a:prstGeom prst="rect">
+            <a:avLst/>
+          </a:prstGeom>
+          <a:noFill/>
+        </p:spPr>
+        <p:txBody>
+          <a:bodyPr wrap="none">
+            <a:spAutoFit/>
+          </a:bodyPr>
+          <a:lstStyle/>
+          <a:p>
+            <a:pPr algn="ctr"/>
+            <a:r>
+              <a:rPr sz="1400" b="0">
+                <a:latin typeface="BIZ UDPGothic"/>
+              </a:rPr>
+              <a:t>Flegmon</a:t>
+            </a:r>
+          </a:p>
+        </p:txBody>
+      </p:sp>
+      <p:sp>
+        <p:nvSpPr>
+          <p:cNvPr id="13" name="TextBox 12"/>
+          <p:cNvSpPr txBox="1"/>
+          <p:nvPr/>
+        </p:nvSpPr>
+        <p:spPr>
+          <a:xfrm>
+            <a:off x="4008600" y="3703320"/>
+            <a:ext cx="3048480" cy="384048"/>
+          </a:xfrm>
+          <a:prstGeom prst="rect">
+            <a:avLst/>
+          </a:prstGeom>
+          <a:noFill/>
+        </p:spPr>
+        <p:txBody>
+          <a:bodyPr wrap="none">
+            <a:spAutoFit/>
+          </a:bodyPr>
+          <a:lstStyle/>
+          <a:p>
+            <a:pPr algn="ctr"/>
+            <a:r>
+              <a:rPr sz="2400" b="1">
+                <a:latin typeface="BIZ UDPGothic"/>
+              </a:rPr>
+              <a:t>や ど ん</a:t>
+            </a:r>
+          </a:p>
+        </p:txBody>
+      </p:sp>
+      <p:sp>
+        <p:nvSpPr>
+          <p:cNvPr id="14" name="TextBox 13"/>
+          <p:cNvSpPr txBox="1"/>
+          <p:nvPr/>
+        </p:nvSpPr>
+        <p:spPr>
+          <a:xfrm>
+            <a:off x="4008600" y="4251960"/>
+            <a:ext cx="3048480" cy="320040"/>
+          </a:xfrm>
+          <a:prstGeom prst="rect">
+            <a:avLst/>
+          </a:prstGeom>
+          <a:noFill/>
+        </p:spPr>
+        <p:txBody>
+          <a:bodyPr wrap="none">
+            <a:spAutoFit/>
+          </a:bodyPr>
+          <a:lstStyle/>
+          <a:p>
+            <a:pPr algn="ctr"/>
+            <a:r>
+              <a:rPr sz="1500" b="0">
+                <a:latin typeface="BIZ UDPGothic"/>
+              </a:rPr>
+              <a:t>ヤドン</a:t>
+            </a:r>
+          </a:p>
+        </p:txBody>
+      </p:sp>
+      <p:sp>
+        <p:nvSpPr>
+          <p:cNvPr id="15" name="TextBox 14"/>
+          <p:cNvSpPr txBox="1"/>
+          <p:nvPr/>
+        </p:nvSpPr>
+        <p:spPr>
+          <a:xfrm>
+            <a:off x="4008600" y="4617720"/>
+            <a:ext cx="3048480" cy="228600"/>
+          </a:xfrm>
+          <a:prstGeom prst="rect">
+            <a:avLst/>
+          </a:prstGeom>
+          <a:noFill/>
+        </p:spPr>
+        <p:txBody>
+          <a:bodyPr wrap="none">
+            <a:spAutoFit/>
+          </a:bodyPr>
+          <a:lstStyle/>
+          <a:p>
+            <a:pPr algn="ctr"/>
+            <a:r>
+              <a:rPr sz="900" b="0">
+                <a:latin typeface="BIZ UDPGothic"/>
+              </a:rPr>
+              <a:t>タイプ：みず / エスパー</a:t>
+            </a:r>
+          </a:p>
+        </p:txBody>
+      </p:sp>
+      <p:sp>
+        <p:nvSpPr>
+          <p:cNvPr id="16" name="Rounded Rectangle 15"/>
+          <p:cNvSpPr/>
+          <p:nvPr/>
+        </p:nvSpPr>
+        <p:spPr>
+          <a:xfrm>
+            <a:off x="411480" y="5483160"/>
+            <a:ext cx="3231360" cy="4888800"/>
+          </a:xfrm>
+          <a:prstGeom prst="roundRect">
+            <a:avLst/>
+          </a:prstGeom>
+          <a:noFill/>
+          <a:ln w="10160"/>
+        </p:spPr>
+        <p:style>
+          <a:lnRef idx="1">
+            <a:schemeClr val="accent1"/>
+          </a:lnRef>
+          <a:fillRef idx="3">
+            <a:schemeClr val="accent1"/>
+          </a:fillRef>
+          <a:effectRef idx="2">
+            <a:schemeClr val="accent1"/>
+          </a:effectRef>
+          <a:fontRef idx="minor">
+            <a:schemeClr val="lt1"/>
+          </a:fontRef>
+        </p:style>
+        <p:txBody>
+          <a:bodyPr rtlCol="0" anchor="ctr"/>
+          <a:lstStyle/>
+          <a:p>
+            <a:pPr algn="ctr"/>
+          </a:p>
+        </p:txBody>
+      </p:sp>
+      <p:sp>
+        <p:nvSpPr>
+          <p:cNvPr id="17" name="TextBox 16"/>
+          <p:cNvSpPr txBox="1"/>
+          <p:nvPr/>
+        </p:nvSpPr>
+        <p:spPr>
+          <a:xfrm>
+            <a:off x="484632" y="5821488"/>
+            <a:ext cx="502920" cy="228600"/>
+          </a:xfrm>
+          <a:prstGeom prst="rect">
+            <a:avLst/>
+          </a:prstGeom>
+          <a:noFill/>
+        </p:spPr>
+        <p:txBody>
+          <a:bodyPr wrap="none">
+            <a:spAutoFit/>
+          </a:bodyPr>
+          <a:lstStyle/>
+          <a:p>
+            <a:pPr algn="ctr"/>
+            <a:r>
+              <a:rPr sz="900" b="1">
+                <a:latin typeface="BIZ UDPGothic"/>
+              </a:rPr>
+              <a:t>#095</a:t>
+            </a:r>
+          </a:p>
+        </p:txBody>
+      </p:sp>
+      <p:pic>
+        <p:nvPicPr>
+          <p:cNvPr id="18" name="Picture 17" descr="onix.png"/>
+          <p:cNvPicPr>
+            <a:picLocks noChangeAspect="1"/>
+          </p:cNvPicPr>
+          <p:nvPr/>
+        </p:nvPicPr>
+        <p:blipFill>
+          <a:blip r:embed="rId4"/>
+          <a:stretch>
+            <a:fillRect/>
+          </a:stretch>
+        </p:blipFill>
+        <p:spPr>
+          <a:xfrm>
+            <a:off x="1044180" y="6168960"/>
+            <a:ext cx="1965960" cy="1965960"/>
+          </a:xfrm>
+          <a:prstGeom prst="rect">
+            <a:avLst/>
+          </a:prstGeom>
+        </p:spPr>
+      </p:pic>
+      <p:sp>
+        <p:nvSpPr>
+          <p:cNvPr id="19" name="TextBox 18"/>
+          <p:cNvSpPr txBox="1"/>
+          <p:nvPr/>
+        </p:nvSpPr>
+        <p:spPr>
+          <a:xfrm>
+            <a:off x="521208" y="8454960"/>
+            <a:ext cx="3011904" cy="274320"/>
+          </a:xfrm>
+          <a:prstGeom prst="rect">
+            <a:avLst/>
+          </a:prstGeom>
+          <a:noFill/>
+        </p:spPr>
+        <p:txBody>
+          <a:bodyPr wrap="none">
+            <a:spAutoFit/>
+          </a:bodyPr>
+          <a:lstStyle/>
+          <a:p>
+            <a:pPr algn="ctr"/>
+            <a:r>
+              <a:rPr sz="1400" b="0">
+                <a:latin typeface="BIZ UDPGothic"/>
+              </a:rPr>
+              <a:t>Onix</a:t>
+            </a:r>
+          </a:p>
+        </p:txBody>
+      </p:sp>
+      <p:sp>
+        <p:nvSpPr>
+          <p:cNvPr id="20" name="TextBox 19"/>
+          <p:cNvSpPr txBox="1"/>
+          <p:nvPr/>
+        </p:nvSpPr>
+        <p:spPr>
+          <a:xfrm>
+            <a:off x="502920" y="8866440"/>
+            <a:ext cx="3048480" cy="384048"/>
+          </a:xfrm>
+          <a:prstGeom prst="rect">
+            <a:avLst/>
+          </a:prstGeom>
+          <a:noFill/>
+        </p:spPr>
+        <p:txBody>
+          <a:bodyPr wrap="none">
+            <a:spAutoFit/>
+          </a:bodyPr>
+          <a:lstStyle/>
+          <a:p>
+            <a:pPr algn="ctr"/>
+            <a:r>
+              <a:rPr sz="2400" b="1">
+                <a:latin typeface="BIZ UDPGothic"/>
+              </a:rPr>
+              <a:t>い わ ー く</a:t>
+            </a:r>
+          </a:p>
+        </p:txBody>
+      </p:sp>
+      <p:sp>
+        <p:nvSpPr>
+          <p:cNvPr id="21" name="TextBox 20"/>
+          <p:cNvSpPr txBox="1"/>
+          <p:nvPr/>
+        </p:nvSpPr>
+        <p:spPr>
+          <a:xfrm>
+            <a:off x="502920" y="9415080"/>
+            <a:ext cx="3048480" cy="320040"/>
+          </a:xfrm>
+          <a:prstGeom prst="rect">
+            <a:avLst/>
+          </a:prstGeom>
+          <a:noFill/>
+        </p:spPr>
+        <p:txBody>
+          <a:bodyPr wrap="none">
+            <a:spAutoFit/>
+          </a:bodyPr>
+          <a:lstStyle/>
+          <a:p>
+            <a:pPr algn="ctr"/>
+            <a:r>
+              <a:rPr sz="1500" b="0">
+                <a:latin typeface="BIZ UDPGothic"/>
+              </a:rPr>
+              <a:t>イワーク</a:t>
+            </a:r>
+          </a:p>
+        </p:txBody>
+      </p:sp>
+      <p:sp>
+        <p:nvSpPr>
+          <p:cNvPr id="22" name="TextBox 21"/>
+          <p:cNvSpPr txBox="1"/>
+          <p:nvPr/>
+        </p:nvSpPr>
+        <p:spPr>
+          <a:xfrm>
+            <a:off x="502920" y="9780840"/>
+            <a:ext cx="3048480" cy="228600"/>
+          </a:xfrm>
+          <a:prstGeom prst="rect">
+            <a:avLst/>
+          </a:prstGeom>
+          <a:noFill/>
+        </p:spPr>
+        <p:txBody>
+          <a:bodyPr wrap="none">
+            <a:spAutoFit/>
+          </a:bodyPr>
+          <a:lstStyle/>
+          <a:p>
+            <a:pPr algn="ctr"/>
+            <a:r>
+              <a:rPr sz="900" b="0">
+                <a:latin typeface="BIZ UDPGothic"/>
+              </a:rPr>
+              <a:t>タイプ：いわ / じめん</a:t>
+            </a:r>
+          </a:p>
+        </p:txBody>
+      </p:sp>
+      <p:sp>
+        <p:nvSpPr>
+          <p:cNvPr id="23" name="Rounded Rectangle 22"/>
+          <p:cNvSpPr/>
+          <p:nvPr/>
+        </p:nvSpPr>
+        <p:spPr>
+          <a:xfrm>
+            <a:off x="3917160" y="5483160"/>
+            <a:ext cx="3231360" cy="4888800"/>
+          </a:xfrm>
+          <a:prstGeom prst="roundRect">
+            <a:avLst/>
+          </a:prstGeom>
+          <a:noFill/>
+          <a:ln w="10160"/>
+        </p:spPr>
+        <p:style>
+          <a:lnRef idx="1">
+            <a:schemeClr val="accent1"/>
+          </a:lnRef>
+          <a:fillRef idx="3">
+            <a:schemeClr val="accent1"/>
+          </a:fillRef>
+          <a:effectRef idx="2">
+            <a:schemeClr val="accent1"/>
+          </a:effectRef>
+          <a:fontRef idx="minor">
+            <a:schemeClr val="lt1"/>
+          </a:fontRef>
+        </p:style>
+        <p:txBody>
+          <a:bodyPr rtlCol="0" anchor="ctr"/>
+          <a:lstStyle/>
+          <a:p>
+            <a:pPr algn="ctr"/>
+          </a:p>
+        </p:txBody>
+      </p:sp>
+      <p:sp>
+        <p:nvSpPr>
+          <p:cNvPr id="24" name="TextBox 23"/>
+          <p:cNvSpPr txBox="1"/>
+          <p:nvPr/>
+        </p:nvSpPr>
+        <p:spPr>
+          <a:xfrm>
+            <a:off x="3990312" y="5821488"/>
+            <a:ext cx="502920" cy="228600"/>
+          </a:xfrm>
+          <a:prstGeom prst="rect">
+            <a:avLst/>
+          </a:prstGeom>
+          <a:noFill/>
+        </p:spPr>
+        <p:txBody>
+          <a:bodyPr wrap="none">
+            <a:spAutoFit/>
+          </a:bodyPr>
+          <a:lstStyle/>
+          <a:p>
+            <a:pPr algn="ctr"/>
+            <a:r>
+              <a:rPr sz="900" b="1">
+                <a:latin typeface="BIZ UDPGothic"/>
+              </a:rPr>
+              <a:t>#107</a:t>
+            </a:r>
+          </a:p>
+        </p:txBody>
+      </p:sp>
+      <p:pic>
+        <p:nvPicPr>
+          <p:cNvPr id="25" name="Picture 24" descr="nockchan.png"/>
+          <p:cNvPicPr>
+            <a:picLocks noChangeAspect="1"/>
+          </p:cNvPicPr>
+          <p:nvPr/>
+        </p:nvPicPr>
+        <p:blipFill>
+          <a:blip r:embed="rId5"/>
+          <a:stretch>
+            <a:fillRect/>
+          </a:stretch>
+        </p:blipFill>
+        <p:spPr>
+          <a:xfrm>
+            <a:off x="4549860" y="6168960"/>
+            <a:ext cx="1965960" cy="1965960"/>
+          </a:xfrm>
+          <a:prstGeom prst="rect">
+            <a:avLst/>
+          </a:prstGeom>
+        </p:spPr>
+      </p:pic>
+      <p:sp>
+        <p:nvSpPr>
+          <p:cNvPr id="26" name="TextBox 25"/>
+          <p:cNvSpPr txBox="1"/>
+          <p:nvPr/>
+        </p:nvSpPr>
+        <p:spPr>
+          <a:xfrm>
+            <a:off x="4026888" y="8454960"/>
+            <a:ext cx="3011904" cy="274320"/>
+          </a:xfrm>
+          <a:prstGeom prst="rect">
+            <a:avLst/>
+          </a:prstGeom>
+          <a:noFill/>
+        </p:spPr>
+        <p:txBody>
+          <a:bodyPr wrap="none">
+            <a:spAutoFit/>
+          </a:bodyPr>
+          <a:lstStyle/>
+          <a:p>
+            <a:pPr algn="ctr"/>
+            <a:r>
+              <a:rPr sz="1400" b="0">
+                <a:latin typeface="BIZ UDPGothic"/>
+              </a:rPr>
+              <a:t>Nockchan</a:t>
+            </a:r>
+          </a:p>
+        </p:txBody>
+      </p:sp>
+      <p:sp>
+        <p:nvSpPr>
+          <p:cNvPr id="27" name="TextBox 26"/>
+          <p:cNvSpPr txBox="1"/>
+          <p:nvPr/>
+        </p:nvSpPr>
+        <p:spPr>
+          <a:xfrm>
+            <a:off x="4008600" y="8866440"/>
+            <a:ext cx="3048480" cy="384048"/>
+          </a:xfrm>
+          <a:prstGeom prst="rect">
+            <a:avLst/>
+          </a:prstGeom>
+          <a:noFill/>
+        </p:spPr>
+        <p:txBody>
+          <a:bodyPr wrap="none">
+            <a:spAutoFit/>
+          </a:bodyPr>
+          <a:lstStyle/>
+          <a:p>
+            <a:pPr algn="ctr"/>
+            <a:r>
+              <a:rPr sz="2400" b="1">
+                <a:latin typeface="BIZ UDPGothic"/>
+              </a:rPr>
+              <a:t>え び わ ら ー</a:t>
+            </a:r>
+          </a:p>
+        </p:txBody>
+      </p:sp>
+      <p:sp>
+        <p:nvSpPr>
+          <p:cNvPr id="28" name="TextBox 27"/>
+          <p:cNvSpPr txBox="1"/>
+          <p:nvPr/>
+        </p:nvSpPr>
+        <p:spPr>
+          <a:xfrm>
+            <a:off x="4008600" y="9415080"/>
+            <a:ext cx="3048480" cy="320040"/>
+          </a:xfrm>
+          <a:prstGeom prst="rect">
+            <a:avLst/>
+          </a:prstGeom>
+          <a:noFill/>
+        </p:spPr>
+        <p:txBody>
+          <a:bodyPr wrap="none">
+            <a:spAutoFit/>
+          </a:bodyPr>
+          <a:lstStyle/>
+          <a:p>
+            <a:pPr algn="ctr"/>
+            <a:r>
+              <a:rPr sz="1500" b="0">
+                <a:latin typeface="BIZ UDPGothic"/>
+              </a:rPr>
+              <a:t>エビワラー</a:t>
+            </a:r>
+          </a:p>
+        </p:txBody>
+      </p:sp>
+      <p:sp>
+        <p:nvSpPr>
+          <p:cNvPr id="29" name="TextBox 28"/>
+          <p:cNvSpPr txBox="1"/>
+          <p:nvPr/>
+        </p:nvSpPr>
+        <p:spPr>
+          <a:xfrm>
+            <a:off x="4008600" y="9780840"/>
+            <a:ext cx="3048480" cy="228600"/>
+          </a:xfrm>
+          <a:prstGeom prst="rect">
+            <a:avLst/>
+          </a:prstGeom>
+          <a:noFill/>
+        </p:spPr>
+        <p:txBody>
+          <a:bodyPr wrap="none">
+            <a:spAutoFit/>
+          </a:bodyPr>
+          <a:lstStyle/>
+          <a:p>
+            <a:pPr algn="ctr"/>
+            <a:r>
+              <a:rPr sz="900" b="0">
+                <a:latin typeface="BIZ UDPGothic"/>
+              </a:rPr>
+              <a:t>タイプ：かくとう</a:t>
+            </a:r>
+          </a:p>
+        </p:txBody>
+      </p:sp>
+    </p:spTree>
+  </p:cSld>
+  <p:clrMapOvr>
+    <a:masterClrMapping/>
+  </p:clrMapOvr>
+</p:sld>
+</file>
+
+<file path=ppt/slides/slide4.xml><?xml version="1.0" encoding="utf-8"?>
+<p:sld xmlns:a="http://schemas.openxmlformats.org/drawingml/2006/main" xmlns:p="http://schemas.openxmlformats.org/presentationml/2006/main" xmlns:r="http://schemas.openxmlformats.org/officeDocument/2006/relationships">
+  <p:cSld>
+    <p:spTree>
+      <p:nvGrpSpPr>
+        <p:cNvPr id="1" name=""/>
+        <p:cNvGrpSpPr/>
+        <p:nvPr/>
+      </p:nvGrpSpPr>
+      <p:grpSpPr/>
+      <p:sp>
+        <p:nvSpPr>
+          <p:cNvPr id="2" name="Rounded Rectangle 1"/>
+          <p:cNvSpPr/>
+          <p:nvPr/>
+        </p:nvSpPr>
+        <p:spPr>
+          <a:xfrm>
+            <a:off x="411480" y="320040"/>
+            <a:ext cx="3231360" cy="4888800"/>
+          </a:xfrm>
+          <a:prstGeom prst="roundRect">
+            <a:avLst/>
+          </a:prstGeom>
+          <a:noFill/>
+          <a:ln w="10160"/>
+        </p:spPr>
+        <p:style>
+          <a:lnRef idx="1">
+            <a:schemeClr val="accent1"/>
+          </a:lnRef>
+          <a:fillRef idx="3">
+            <a:schemeClr val="accent1"/>
+          </a:fillRef>
+          <a:effectRef idx="2">
+            <a:schemeClr val="accent1"/>
+          </a:effectRef>
+          <a:fontRef idx="minor">
+            <a:schemeClr val="lt1"/>
+          </a:fontRef>
+        </p:style>
+        <p:txBody>
+          <a:bodyPr rtlCol="0" anchor="ctr"/>
+          <a:lstStyle/>
+          <a:p>
+            <a:pPr algn="ctr"/>
+          </a:p>
+        </p:txBody>
+      </p:sp>
+      <p:sp>
+        <p:nvSpPr>
+          <p:cNvPr id="3" name="TextBox 2"/>
+          <p:cNvSpPr txBox="1"/>
+          <p:nvPr/>
+        </p:nvSpPr>
+        <p:spPr>
+          <a:xfrm>
+            <a:off x="484632" y="658368"/>
+            <a:ext cx="502920" cy="228600"/>
+          </a:xfrm>
+          <a:prstGeom prst="rect">
+            <a:avLst/>
+          </a:prstGeom>
+          <a:noFill/>
+        </p:spPr>
+        <p:txBody>
+          <a:bodyPr wrap="none">
+            <a:spAutoFit/>
+          </a:bodyPr>
+          <a:lstStyle/>
+          <a:p>
+            <a:pPr algn="ctr"/>
+            <a:r>
+              <a:rPr sz="900" b="1">
+                <a:latin typeface="BIZ UDPGothic"/>
+              </a:rPr>
+              <a:t>#465</a:t>
+            </a:r>
+          </a:p>
+        </p:txBody>
+      </p:sp>
+      <p:pic>
+        <p:nvPicPr>
+          <p:cNvPr id="4" name="Picture 3" descr="tangoloss.png"/>
+          <p:cNvPicPr>
+            <a:picLocks noChangeAspect="1"/>
+          </p:cNvPicPr>
+          <p:nvPr/>
+        </p:nvPicPr>
+        <p:blipFill>
+          <a:blip r:embed="rId2"/>
+          <a:stretch>
+            <a:fillRect/>
+          </a:stretch>
+        </p:blipFill>
+        <p:spPr>
+          <a:xfrm>
+            <a:off x="1044180" y="1005840"/>
+            <a:ext cx="1965960" cy="1965960"/>
+          </a:xfrm>
+          <a:prstGeom prst="rect">
+            <a:avLst/>
+          </a:prstGeom>
+        </p:spPr>
+      </p:pic>
+      <p:sp>
+        <p:nvSpPr>
+          <p:cNvPr id="5" name="TextBox 4"/>
+          <p:cNvSpPr txBox="1"/>
+          <p:nvPr/>
+        </p:nvSpPr>
+        <p:spPr>
+          <a:xfrm>
+            <a:off x="521208" y="3291840"/>
+            <a:ext cx="3011904" cy="274320"/>
+          </a:xfrm>
+          <a:prstGeom prst="rect">
+            <a:avLst/>
+          </a:prstGeom>
+          <a:noFill/>
+        </p:spPr>
+        <p:txBody>
+          <a:bodyPr wrap="none">
+            <a:spAutoFit/>
+          </a:bodyPr>
+          <a:lstStyle/>
+          <a:p>
+            <a:pPr algn="ctr"/>
+            <a:r>
+              <a:rPr sz="1400" b="0">
+                <a:latin typeface="BIZ UDPGothic"/>
+              </a:rPr>
+              <a:t>Tangoloss</a:t>
+            </a:r>
+          </a:p>
+        </p:txBody>
+      </p:sp>
+      <p:sp>
+        <p:nvSpPr>
+          <p:cNvPr id="6" name="TextBox 5"/>
+          <p:cNvSpPr txBox="1"/>
+          <p:nvPr/>
+        </p:nvSpPr>
+        <p:spPr>
+          <a:xfrm>
+            <a:off x="502920" y="3703320"/>
+            <a:ext cx="3048480" cy="384048"/>
+          </a:xfrm>
+          <a:prstGeom prst="rect">
+            <a:avLst/>
+          </a:prstGeom>
+          <a:noFill/>
+        </p:spPr>
+        <p:txBody>
+          <a:bodyPr wrap="none">
+            <a:spAutoFit/>
+          </a:bodyPr>
+          <a:lstStyle/>
+          <a:p>
+            <a:pPr algn="ctr"/>
+            <a:r>
+              <a:rPr sz="2400" b="1">
+                <a:latin typeface="BIZ UDPGothic"/>
+              </a:rPr>
+              <a:t>も じ ゃ ん ぼ</a:t>
+            </a:r>
+          </a:p>
+        </p:txBody>
+      </p:sp>
+      <p:sp>
+        <p:nvSpPr>
+          <p:cNvPr id="7" name="TextBox 6"/>
+          <p:cNvSpPr txBox="1"/>
+          <p:nvPr/>
+        </p:nvSpPr>
+        <p:spPr>
+          <a:xfrm>
+            <a:off x="502920" y="4251960"/>
+            <a:ext cx="3048480" cy="320040"/>
+          </a:xfrm>
+          <a:prstGeom prst="rect">
+            <a:avLst/>
+          </a:prstGeom>
+          <a:noFill/>
+        </p:spPr>
+        <p:txBody>
+          <a:bodyPr wrap="none">
+            <a:spAutoFit/>
+          </a:bodyPr>
+          <a:lstStyle/>
+          <a:p>
+            <a:pPr algn="ctr"/>
+            <a:r>
+              <a:rPr sz="1500" b="0">
+                <a:latin typeface="BIZ UDPGothic"/>
+              </a:rPr>
+              <a:t>モジャンボ</a:t>
+            </a:r>
+          </a:p>
+        </p:txBody>
+      </p:sp>
+      <p:sp>
+        <p:nvSpPr>
+          <p:cNvPr id="8" name="TextBox 7"/>
+          <p:cNvSpPr txBox="1"/>
+          <p:nvPr/>
+        </p:nvSpPr>
+        <p:spPr>
+          <a:xfrm>
+            <a:off x="502920" y="4617720"/>
+            <a:ext cx="3048480" cy="228600"/>
+          </a:xfrm>
+          <a:prstGeom prst="rect">
+            <a:avLst/>
+          </a:prstGeom>
+          <a:noFill/>
+        </p:spPr>
+        <p:txBody>
+          <a:bodyPr wrap="none">
+            <a:spAutoFit/>
+          </a:bodyPr>
+          <a:lstStyle/>
+          <a:p>
+            <a:pPr algn="ctr"/>
+            <a:r>
+              <a:rPr sz="900" b="0">
+                <a:latin typeface="BIZ UDPGothic"/>
+              </a:rPr>
+              <a:t>タイプ：くさ</a:t>
+            </a:r>
+          </a:p>
+        </p:txBody>
+      </p:sp>
+      <p:sp>
+        <p:nvSpPr>
+          <p:cNvPr id="9" name="Rounded Rectangle 8"/>
+          <p:cNvSpPr/>
+          <p:nvPr/>
+        </p:nvSpPr>
+        <p:spPr>
+          <a:xfrm>
+            <a:off x="3917160" y="320040"/>
+            <a:ext cx="3231360" cy="4888800"/>
+          </a:xfrm>
+          <a:prstGeom prst="roundRect">
+            <a:avLst/>
+          </a:prstGeom>
+          <a:noFill/>
+          <a:ln w="10160"/>
+        </p:spPr>
+        <p:style>
+          <a:lnRef idx="1">
+            <a:schemeClr val="accent1"/>
+          </a:lnRef>
+          <a:fillRef idx="3">
+            <a:schemeClr val="accent1"/>
+          </a:fillRef>
+          <a:effectRef idx="2">
+            <a:schemeClr val="accent1"/>
+          </a:effectRef>
+          <a:fontRef idx="minor">
+            <a:schemeClr val="lt1"/>
+          </a:fontRef>
+        </p:style>
+        <p:txBody>
+          <a:bodyPr rtlCol="0" anchor="ctr"/>
+          <a:lstStyle/>
+          <a:p>
+            <a:pPr algn="ctr"/>
+          </a:p>
+        </p:txBody>
+      </p:sp>
+      <p:sp>
+        <p:nvSpPr>
+          <p:cNvPr id="10" name="TextBox 9"/>
+          <p:cNvSpPr txBox="1"/>
+          <p:nvPr/>
+        </p:nvSpPr>
+        <p:spPr>
+          <a:xfrm>
+            <a:off x="3990312" y="658368"/>
+            <a:ext cx="502920" cy="228600"/>
+          </a:xfrm>
+          <a:prstGeom prst="rect">
+            <a:avLst/>
+          </a:prstGeom>
+          <a:noFill/>
+        </p:spPr>
+        <p:txBody>
+          <a:bodyPr wrap="none">
+            <a:spAutoFit/>
+          </a:bodyPr>
+          <a:lstStyle/>
+          <a:p>
+            <a:pPr algn="ctr"/>
+            <a:r>
+              <a:rPr sz="900" b="1">
+                <a:latin typeface="BIZ UDPGothic"/>
+              </a:rPr>
+              <a:t>#123</a:t>
+            </a:r>
+          </a:p>
+        </p:txBody>
+      </p:sp>
+      <p:pic>
+        <p:nvPicPr>
+          <p:cNvPr id="11" name="Picture 10" descr="sichlor.png"/>
+          <p:cNvPicPr>
+            <a:picLocks noChangeAspect="1"/>
+          </p:cNvPicPr>
+          <p:nvPr/>
+        </p:nvPicPr>
+        <p:blipFill>
+          <a:blip r:embed="rId3"/>
+          <a:stretch>
+            <a:fillRect/>
+          </a:stretch>
+        </p:blipFill>
+        <p:spPr>
+          <a:xfrm>
+            <a:off x="4549860" y="1005840"/>
+            <a:ext cx="1965960" cy="1965960"/>
+          </a:xfrm>
+          <a:prstGeom prst="rect">
+            <a:avLst/>
+          </a:prstGeom>
+        </p:spPr>
+      </p:pic>
+      <p:sp>
+        <p:nvSpPr>
+          <p:cNvPr id="12" name="TextBox 11"/>
+          <p:cNvSpPr txBox="1"/>
+          <p:nvPr/>
+        </p:nvSpPr>
+        <p:spPr>
+          <a:xfrm>
+            <a:off x="4026888" y="3291840"/>
+            <a:ext cx="3011904" cy="274320"/>
+          </a:xfrm>
+          <a:prstGeom prst="rect">
+            <a:avLst/>
+          </a:prstGeom>
+          <a:noFill/>
+        </p:spPr>
+        <p:txBody>
+          <a:bodyPr wrap="none">
+            <a:spAutoFit/>
+          </a:bodyPr>
+          <a:lstStyle/>
+          <a:p>
+            <a:pPr algn="ctr"/>
+            <a:r>
+              <a:rPr sz="1400" b="0">
+                <a:latin typeface="BIZ UDPGothic"/>
+              </a:rPr>
+              <a:t>Sichlor</a:t>
+            </a:r>
+          </a:p>
+        </p:txBody>
+      </p:sp>
+      <p:sp>
+        <p:nvSpPr>
+          <p:cNvPr id="13" name="TextBox 12"/>
+          <p:cNvSpPr txBox="1"/>
+          <p:nvPr/>
+        </p:nvSpPr>
+        <p:spPr>
+          <a:xfrm>
+            <a:off x="4008600" y="3703320"/>
+            <a:ext cx="3048480" cy="384048"/>
+          </a:xfrm>
+          <a:prstGeom prst="rect">
+            <a:avLst/>
+          </a:prstGeom>
+          <a:noFill/>
+        </p:spPr>
+        <p:txBody>
+          <a:bodyPr wrap="none">
+            <a:spAutoFit/>
+          </a:bodyPr>
+          <a:lstStyle/>
+          <a:p>
+            <a:pPr algn="ctr"/>
+            <a:r>
+              <a:rPr sz="2400" b="1">
+                <a:latin typeface="BIZ UDPGothic"/>
+              </a:rPr>
+              <a:t>す と ら い く</a:t>
+            </a:r>
+          </a:p>
+        </p:txBody>
+      </p:sp>
+      <p:sp>
+        <p:nvSpPr>
+          <p:cNvPr id="14" name="TextBox 13"/>
+          <p:cNvSpPr txBox="1"/>
+          <p:nvPr/>
+        </p:nvSpPr>
+        <p:spPr>
+          <a:xfrm>
+            <a:off x="4008600" y="4251960"/>
+            <a:ext cx="3048480" cy="320040"/>
+          </a:xfrm>
+          <a:prstGeom prst="rect">
+            <a:avLst/>
+          </a:prstGeom>
+          <a:noFill/>
+        </p:spPr>
+        <p:txBody>
+          <a:bodyPr wrap="none">
+            <a:spAutoFit/>
+          </a:bodyPr>
+          <a:lstStyle/>
+          <a:p>
+            <a:pPr algn="ctr"/>
+            <a:r>
+              <a:rPr sz="1500" b="0">
+                <a:latin typeface="BIZ UDPGothic"/>
+              </a:rPr>
+              <a:t>ストライク</a:t>
+            </a:r>
+          </a:p>
+        </p:txBody>
+      </p:sp>
+      <p:sp>
+        <p:nvSpPr>
+          <p:cNvPr id="15" name="TextBox 14"/>
+          <p:cNvSpPr txBox="1"/>
+          <p:nvPr/>
+        </p:nvSpPr>
+        <p:spPr>
+          <a:xfrm>
+            <a:off x="4008600" y="4617720"/>
+            <a:ext cx="3048480" cy="228600"/>
+          </a:xfrm>
+          <a:prstGeom prst="rect">
+            <a:avLst/>
+          </a:prstGeom>
+          <a:noFill/>
+        </p:spPr>
+        <p:txBody>
+          <a:bodyPr wrap="none">
+            <a:spAutoFit/>
+          </a:bodyPr>
+          <a:lstStyle/>
+          <a:p>
+            <a:pPr algn="ctr"/>
+            <a:r>
+              <a:rPr sz="900" b="0">
+                <a:latin typeface="BIZ UDPGothic"/>
+              </a:rPr>
+              <a:t>タイプ：むし / ひこう</a:t>
+            </a:r>
+          </a:p>
+        </p:txBody>
+      </p:sp>
+      <p:sp>
+        <p:nvSpPr>
+          <p:cNvPr id="16" name="Rounded Rectangle 15"/>
+          <p:cNvSpPr/>
+          <p:nvPr/>
+        </p:nvSpPr>
+        <p:spPr>
+          <a:xfrm>
+            <a:off x="411480" y="5483160"/>
+            <a:ext cx="3231360" cy="4888800"/>
+          </a:xfrm>
+          <a:prstGeom prst="roundRect">
+            <a:avLst/>
+          </a:prstGeom>
+          <a:noFill/>
+          <a:ln w="10160"/>
+        </p:spPr>
+        <p:style>
+          <a:lnRef idx="1">
+            <a:schemeClr val="accent1"/>
+          </a:lnRef>
+          <a:fillRef idx="3">
+            <a:schemeClr val="accent1"/>
+          </a:fillRef>
+          <a:effectRef idx="2">
+            <a:schemeClr val="accent1"/>
+          </a:effectRef>
+          <a:fontRef idx="minor">
+            <a:schemeClr val="lt1"/>
+          </a:fontRef>
+        </p:style>
+        <p:txBody>
+          <a:bodyPr rtlCol="0" anchor="ctr"/>
+          <a:lstStyle/>
+          <a:p>
+            <a:pPr algn="ctr"/>
+          </a:p>
+        </p:txBody>
+      </p:sp>
+      <p:sp>
+        <p:nvSpPr>
+          <p:cNvPr id="17" name="TextBox 16"/>
+          <p:cNvSpPr txBox="1"/>
+          <p:nvPr/>
+        </p:nvSpPr>
+        <p:spPr>
+          <a:xfrm>
+            <a:off x="484632" y="5821488"/>
+            <a:ext cx="502920" cy="228600"/>
+          </a:xfrm>
+          <a:prstGeom prst="rect">
+            <a:avLst/>
+          </a:prstGeom>
+          <a:noFill/>
+        </p:spPr>
+        <p:txBody>
+          <a:bodyPr wrap="none">
+            <a:spAutoFit/>
+          </a:bodyPr>
+          <a:lstStyle/>
+          <a:p>
+            <a:pPr algn="ctr"/>
+            <a:r>
+              <a:rPr sz="900" b="1">
+                <a:latin typeface="BIZ UDPGothic"/>
+              </a:rPr>
+              <a:t>#212</a:t>
+            </a:r>
+          </a:p>
+        </p:txBody>
+      </p:sp>
+      <p:pic>
+        <p:nvPicPr>
+          <p:cNvPr id="18" name="Picture 17" descr="scherox.png"/>
+          <p:cNvPicPr>
+            <a:picLocks noChangeAspect="1"/>
+          </p:cNvPicPr>
+          <p:nvPr/>
+        </p:nvPicPr>
+        <p:blipFill>
+          <a:blip r:embed="rId4"/>
+          <a:stretch>
+            <a:fillRect/>
+          </a:stretch>
+        </p:blipFill>
+        <p:spPr>
+          <a:xfrm>
+            <a:off x="1044180" y="6168960"/>
+            <a:ext cx="1965960" cy="1965960"/>
+          </a:xfrm>
+          <a:prstGeom prst="rect">
+            <a:avLst/>
+          </a:prstGeom>
+        </p:spPr>
+      </p:pic>
+      <p:sp>
+        <p:nvSpPr>
+          <p:cNvPr id="19" name="TextBox 18"/>
+          <p:cNvSpPr txBox="1"/>
+          <p:nvPr/>
+        </p:nvSpPr>
+        <p:spPr>
+          <a:xfrm>
+            <a:off x="521208" y="8454960"/>
+            <a:ext cx="3011904" cy="274320"/>
+          </a:xfrm>
+          <a:prstGeom prst="rect">
+            <a:avLst/>
+          </a:prstGeom>
+          <a:noFill/>
+        </p:spPr>
+        <p:txBody>
+          <a:bodyPr wrap="none">
+            <a:spAutoFit/>
+          </a:bodyPr>
+          <a:lstStyle/>
+          <a:p>
+            <a:pPr algn="ctr"/>
+            <a:r>
+              <a:rPr sz="1400" b="0">
+                <a:latin typeface="BIZ UDPGothic"/>
+              </a:rPr>
+              <a:t>Scherox</a:t>
+            </a:r>
+          </a:p>
+        </p:txBody>
+      </p:sp>
+      <p:sp>
+        <p:nvSpPr>
+          <p:cNvPr id="20" name="TextBox 19"/>
+          <p:cNvSpPr txBox="1"/>
+          <p:nvPr/>
+        </p:nvSpPr>
+        <p:spPr>
+          <a:xfrm>
+            <a:off x="502920" y="8866440"/>
+            <a:ext cx="3048480" cy="384048"/>
+          </a:xfrm>
+          <a:prstGeom prst="rect">
+            <a:avLst/>
+          </a:prstGeom>
+          <a:noFill/>
+        </p:spPr>
+        <p:txBody>
+          <a:bodyPr wrap="none">
+            <a:spAutoFit/>
+          </a:bodyPr>
+          <a:lstStyle/>
+          <a:p>
+            <a:pPr algn="ctr"/>
+            <a:r>
+              <a:rPr sz="2400" b="1">
+                <a:latin typeface="BIZ UDPGothic"/>
+              </a:rPr>
+              <a:t>は っ さ む</a:t>
+            </a:r>
+          </a:p>
+        </p:txBody>
+      </p:sp>
+      <p:sp>
+        <p:nvSpPr>
+          <p:cNvPr id="21" name="TextBox 20"/>
+          <p:cNvSpPr txBox="1"/>
+          <p:nvPr/>
+        </p:nvSpPr>
+        <p:spPr>
+          <a:xfrm>
+            <a:off x="502920" y="9415080"/>
+            <a:ext cx="3048480" cy="320040"/>
+          </a:xfrm>
+          <a:prstGeom prst="rect">
+            <a:avLst/>
+          </a:prstGeom>
+          <a:noFill/>
+        </p:spPr>
+        <p:txBody>
+          <a:bodyPr wrap="none">
+            <a:spAutoFit/>
+          </a:bodyPr>
+          <a:lstStyle/>
+          <a:p>
+            <a:pPr algn="ctr"/>
+            <a:r>
+              <a:rPr sz="1500" b="0">
+                <a:latin typeface="BIZ UDPGothic"/>
+              </a:rPr>
+              <a:t>ハッサム</a:t>
+            </a:r>
+          </a:p>
+        </p:txBody>
+      </p:sp>
+      <p:sp>
+        <p:nvSpPr>
+          <p:cNvPr id="22" name="TextBox 21"/>
+          <p:cNvSpPr txBox="1"/>
+          <p:nvPr/>
+        </p:nvSpPr>
+        <p:spPr>
+          <a:xfrm>
+            <a:off x="502920" y="9780840"/>
+            <a:ext cx="3048480" cy="228600"/>
+          </a:xfrm>
+          <a:prstGeom prst="rect">
+            <a:avLst/>
+          </a:prstGeom>
+          <a:noFill/>
+        </p:spPr>
+        <p:txBody>
+          <a:bodyPr wrap="none">
+            <a:spAutoFit/>
+          </a:bodyPr>
+          <a:lstStyle/>
+          <a:p>
+            <a:pPr algn="ctr"/>
+            <a:r>
+              <a:rPr sz="900" b="0">
+                <a:latin typeface="BIZ UDPGothic"/>
+              </a:rPr>
+              <a:t>タイプ：むし / はがね</a:t>
+            </a:r>
+          </a:p>
+        </p:txBody>
+      </p:sp>
+      <p:sp>
+        <p:nvSpPr>
+          <p:cNvPr id="23" name="Rounded Rectangle 22"/>
+          <p:cNvSpPr/>
+          <p:nvPr/>
+        </p:nvSpPr>
+        <p:spPr>
+          <a:xfrm>
+            <a:off x="3917160" y="5483160"/>
+            <a:ext cx="3231360" cy="4888800"/>
+          </a:xfrm>
+          <a:prstGeom prst="roundRect">
+            <a:avLst/>
+          </a:prstGeom>
+          <a:noFill/>
+          <a:ln w="10160"/>
+        </p:spPr>
+        <p:style>
+          <a:lnRef idx="1">
+            <a:schemeClr val="accent1"/>
+          </a:lnRef>
+          <a:fillRef idx="3">
+            <a:schemeClr val="accent1"/>
+          </a:fillRef>
+          <a:effectRef idx="2">
+            <a:schemeClr val="accent1"/>
+          </a:effectRef>
+          <a:fontRef idx="minor">
+            <a:schemeClr val="lt1"/>
+          </a:fontRef>
+        </p:style>
+        <p:txBody>
+          <a:bodyPr rtlCol="0" anchor="ctr"/>
+          <a:lstStyle/>
+          <a:p>
+            <a:pPr algn="ctr"/>
+          </a:p>
+        </p:txBody>
+      </p:sp>
+      <p:sp>
+        <p:nvSpPr>
+          <p:cNvPr id="24" name="TextBox 23"/>
+          <p:cNvSpPr txBox="1"/>
+          <p:nvPr/>
+        </p:nvSpPr>
+        <p:spPr>
+          <a:xfrm>
+            <a:off x="3990312" y="5821488"/>
+            <a:ext cx="502920" cy="228600"/>
+          </a:xfrm>
+          <a:prstGeom prst="rect">
+            <a:avLst/>
+          </a:prstGeom>
+          <a:noFill/>
+        </p:spPr>
+        <p:txBody>
+          <a:bodyPr wrap="none">
+            <a:spAutoFit/>
+          </a:bodyPr>
+          <a:lstStyle/>
+          <a:p>
+            <a:pPr algn="ctr"/>
+            <a:r>
+              <a:rPr sz="900" b="1">
+                <a:latin typeface="BIZ UDPGothic"/>
+              </a:rPr>
+              <a:t>#127</a:t>
+            </a:r>
+          </a:p>
+        </p:txBody>
+      </p:sp>
+      <p:pic>
+        <p:nvPicPr>
+          <p:cNvPr id="25" name="Picture 24" descr="pinsir.png"/>
+          <p:cNvPicPr>
+            <a:picLocks noChangeAspect="1"/>
+          </p:cNvPicPr>
+          <p:nvPr/>
+        </p:nvPicPr>
+        <p:blipFill>
+          <a:blip r:embed="rId5"/>
+          <a:stretch>
+            <a:fillRect/>
+          </a:stretch>
+        </p:blipFill>
+        <p:spPr>
+          <a:xfrm>
+            <a:off x="4549860" y="6168960"/>
+            <a:ext cx="1965960" cy="1965960"/>
+          </a:xfrm>
+          <a:prstGeom prst="rect">
+            <a:avLst/>
+          </a:prstGeom>
+        </p:spPr>
+      </p:pic>
+      <p:sp>
+        <p:nvSpPr>
+          <p:cNvPr id="26" name="TextBox 25"/>
+          <p:cNvSpPr txBox="1"/>
+          <p:nvPr/>
+        </p:nvSpPr>
+        <p:spPr>
+          <a:xfrm>
+            <a:off x="4026888" y="8454960"/>
+            <a:ext cx="3011904" cy="274320"/>
+          </a:xfrm>
+          <a:prstGeom prst="rect">
+            <a:avLst/>
+          </a:prstGeom>
+          <a:noFill/>
+        </p:spPr>
+        <p:txBody>
+          <a:bodyPr wrap="none">
+            <a:spAutoFit/>
+          </a:bodyPr>
+          <a:lstStyle/>
+          <a:p>
+            <a:pPr algn="ctr"/>
+            <a:r>
+              <a:rPr sz="1400" b="0">
+                <a:latin typeface="BIZ UDPGothic"/>
+              </a:rPr>
+              <a:t>Pinsir</a:t>
+            </a:r>
+          </a:p>
+        </p:txBody>
+      </p:sp>
+      <p:sp>
+        <p:nvSpPr>
+          <p:cNvPr id="27" name="TextBox 26"/>
+          <p:cNvSpPr txBox="1"/>
+          <p:nvPr/>
+        </p:nvSpPr>
+        <p:spPr>
+          <a:xfrm>
+            <a:off x="4008600" y="8866440"/>
+            <a:ext cx="3048480" cy="384048"/>
+          </a:xfrm>
+          <a:prstGeom prst="rect">
+            <a:avLst/>
+          </a:prstGeom>
+          <a:noFill/>
+        </p:spPr>
+        <p:txBody>
+          <a:bodyPr wrap="none">
+            <a:spAutoFit/>
+          </a:bodyPr>
+          <a:lstStyle/>
+          <a:p>
+            <a:pPr algn="ctr"/>
+            <a:r>
+              <a:rPr sz="2400" b="1">
+                <a:latin typeface="BIZ UDPGothic"/>
+              </a:rPr>
+              <a:t>か い ろ す</a:t>
+            </a:r>
+          </a:p>
+        </p:txBody>
+      </p:sp>
+      <p:sp>
+        <p:nvSpPr>
+          <p:cNvPr id="28" name="TextBox 27"/>
+          <p:cNvSpPr txBox="1"/>
+          <p:nvPr/>
+        </p:nvSpPr>
+        <p:spPr>
+          <a:xfrm>
+            <a:off x="4008600" y="9415080"/>
+            <a:ext cx="3048480" cy="320040"/>
+          </a:xfrm>
+          <a:prstGeom prst="rect">
+            <a:avLst/>
+          </a:prstGeom>
+          <a:noFill/>
+        </p:spPr>
+        <p:txBody>
+          <a:bodyPr wrap="none">
+            <a:spAutoFit/>
+          </a:bodyPr>
+          <a:lstStyle/>
+          <a:p>
+            <a:pPr algn="ctr"/>
+            <a:r>
+              <a:rPr sz="1500" b="0">
+                <a:latin typeface="BIZ UDPGothic"/>
+              </a:rPr>
+              <a:t>カイロス</a:t>
+            </a:r>
+          </a:p>
+        </p:txBody>
+      </p:sp>
+      <p:sp>
+        <p:nvSpPr>
+          <p:cNvPr id="29" name="TextBox 28"/>
+          <p:cNvSpPr txBox="1"/>
+          <p:nvPr/>
+        </p:nvSpPr>
+        <p:spPr>
+          <a:xfrm>
+            <a:off x="4008600" y="9780840"/>
+            <a:ext cx="3048480" cy="228600"/>
+          </a:xfrm>
+          <a:prstGeom prst="rect">
+            <a:avLst/>
+          </a:prstGeom>
+          <a:noFill/>
+        </p:spPr>
+        <p:txBody>
+          <a:bodyPr wrap="none">
+            <a:spAutoFit/>
+          </a:bodyPr>
+          <a:lstStyle/>
+          <a:p>
+            <a:pPr algn="ctr"/>
+            <a:r>
+              <a:rPr sz="900" b="0">
+                <a:latin typeface="BIZ UDPGothic"/>
+              </a:rPr>
+              <a:t>タイプ：むし</a:t>
+            </a:r>
+          </a:p>
+        </p:txBody>
+      </p:sp>
+    </p:spTree>
+  </p:cSld>
+  <p:clrMapOvr>
+    <a:masterClrMapping/>
+  </p:clrMapOvr>
+</p:sld>
+</file>
+
+<file path=ppt/slides/slide5.xml><?xml version="1.0" encoding="utf-8"?>
+<p:sld xmlns:a="http://schemas.openxmlformats.org/drawingml/2006/main" xmlns:p="http://schemas.openxmlformats.org/presentationml/2006/main" xmlns:r="http://schemas.openxmlformats.org/officeDocument/2006/relationships">
+  <p:cSld>
+    <p:spTree>
+      <p:nvGrpSpPr>
+        <p:cNvPr id="1" name=""/>
+        <p:cNvGrpSpPr/>
+        <p:nvPr/>
+      </p:nvGrpSpPr>
+      <p:grpSpPr/>
+      <p:sp>
+        <p:nvSpPr>
+          <p:cNvPr id="2" name="Rounded Rectangle 1"/>
+          <p:cNvSpPr/>
+          <p:nvPr/>
+        </p:nvSpPr>
+        <p:spPr>
+          <a:xfrm>
+            <a:off x="411480" y="320040"/>
+            <a:ext cx="3231360" cy="4888800"/>
+          </a:xfrm>
+          <a:prstGeom prst="roundRect">
+            <a:avLst/>
+          </a:prstGeom>
+          <a:noFill/>
+          <a:ln w="10160"/>
+        </p:spPr>
+        <p:style>
+          <a:lnRef idx="1">
+            <a:schemeClr val="accent1"/>
+          </a:lnRef>
+          <a:fillRef idx="3">
+            <a:schemeClr val="accent1"/>
+          </a:fillRef>
+          <a:effectRef idx="2">
+            <a:schemeClr val="accent1"/>
+          </a:effectRef>
+          <a:fontRef idx="minor">
+            <a:schemeClr val="lt1"/>
+          </a:fontRef>
+        </p:style>
+        <p:txBody>
+          <a:bodyPr rtlCol="0" anchor="ctr"/>
+          <a:lstStyle/>
+          <a:p>
+            <a:pPr algn="ctr"/>
+          </a:p>
+        </p:txBody>
+      </p:sp>
+      <p:sp>
+        <p:nvSpPr>
+          <p:cNvPr id="3" name="TextBox 2"/>
+          <p:cNvSpPr txBox="1"/>
+          <p:nvPr/>
+        </p:nvSpPr>
+        <p:spPr>
+          <a:xfrm>
+            <a:off x="484632" y="658368"/>
+            <a:ext cx="502920" cy="228600"/>
+          </a:xfrm>
+          <a:prstGeom prst="rect">
+            <a:avLst/>
+          </a:prstGeom>
+          <a:noFill/>
+        </p:spPr>
+        <p:txBody>
+          <a:bodyPr wrap="none">
+            <a:spAutoFit/>
+          </a:bodyPr>
+          <a:lstStyle/>
+          <a:p>
+            <a:pPr algn="ctr"/>
+            <a:r>
+              <a:rPr sz="900" b="1">
+                <a:latin typeface="BIZ UDPGothic"/>
+              </a:rPr>
+              <a:t>#129</a:t>
+            </a:r>
+          </a:p>
+        </p:txBody>
+      </p:sp>
+      <p:pic>
+        <p:nvPicPr>
+          <p:cNvPr id="4" name="Picture 3" descr="karpador.png"/>
+          <p:cNvPicPr>
+            <a:picLocks noChangeAspect="1"/>
+          </p:cNvPicPr>
+          <p:nvPr/>
+        </p:nvPicPr>
+        <p:blipFill>
+          <a:blip r:embed="rId2"/>
+          <a:stretch>
+            <a:fillRect/>
+          </a:stretch>
+        </p:blipFill>
+        <p:spPr>
+          <a:xfrm>
+            <a:off x="1044180" y="1005840"/>
+            <a:ext cx="1965960" cy="1965960"/>
+          </a:xfrm>
+          <a:prstGeom prst="rect">
+            <a:avLst/>
+          </a:prstGeom>
+        </p:spPr>
+      </p:pic>
+      <p:sp>
+        <p:nvSpPr>
+          <p:cNvPr id="5" name="TextBox 4"/>
+          <p:cNvSpPr txBox="1"/>
+          <p:nvPr/>
+        </p:nvSpPr>
+        <p:spPr>
+          <a:xfrm>
+            <a:off x="521208" y="3291840"/>
+            <a:ext cx="3011904" cy="274320"/>
+          </a:xfrm>
+          <a:prstGeom prst="rect">
+            <a:avLst/>
+          </a:prstGeom>
+          <a:noFill/>
+        </p:spPr>
+        <p:txBody>
+          <a:bodyPr wrap="none">
+            <a:spAutoFit/>
+          </a:bodyPr>
+          <a:lstStyle/>
+          <a:p>
+            <a:pPr algn="ctr"/>
+            <a:r>
+              <a:rPr sz="1400" b="0">
+                <a:latin typeface="BIZ UDPGothic"/>
+              </a:rPr>
+              <a:t>Karpador</a:t>
+            </a:r>
+          </a:p>
+        </p:txBody>
+      </p:sp>
+      <p:sp>
+        <p:nvSpPr>
+          <p:cNvPr id="6" name="TextBox 5"/>
+          <p:cNvSpPr txBox="1"/>
+          <p:nvPr/>
+        </p:nvSpPr>
+        <p:spPr>
+          <a:xfrm>
+            <a:off x="502920" y="3703320"/>
+            <a:ext cx="3048480" cy="384048"/>
+          </a:xfrm>
+          <a:prstGeom prst="rect">
+            <a:avLst/>
+          </a:prstGeom>
+          <a:noFill/>
+        </p:spPr>
+        <p:txBody>
+          <a:bodyPr wrap="none">
+            <a:spAutoFit/>
+          </a:bodyPr>
+          <a:lstStyle/>
+          <a:p>
+            <a:pPr algn="ctr"/>
+            <a:r>
+              <a:rPr sz="2400" b="1">
+                <a:latin typeface="BIZ UDPGothic"/>
+              </a:rPr>
+              <a:t>こ い き ん ぐ</a:t>
+            </a:r>
+          </a:p>
+        </p:txBody>
+      </p:sp>
+      <p:sp>
+        <p:nvSpPr>
+          <p:cNvPr id="7" name="TextBox 6"/>
+          <p:cNvSpPr txBox="1"/>
+          <p:nvPr/>
+        </p:nvSpPr>
+        <p:spPr>
+          <a:xfrm>
+            <a:off x="502920" y="4251960"/>
+            <a:ext cx="3048480" cy="320040"/>
+          </a:xfrm>
+          <a:prstGeom prst="rect">
+            <a:avLst/>
+          </a:prstGeom>
+          <a:noFill/>
+        </p:spPr>
+        <p:txBody>
+          <a:bodyPr wrap="none">
+            <a:spAutoFit/>
+          </a:bodyPr>
+          <a:lstStyle/>
+          <a:p>
+            <a:pPr algn="ctr"/>
+            <a:r>
+              <a:rPr sz="1500" b="0">
+                <a:latin typeface="BIZ UDPGothic"/>
+              </a:rPr>
+              <a:t>コイキング</a:t>
+            </a:r>
+          </a:p>
+        </p:txBody>
+      </p:sp>
+      <p:sp>
+        <p:nvSpPr>
+          <p:cNvPr id="8" name="TextBox 7"/>
+          <p:cNvSpPr txBox="1"/>
+          <p:nvPr/>
+        </p:nvSpPr>
+        <p:spPr>
+          <a:xfrm>
+            <a:off x="502920" y="4617720"/>
+            <a:ext cx="3048480" cy="228600"/>
+          </a:xfrm>
+          <a:prstGeom prst="rect">
+            <a:avLst/>
+          </a:prstGeom>
+          <a:noFill/>
+        </p:spPr>
+        <p:txBody>
+          <a:bodyPr wrap="none">
+            <a:spAutoFit/>
+          </a:bodyPr>
+          <a:lstStyle/>
+          <a:p>
+            <a:pPr algn="ctr"/>
+            <a:r>
+              <a:rPr sz="900" b="0">
+                <a:latin typeface="BIZ UDPGothic"/>
+              </a:rPr>
+              <a:t>タイプ：みず</a:t>
+            </a:r>
+          </a:p>
+        </p:txBody>
+      </p:sp>
+      <p:sp>
+        <p:nvSpPr>
+          <p:cNvPr id="9" name="Rounded Rectangle 8"/>
+          <p:cNvSpPr/>
+          <p:nvPr/>
+        </p:nvSpPr>
+        <p:spPr>
+          <a:xfrm>
+            <a:off x="3917160" y="320040"/>
+            <a:ext cx="3231360" cy="4888800"/>
+          </a:xfrm>
+          <a:prstGeom prst="roundRect">
+            <a:avLst/>
+          </a:prstGeom>
+          <a:noFill/>
+          <a:ln w="10160"/>
+        </p:spPr>
+        <p:style>
+          <a:lnRef idx="1">
+            <a:schemeClr val="accent1"/>
+          </a:lnRef>
+          <a:fillRef idx="3">
+            <a:schemeClr val="accent1"/>
+          </a:fillRef>
+          <a:effectRef idx="2">
+            <a:schemeClr val="accent1"/>
+          </a:effectRef>
+          <a:fontRef idx="minor">
+            <a:schemeClr val="lt1"/>
+          </a:fontRef>
+        </p:style>
+        <p:txBody>
+          <a:bodyPr rtlCol="0" anchor="ctr"/>
+          <a:lstStyle/>
+          <a:p>
+            <a:pPr algn="ctr"/>
+          </a:p>
+        </p:txBody>
+      </p:sp>
+      <p:sp>
+        <p:nvSpPr>
+          <p:cNvPr id="10" name="TextBox 9"/>
+          <p:cNvSpPr txBox="1"/>
+          <p:nvPr/>
+        </p:nvSpPr>
+        <p:spPr>
+          <a:xfrm>
+            <a:off x="3990312" y="658368"/>
+            <a:ext cx="502920" cy="228600"/>
+          </a:xfrm>
+          <a:prstGeom prst="rect">
+            <a:avLst/>
+          </a:prstGeom>
+          <a:noFill/>
+        </p:spPr>
+        <p:txBody>
+          <a:bodyPr wrap="none">
+            <a:spAutoFit/>
+          </a:bodyPr>
+          <a:lstStyle/>
+          <a:p>
+            <a:pPr algn="ctr"/>
+            <a:r>
+              <a:rPr sz="900" b="1">
+                <a:latin typeface="BIZ UDPGothic"/>
+              </a:rPr>
+              <a:t>#132</a:t>
+            </a:r>
+          </a:p>
+        </p:txBody>
+      </p:sp>
+      <p:pic>
+        <p:nvPicPr>
+          <p:cNvPr id="11" name="Picture 10" descr="ditto.png"/>
+          <p:cNvPicPr>
+            <a:picLocks noChangeAspect="1"/>
+          </p:cNvPicPr>
+          <p:nvPr/>
+        </p:nvPicPr>
+        <p:blipFill>
+          <a:blip r:embed="rId3"/>
+          <a:stretch>
+            <a:fillRect/>
+          </a:stretch>
+        </p:blipFill>
+        <p:spPr>
+          <a:xfrm>
+            <a:off x="4549860" y="1005840"/>
+            <a:ext cx="1965960" cy="1965960"/>
+          </a:xfrm>
+          <a:prstGeom prst="rect">
+            <a:avLst/>
+          </a:prstGeom>
+        </p:spPr>
+      </p:pic>
+      <p:sp>
+        <p:nvSpPr>
+          <p:cNvPr id="12" name="TextBox 11"/>
+          <p:cNvSpPr txBox="1"/>
+          <p:nvPr/>
+        </p:nvSpPr>
+        <p:spPr>
+          <a:xfrm>
+            <a:off x="4026888" y="3291840"/>
+            <a:ext cx="3011904" cy="274320"/>
+          </a:xfrm>
+          <a:prstGeom prst="rect">
+            <a:avLst/>
+          </a:prstGeom>
+          <a:noFill/>
+        </p:spPr>
+        <p:txBody>
+          <a:bodyPr wrap="none">
+            <a:spAutoFit/>
+          </a:bodyPr>
+          <a:lstStyle/>
+          <a:p>
+            <a:pPr algn="ctr"/>
+            <a:r>
+              <a:rPr sz="1400" b="0">
+                <a:latin typeface="BIZ UDPGothic"/>
+              </a:rPr>
+              <a:t>Ditto</a:t>
+            </a:r>
+          </a:p>
+        </p:txBody>
+      </p:sp>
+      <p:sp>
+        <p:nvSpPr>
+          <p:cNvPr id="13" name="TextBox 12"/>
+          <p:cNvSpPr txBox="1"/>
+          <p:nvPr/>
+        </p:nvSpPr>
+        <p:spPr>
+          <a:xfrm>
+            <a:off x="4008600" y="3703320"/>
+            <a:ext cx="3048480" cy="384048"/>
+          </a:xfrm>
+          <a:prstGeom prst="rect">
+            <a:avLst/>
+          </a:prstGeom>
+          <a:noFill/>
+        </p:spPr>
+        <p:txBody>
+          <a:bodyPr wrap="none">
+            <a:spAutoFit/>
+          </a:bodyPr>
+          <a:lstStyle/>
+          <a:p>
+            <a:pPr algn="ctr"/>
+            <a:r>
+              <a:rPr sz="2400" b="1">
+                <a:latin typeface="BIZ UDPGothic"/>
+              </a:rPr>
+              <a:t>め た も ん</a:t>
+            </a:r>
+          </a:p>
+        </p:txBody>
+      </p:sp>
+      <p:sp>
+        <p:nvSpPr>
+          <p:cNvPr id="14" name="TextBox 13"/>
+          <p:cNvSpPr txBox="1"/>
+          <p:nvPr/>
+        </p:nvSpPr>
+        <p:spPr>
+          <a:xfrm>
+            <a:off x="4008600" y="4251960"/>
+            <a:ext cx="3048480" cy="320040"/>
+          </a:xfrm>
+          <a:prstGeom prst="rect">
+            <a:avLst/>
+          </a:prstGeom>
+          <a:noFill/>
+        </p:spPr>
+        <p:txBody>
+          <a:bodyPr wrap="none">
+            <a:spAutoFit/>
+          </a:bodyPr>
+          <a:lstStyle/>
+          <a:p>
+            <a:pPr algn="ctr"/>
+            <a:r>
+              <a:rPr sz="1500" b="0">
+                <a:latin typeface="BIZ UDPGothic"/>
+              </a:rPr>
+              <a:t>メタモン</a:t>
+            </a:r>
+          </a:p>
+        </p:txBody>
+      </p:sp>
+      <p:sp>
+        <p:nvSpPr>
+          <p:cNvPr id="15" name="TextBox 14"/>
+          <p:cNvSpPr txBox="1"/>
+          <p:nvPr/>
+        </p:nvSpPr>
+        <p:spPr>
+          <a:xfrm>
+            <a:off x="4008600" y="4617720"/>
+            <a:ext cx="3048480" cy="228600"/>
+          </a:xfrm>
+          <a:prstGeom prst="rect">
+            <a:avLst/>
+          </a:prstGeom>
+          <a:noFill/>
+        </p:spPr>
+        <p:txBody>
+          <a:bodyPr wrap="none">
+            <a:spAutoFit/>
+          </a:bodyPr>
+          <a:lstStyle/>
+          <a:p>
+            <a:pPr algn="ctr"/>
+            <a:r>
+              <a:rPr sz="900" b="0">
+                <a:latin typeface="BIZ UDPGothic"/>
+              </a:rPr>
+              <a:t>タイプ：ノーマル</a:t>
+            </a:r>
+          </a:p>
+        </p:txBody>
+      </p:sp>
+      <p:sp>
+        <p:nvSpPr>
+          <p:cNvPr id="16" name="Rounded Rectangle 15"/>
+          <p:cNvSpPr/>
+          <p:nvPr/>
+        </p:nvSpPr>
+        <p:spPr>
+          <a:xfrm>
+            <a:off x="411480" y="5483160"/>
+            <a:ext cx="3231360" cy="4888800"/>
+          </a:xfrm>
+          <a:prstGeom prst="roundRect">
+            <a:avLst/>
+          </a:prstGeom>
+          <a:noFill/>
+          <a:ln w="10160"/>
+        </p:spPr>
+        <p:style>
+          <a:lnRef idx="1">
+            <a:schemeClr val="accent1"/>
+          </a:lnRef>
+          <a:fillRef idx="3">
+            <a:schemeClr val="accent1"/>
+          </a:fillRef>
+          <a:effectRef idx="2">
+            <a:schemeClr val="accent1"/>
+          </a:effectRef>
+          <a:fontRef idx="minor">
+            <a:schemeClr val="lt1"/>
+          </a:fontRef>
+        </p:style>
+        <p:txBody>
+          <a:bodyPr rtlCol="0" anchor="ctr"/>
+          <a:lstStyle/>
+          <a:p>
+            <a:pPr algn="ctr"/>
+          </a:p>
+        </p:txBody>
+      </p:sp>
+      <p:sp>
+        <p:nvSpPr>
+          <p:cNvPr id="17" name="TextBox 16"/>
+          <p:cNvSpPr txBox="1"/>
+          <p:nvPr/>
+        </p:nvSpPr>
+        <p:spPr>
+          <a:xfrm>
+            <a:off x="484632" y="5821488"/>
+            <a:ext cx="502920" cy="228600"/>
+          </a:xfrm>
+          <a:prstGeom prst="rect">
+            <a:avLst/>
+          </a:prstGeom>
+          <a:noFill/>
+        </p:spPr>
+        <p:txBody>
+          <a:bodyPr wrap="none">
+            <a:spAutoFit/>
+          </a:bodyPr>
+          <a:lstStyle/>
+          <a:p>
+            <a:pPr algn="ctr"/>
+            <a:r>
+              <a:rPr sz="900" b="1">
+                <a:latin typeface="BIZ UDPGothic"/>
+              </a:rPr>
+              <a:t>#163</a:t>
+            </a:r>
+          </a:p>
+        </p:txBody>
+      </p:sp>
+      <p:pic>
+        <p:nvPicPr>
+          <p:cNvPr id="18" name="Picture 17" descr="hoothoot.png"/>
+          <p:cNvPicPr>
+            <a:picLocks noChangeAspect="1"/>
+          </p:cNvPicPr>
+          <p:nvPr/>
+        </p:nvPicPr>
+        <p:blipFill>
+          <a:blip r:embed="rId4"/>
+          <a:stretch>
+            <a:fillRect/>
+          </a:stretch>
+        </p:blipFill>
+        <p:spPr>
+          <a:xfrm>
+            <a:off x="1044180" y="6168960"/>
+            <a:ext cx="1965960" cy="1965960"/>
+          </a:xfrm>
+          <a:prstGeom prst="rect">
+            <a:avLst/>
+          </a:prstGeom>
+        </p:spPr>
+      </p:pic>
+      <p:sp>
+        <p:nvSpPr>
+          <p:cNvPr id="19" name="TextBox 18"/>
+          <p:cNvSpPr txBox="1"/>
+          <p:nvPr/>
+        </p:nvSpPr>
+        <p:spPr>
+          <a:xfrm>
+            <a:off x="521208" y="8454960"/>
+            <a:ext cx="3011904" cy="274320"/>
+          </a:xfrm>
+          <a:prstGeom prst="rect">
+            <a:avLst/>
+          </a:prstGeom>
+          <a:noFill/>
+        </p:spPr>
+        <p:txBody>
+          <a:bodyPr wrap="none">
+            <a:spAutoFit/>
+          </a:bodyPr>
+          <a:lstStyle/>
+          <a:p>
+            <a:pPr algn="ctr"/>
+            <a:r>
+              <a:rPr sz="1400" b="0">
+                <a:latin typeface="BIZ UDPGothic"/>
+              </a:rPr>
+              <a:t>Hoothoot</a:t>
+            </a:r>
+          </a:p>
+        </p:txBody>
+      </p:sp>
+      <p:sp>
+        <p:nvSpPr>
+          <p:cNvPr id="20" name="TextBox 19"/>
+          <p:cNvSpPr txBox="1"/>
+          <p:nvPr/>
+        </p:nvSpPr>
+        <p:spPr>
+          <a:xfrm>
+            <a:off x="502920" y="8866440"/>
+            <a:ext cx="3048480" cy="384048"/>
+          </a:xfrm>
+          <a:prstGeom prst="rect">
+            <a:avLst/>
+          </a:prstGeom>
+          <a:noFill/>
+        </p:spPr>
+        <p:txBody>
+          <a:bodyPr wrap="none">
+            <a:spAutoFit/>
+          </a:bodyPr>
+          <a:lstStyle/>
+          <a:p>
+            <a:pPr algn="ctr"/>
+            <a:r>
+              <a:rPr sz="2400" b="1">
+                <a:latin typeface="BIZ UDPGothic"/>
+              </a:rPr>
+              <a:t>ほ ー ほ ー</a:t>
+            </a:r>
+          </a:p>
+        </p:txBody>
+      </p:sp>
+      <p:sp>
+        <p:nvSpPr>
+          <p:cNvPr id="21" name="TextBox 20"/>
+          <p:cNvSpPr txBox="1"/>
+          <p:nvPr/>
+        </p:nvSpPr>
+        <p:spPr>
+          <a:xfrm>
+            <a:off x="502920" y="9415080"/>
+            <a:ext cx="3048480" cy="320040"/>
+          </a:xfrm>
+          <a:prstGeom prst="rect">
+            <a:avLst/>
+          </a:prstGeom>
+          <a:noFill/>
+        </p:spPr>
+        <p:txBody>
+          <a:bodyPr wrap="none">
+            <a:spAutoFit/>
+          </a:bodyPr>
+          <a:lstStyle/>
+          <a:p>
+            <a:pPr algn="ctr"/>
+            <a:r>
+              <a:rPr sz="1500" b="0">
+                <a:latin typeface="BIZ UDPGothic"/>
+              </a:rPr>
+              <a:t>ホーホー</a:t>
+            </a:r>
+          </a:p>
+        </p:txBody>
+      </p:sp>
+      <p:sp>
+        <p:nvSpPr>
+          <p:cNvPr id="22" name="TextBox 21"/>
+          <p:cNvSpPr txBox="1"/>
+          <p:nvPr/>
+        </p:nvSpPr>
+        <p:spPr>
+          <a:xfrm>
+            <a:off x="502920" y="9780840"/>
+            <a:ext cx="3048480" cy="228600"/>
+          </a:xfrm>
+          <a:prstGeom prst="rect">
+            <a:avLst/>
+          </a:prstGeom>
+          <a:noFill/>
+        </p:spPr>
+        <p:txBody>
+          <a:bodyPr wrap="none">
+            <a:spAutoFit/>
+          </a:bodyPr>
+          <a:lstStyle/>
+          <a:p>
+            <a:pPr algn="ctr"/>
+            <a:r>
+              <a:rPr sz="900" b="0">
+                <a:latin typeface="BIZ UDPGothic"/>
+              </a:rPr>
+              <a:t>タイプ：ノーマル / ひこう</a:t>
+            </a:r>
+          </a:p>
+        </p:txBody>
+      </p:sp>
+      <p:sp>
+        <p:nvSpPr>
+          <p:cNvPr id="23" name="Rounded Rectangle 22"/>
+          <p:cNvSpPr/>
+          <p:nvPr/>
+        </p:nvSpPr>
+        <p:spPr>
+          <a:xfrm>
+            <a:off x="3917160" y="5483160"/>
+            <a:ext cx="3231360" cy="4888800"/>
+          </a:xfrm>
+          <a:prstGeom prst="roundRect">
+            <a:avLst/>
+          </a:prstGeom>
+          <a:noFill/>
+          <a:ln w="10160"/>
+        </p:spPr>
+        <p:style>
+          <a:lnRef idx="1">
+            <a:schemeClr val="accent1"/>
+          </a:lnRef>
+          <a:fillRef idx="3">
+            <a:schemeClr val="accent1"/>
+          </a:fillRef>
+          <a:effectRef idx="2">
+            <a:schemeClr val="accent1"/>
+          </a:effectRef>
+          <a:fontRef idx="minor">
+            <a:schemeClr val="lt1"/>
+          </a:fontRef>
+        </p:style>
+        <p:txBody>
+          <a:bodyPr rtlCol="0" anchor="ctr"/>
+          <a:lstStyle/>
+          <a:p>
+            <a:pPr algn="ctr"/>
+          </a:p>
+        </p:txBody>
+      </p:sp>
+      <p:sp>
+        <p:nvSpPr>
+          <p:cNvPr id="24" name="TextBox 23"/>
+          <p:cNvSpPr txBox="1"/>
+          <p:nvPr/>
+        </p:nvSpPr>
+        <p:spPr>
+          <a:xfrm>
+            <a:off x="3990312" y="5821488"/>
+            <a:ext cx="502920" cy="228600"/>
+          </a:xfrm>
+          <a:prstGeom prst="rect">
+            <a:avLst/>
+          </a:prstGeom>
+          <a:noFill/>
+        </p:spPr>
+        <p:txBody>
+          <a:bodyPr wrap="none">
+            <a:spAutoFit/>
+          </a:bodyPr>
+          <a:lstStyle/>
+          <a:p>
+            <a:pPr algn="ctr"/>
+            <a:r>
+              <a:rPr sz="900" b="1">
+                <a:latin typeface="BIZ UDPGothic"/>
+              </a:rPr>
+              <a:t>#214</a:t>
+            </a:r>
+          </a:p>
+        </p:txBody>
+      </p:sp>
+      <p:pic>
+        <p:nvPicPr>
+          <p:cNvPr id="25" name="Picture 24" descr="skaraborn.png"/>
+          <p:cNvPicPr>
+            <a:picLocks noChangeAspect="1"/>
+          </p:cNvPicPr>
+          <p:nvPr/>
+        </p:nvPicPr>
+        <p:blipFill>
+          <a:blip r:embed="rId5"/>
+          <a:stretch>
+            <a:fillRect/>
+          </a:stretch>
+        </p:blipFill>
+        <p:spPr>
+          <a:xfrm>
+            <a:off x="4549860" y="6168960"/>
+            <a:ext cx="1965960" cy="1965960"/>
+          </a:xfrm>
+          <a:prstGeom prst="rect">
+            <a:avLst/>
+          </a:prstGeom>
+        </p:spPr>
+      </p:pic>
+      <p:sp>
+        <p:nvSpPr>
+          <p:cNvPr id="26" name="TextBox 25"/>
+          <p:cNvSpPr txBox="1"/>
+          <p:nvPr/>
+        </p:nvSpPr>
+        <p:spPr>
+          <a:xfrm>
+            <a:off x="4026888" y="8454960"/>
+            <a:ext cx="3011904" cy="274320"/>
+          </a:xfrm>
+          <a:prstGeom prst="rect">
+            <a:avLst/>
+          </a:prstGeom>
+          <a:noFill/>
+        </p:spPr>
+        <p:txBody>
+          <a:bodyPr wrap="none">
+            <a:spAutoFit/>
+          </a:bodyPr>
+          <a:lstStyle/>
+          <a:p>
+            <a:pPr algn="ctr"/>
+            <a:r>
+              <a:rPr sz="1400" b="0">
+                <a:latin typeface="BIZ UDPGothic"/>
+              </a:rPr>
+              <a:t>Skaraborn</a:t>
+            </a:r>
+          </a:p>
+        </p:txBody>
+      </p:sp>
+      <p:sp>
+        <p:nvSpPr>
+          <p:cNvPr id="27" name="TextBox 26"/>
+          <p:cNvSpPr txBox="1"/>
+          <p:nvPr/>
+        </p:nvSpPr>
+        <p:spPr>
+          <a:xfrm>
+            <a:off x="4008600" y="8866440"/>
+            <a:ext cx="3048480" cy="384048"/>
+          </a:xfrm>
+          <a:prstGeom prst="rect">
+            <a:avLst/>
+          </a:prstGeom>
+          <a:noFill/>
+        </p:spPr>
+        <p:txBody>
+          <a:bodyPr wrap="none">
+            <a:spAutoFit/>
+          </a:bodyPr>
+          <a:lstStyle/>
+          <a:p>
+            <a:pPr algn="ctr"/>
+            <a:r>
+              <a:rPr sz="2400" b="1">
+                <a:latin typeface="BIZ UDPGothic"/>
+              </a:rPr>
+              <a:t>へ ら く ろ す</a:t>
+            </a:r>
+          </a:p>
+        </p:txBody>
+      </p:sp>
+      <p:sp>
+        <p:nvSpPr>
+          <p:cNvPr id="28" name="TextBox 27"/>
+          <p:cNvSpPr txBox="1"/>
+          <p:nvPr/>
+        </p:nvSpPr>
+        <p:spPr>
+          <a:xfrm>
+            <a:off x="4008600" y="9415080"/>
+            <a:ext cx="3048480" cy="320040"/>
+          </a:xfrm>
+          <a:prstGeom prst="rect">
+            <a:avLst/>
+          </a:prstGeom>
+          <a:noFill/>
+        </p:spPr>
+        <p:txBody>
+          <a:bodyPr wrap="none">
+            <a:spAutoFit/>
+          </a:bodyPr>
+          <a:lstStyle/>
+          <a:p>
+            <a:pPr algn="ctr"/>
+            <a:r>
+              <a:rPr sz="1500" b="0">
+                <a:latin typeface="BIZ UDPGothic"/>
+              </a:rPr>
+              <a:t>ヘラクロス</a:t>
+            </a:r>
+          </a:p>
+        </p:txBody>
+      </p:sp>
+      <p:sp>
+        <p:nvSpPr>
+          <p:cNvPr id="29" name="TextBox 28"/>
+          <p:cNvSpPr txBox="1"/>
+          <p:nvPr/>
+        </p:nvSpPr>
+        <p:spPr>
+          <a:xfrm>
+            <a:off x="4008600" y="9780840"/>
+            <a:ext cx="3048480" cy="228600"/>
+          </a:xfrm>
+          <a:prstGeom prst="rect">
+            <a:avLst/>
+          </a:prstGeom>
+          <a:noFill/>
+        </p:spPr>
+        <p:txBody>
+          <a:bodyPr wrap="none">
+            <a:spAutoFit/>
+          </a:bodyPr>
+          <a:lstStyle/>
+          <a:p>
+            <a:pPr algn="ctr"/>
+            <a:r>
+              <a:rPr sz="900" b="0">
+                <a:latin typeface="BIZ UDPGothic"/>
+              </a:rPr>
+              <a:t>タイプ：むし / かくとう</a:t>
+            </a:r>
+          </a:p>
+        </p:txBody>
+      </p:sp>
+    </p:spTree>
+  </p:cSld>
+  <p:clrMapOvr>
+    <a:masterClrMapping/>
+  </p:clrMapOvr>
+</p:sld>
+</file>
+
+<file path=ppt/slides/slide6.xml><?xml version="1.0" encoding="utf-8"?>
+<p:sld xmlns:a="http://schemas.openxmlformats.org/drawingml/2006/main" xmlns:p="http://schemas.openxmlformats.org/presentationml/2006/main" xmlns:r="http://schemas.openxmlformats.org/officeDocument/2006/relationships">
+  <p:cSld>
+    <p:spTree>
+      <p:nvGrpSpPr>
+        <p:cNvPr id="1" name=""/>
+        <p:cNvGrpSpPr/>
+        <p:nvPr/>
+      </p:nvGrpSpPr>
+      <p:grpSpPr/>
+      <p:sp>
+        <p:nvSpPr>
+          <p:cNvPr id="2" name="Rounded Rectangle 1"/>
+          <p:cNvSpPr/>
+          <p:nvPr/>
+        </p:nvSpPr>
+        <p:spPr>
+          <a:xfrm>
+            <a:off x="411480" y="320040"/>
+            <a:ext cx="3231360" cy="4888800"/>
+          </a:xfrm>
+          <a:prstGeom prst="roundRect">
+            <a:avLst/>
+          </a:prstGeom>
+          <a:noFill/>
+          <a:ln w="10160"/>
+        </p:spPr>
+        <p:style>
+          <a:lnRef idx="1">
+            <a:schemeClr val="accent1"/>
+          </a:lnRef>
+          <a:fillRef idx="3">
+            <a:schemeClr val="accent1"/>
+          </a:fillRef>
+          <a:effectRef idx="2">
+            <a:schemeClr val="accent1"/>
+          </a:effectRef>
+          <a:fontRef idx="minor">
+            <a:schemeClr val="lt1"/>
+          </a:fontRef>
+        </p:style>
+        <p:txBody>
+          <a:bodyPr rtlCol="0" anchor="ctr"/>
+          <a:lstStyle/>
+          <a:p>
+            <a:pPr algn="ctr"/>
+          </a:p>
+        </p:txBody>
+      </p:sp>
+      <p:sp>
+        <p:nvSpPr>
+          <p:cNvPr id="3" name="TextBox 2"/>
+          <p:cNvSpPr txBox="1"/>
+          <p:nvPr/>
+        </p:nvSpPr>
+        <p:spPr>
+          <a:xfrm>
+            <a:off x="484632" y="658368"/>
+            <a:ext cx="502920" cy="228600"/>
+          </a:xfrm>
+          <a:prstGeom prst="rect">
+            <a:avLst/>
+          </a:prstGeom>
+          <a:noFill/>
+        </p:spPr>
+        <p:txBody>
+          <a:bodyPr wrap="none">
+            <a:spAutoFit/>
+          </a:bodyPr>
+          <a:lstStyle/>
+          <a:p>
+            <a:pPr algn="ctr"/>
+            <a:r>
+              <a:rPr sz="900" b="1">
+                <a:latin typeface="BIZ UDPGothic"/>
+              </a:rPr>
+              <a:t>#316</a:t>
+            </a:r>
+          </a:p>
+        </p:txBody>
+      </p:sp>
+      <p:pic>
+        <p:nvPicPr>
+          <p:cNvPr id="4" name="Picture 3" descr="schluppuck.png"/>
+          <p:cNvPicPr>
+            <a:picLocks noChangeAspect="1"/>
+          </p:cNvPicPr>
+          <p:nvPr/>
+        </p:nvPicPr>
+        <p:blipFill>
+          <a:blip r:embed="rId2"/>
+          <a:stretch>
+            <a:fillRect/>
+          </a:stretch>
+        </p:blipFill>
+        <p:spPr>
+          <a:xfrm>
+            <a:off x="1044180" y="1005840"/>
+            <a:ext cx="1965960" cy="1965960"/>
+          </a:xfrm>
+          <a:prstGeom prst="rect">
+            <a:avLst/>
+          </a:prstGeom>
+        </p:spPr>
+      </p:pic>
+      <p:sp>
+        <p:nvSpPr>
+          <p:cNvPr id="5" name="TextBox 4"/>
+          <p:cNvSpPr txBox="1"/>
+          <p:nvPr/>
+        </p:nvSpPr>
+        <p:spPr>
+          <a:xfrm>
+            <a:off x="521208" y="3291840"/>
+            <a:ext cx="3011904" cy="274320"/>
+          </a:xfrm>
+          <a:prstGeom prst="rect">
+            <a:avLst/>
+          </a:prstGeom>
+          <a:noFill/>
+        </p:spPr>
+        <p:txBody>
+          <a:bodyPr wrap="none">
+            <a:spAutoFit/>
+          </a:bodyPr>
+          <a:lstStyle/>
+          <a:p>
+            <a:pPr algn="ctr"/>
+            <a:r>
+              <a:rPr sz="1400" b="0">
+                <a:latin typeface="BIZ UDPGothic"/>
+              </a:rPr>
+              <a:t>Schluppuck</a:t>
+            </a:r>
+          </a:p>
+        </p:txBody>
+      </p:sp>
+      <p:sp>
+        <p:nvSpPr>
+          <p:cNvPr id="6" name="TextBox 5"/>
+          <p:cNvSpPr txBox="1"/>
+          <p:nvPr/>
+        </p:nvSpPr>
+        <p:spPr>
+          <a:xfrm>
+            <a:off x="502920" y="3703320"/>
+            <a:ext cx="3048480" cy="384048"/>
+          </a:xfrm>
+          <a:prstGeom prst="rect">
+            <a:avLst/>
+          </a:prstGeom>
+          <a:noFill/>
+        </p:spPr>
+        <p:txBody>
+          <a:bodyPr wrap="none">
+            <a:spAutoFit/>
+          </a:bodyPr>
+          <a:lstStyle/>
+          <a:p>
+            <a:pPr algn="ctr"/>
+            <a:r>
+              <a:rPr sz="2400" b="1">
+                <a:latin typeface="BIZ UDPGothic"/>
+              </a:rPr>
+              <a:t>ご く り ん</a:t>
+            </a:r>
+          </a:p>
+        </p:txBody>
+      </p:sp>
+      <p:sp>
+        <p:nvSpPr>
+          <p:cNvPr id="7" name="TextBox 6"/>
+          <p:cNvSpPr txBox="1"/>
+          <p:nvPr/>
+        </p:nvSpPr>
+        <p:spPr>
+          <a:xfrm>
+            <a:off x="502920" y="4251960"/>
+            <a:ext cx="3048480" cy="320040"/>
+          </a:xfrm>
+          <a:prstGeom prst="rect">
+            <a:avLst/>
+          </a:prstGeom>
+          <a:noFill/>
+        </p:spPr>
+        <p:txBody>
+          <a:bodyPr wrap="none">
+            <a:spAutoFit/>
+          </a:bodyPr>
+          <a:lstStyle/>
+          <a:p>
+            <a:pPr algn="ctr"/>
+            <a:r>
+              <a:rPr sz="1500" b="0">
+                <a:latin typeface="BIZ UDPGothic"/>
+              </a:rPr>
+              <a:t>ゴクリン</a:t>
+            </a:r>
+          </a:p>
+        </p:txBody>
+      </p:sp>
+      <p:sp>
+        <p:nvSpPr>
+          <p:cNvPr id="8" name="TextBox 7"/>
+          <p:cNvSpPr txBox="1"/>
+          <p:nvPr/>
+        </p:nvSpPr>
+        <p:spPr>
+          <a:xfrm>
+            <a:off x="502920" y="4617720"/>
+            <a:ext cx="3048480" cy="228600"/>
+          </a:xfrm>
+          <a:prstGeom prst="rect">
+            <a:avLst/>
+          </a:prstGeom>
+          <a:noFill/>
+        </p:spPr>
+        <p:txBody>
+          <a:bodyPr wrap="none">
+            <a:spAutoFit/>
+          </a:bodyPr>
+          <a:lstStyle/>
+          <a:p>
+            <a:pPr algn="ctr"/>
+            <a:r>
+              <a:rPr sz="900" b="0">
+                <a:latin typeface="BIZ UDPGothic"/>
+              </a:rPr>
+              <a:t>タイプ：どく</a:t>
+            </a:r>
+          </a:p>
+        </p:txBody>
+      </p:sp>
+      <p:sp>
+        <p:nvSpPr>
+          <p:cNvPr id="9" name="Rounded Rectangle 8"/>
+          <p:cNvSpPr/>
+          <p:nvPr/>
+        </p:nvSpPr>
+        <p:spPr>
+          <a:xfrm>
+            <a:off x="3917160" y="320040"/>
+            <a:ext cx="3231360" cy="4888800"/>
+          </a:xfrm>
+          <a:prstGeom prst="roundRect">
+            <a:avLst/>
+          </a:prstGeom>
+          <a:noFill/>
+          <a:ln w="10160"/>
+        </p:spPr>
+        <p:style>
+          <a:lnRef idx="1">
+            <a:schemeClr val="accent1"/>
+          </a:lnRef>
+          <a:fillRef idx="3">
+            <a:schemeClr val="accent1"/>
+          </a:fillRef>
+          <a:effectRef idx="2">
+            <a:schemeClr val="accent1"/>
+          </a:effectRef>
+          <a:fontRef idx="minor">
+            <a:schemeClr val="lt1"/>
+          </a:fontRef>
+        </p:style>
+        <p:txBody>
+          <a:bodyPr rtlCol="0" anchor="ctr"/>
+          <a:lstStyle/>
+          <a:p>
+            <a:pPr algn="ctr"/>
+          </a:p>
+        </p:txBody>
+      </p:sp>
+      <p:sp>
+        <p:nvSpPr>
+          <p:cNvPr id="10" name="TextBox 9"/>
+          <p:cNvSpPr txBox="1"/>
+          <p:nvPr/>
+        </p:nvSpPr>
+        <p:spPr>
+          <a:xfrm>
+            <a:off x="3990312" y="658368"/>
+            <a:ext cx="502920" cy="228600"/>
+          </a:xfrm>
+          <a:prstGeom prst="rect">
+            <a:avLst/>
+          </a:prstGeom>
+          <a:noFill/>
+        </p:spPr>
+        <p:txBody>
+          <a:bodyPr wrap="none">
+            <a:spAutoFit/>
+          </a:bodyPr>
+          <a:lstStyle/>
+          <a:p>
+            <a:pPr algn="ctr"/>
+            <a:r>
+              <a:rPr sz="900" b="1">
+                <a:latin typeface="BIZ UDPGothic"/>
+              </a:rPr>
+              <a:t>#415</a:t>
+            </a:r>
+          </a:p>
+        </p:txBody>
+      </p:sp>
+      <p:pic>
+        <p:nvPicPr>
+          <p:cNvPr id="11" name="Picture 10" descr="wadribie.png"/>
+          <p:cNvPicPr>
+            <a:picLocks noChangeAspect="1"/>
+          </p:cNvPicPr>
+          <p:nvPr/>
+        </p:nvPicPr>
+        <p:blipFill>
+          <a:blip r:embed="rId3"/>
+          <a:stretch>
+            <a:fillRect/>
+          </a:stretch>
+        </p:blipFill>
+        <p:spPr>
+          <a:xfrm>
+            <a:off x="4549860" y="1005840"/>
+            <a:ext cx="1965960" cy="1965960"/>
+          </a:xfrm>
+          <a:prstGeom prst="rect">
+            <a:avLst/>
+          </a:prstGeom>
+        </p:spPr>
+      </p:pic>
+      <p:sp>
+        <p:nvSpPr>
+          <p:cNvPr id="12" name="TextBox 11"/>
+          <p:cNvSpPr txBox="1"/>
+          <p:nvPr/>
+        </p:nvSpPr>
+        <p:spPr>
+          <a:xfrm>
+            <a:off x="4026888" y="3291840"/>
+            <a:ext cx="3011904" cy="274320"/>
+          </a:xfrm>
+          <a:prstGeom prst="rect">
+            <a:avLst/>
+          </a:prstGeom>
+          <a:noFill/>
+        </p:spPr>
+        <p:txBody>
+          <a:bodyPr wrap="none">
+            <a:spAutoFit/>
+          </a:bodyPr>
+          <a:lstStyle/>
+          <a:p>
+            <a:pPr algn="ctr"/>
+            <a:r>
+              <a:rPr sz="1400" b="0">
+                <a:latin typeface="BIZ UDPGothic"/>
+              </a:rPr>
+              <a:t>Wadribie</a:t>
+            </a:r>
+          </a:p>
+        </p:txBody>
+      </p:sp>
+      <p:sp>
+        <p:nvSpPr>
+          <p:cNvPr id="13" name="TextBox 12"/>
+          <p:cNvSpPr txBox="1"/>
+          <p:nvPr/>
+        </p:nvSpPr>
+        <p:spPr>
+          <a:xfrm>
+            <a:off x="4008600" y="3703320"/>
+            <a:ext cx="3048480" cy="384048"/>
+          </a:xfrm>
+          <a:prstGeom prst="rect">
+            <a:avLst/>
+          </a:prstGeom>
+          <a:noFill/>
+        </p:spPr>
+        <p:txBody>
+          <a:bodyPr wrap="none">
+            <a:spAutoFit/>
+          </a:bodyPr>
+          <a:lstStyle/>
+          <a:p>
+            <a:pPr algn="ctr"/>
+            <a:r>
+              <a:rPr sz="2400" b="1">
+                <a:latin typeface="BIZ UDPGothic"/>
+              </a:rPr>
+              <a:t>み つ は に ー</a:t>
+            </a:r>
+          </a:p>
+        </p:txBody>
+      </p:sp>
+      <p:sp>
+        <p:nvSpPr>
+          <p:cNvPr id="14" name="TextBox 13"/>
+          <p:cNvSpPr txBox="1"/>
+          <p:nvPr/>
+        </p:nvSpPr>
+        <p:spPr>
+          <a:xfrm>
+            <a:off x="4008600" y="4251960"/>
+            <a:ext cx="3048480" cy="320040"/>
+          </a:xfrm>
+          <a:prstGeom prst="rect">
+            <a:avLst/>
+          </a:prstGeom>
+          <a:noFill/>
+        </p:spPr>
+        <p:txBody>
+          <a:bodyPr wrap="none">
+            <a:spAutoFit/>
+          </a:bodyPr>
+          <a:lstStyle/>
+          <a:p>
+            <a:pPr algn="ctr"/>
+            <a:r>
+              <a:rPr sz="1500" b="0">
+                <a:latin typeface="BIZ UDPGothic"/>
+              </a:rPr>
+              <a:t>ミツハニー</a:t>
+            </a:r>
+          </a:p>
+        </p:txBody>
+      </p:sp>
+      <p:sp>
+        <p:nvSpPr>
+          <p:cNvPr id="15" name="TextBox 14"/>
+          <p:cNvSpPr txBox="1"/>
+          <p:nvPr/>
+        </p:nvSpPr>
+        <p:spPr>
+          <a:xfrm>
+            <a:off x="4008600" y="4617720"/>
+            <a:ext cx="3048480" cy="228600"/>
+          </a:xfrm>
+          <a:prstGeom prst="rect">
+            <a:avLst/>
+          </a:prstGeom>
+          <a:noFill/>
+        </p:spPr>
+        <p:txBody>
+          <a:bodyPr wrap="none">
+            <a:spAutoFit/>
+          </a:bodyPr>
+          <a:lstStyle/>
+          <a:p>
+            <a:pPr algn="ctr"/>
+            <a:r>
+              <a:rPr sz="900" b="0">
+                <a:latin typeface="BIZ UDPGothic"/>
+              </a:rPr>
+              <a:t>タイプ：むし / ひこう</a:t>
+            </a:r>
+          </a:p>
+        </p:txBody>
+      </p:sp>
+      <p:sp>
+        <p:nvSpPr>
+          <p:cNvPr id="16" name="Rounded Rectangle 15"/>
+          <p:cNvSpPr/>
+          <p:nvPr/>
+        </p:nvSpPr>
+        <p:spPr>
+          <a:xfrm>
+            <a:off x="411480" y="5483160"/>
+            <a:ext cx="3231360" cy="4888800"/>
+          </a:xfrm>
+          <a:prstGeom prst="roundRect">
+            <a:avLst/>
+          </a:prstGeom>
+          <a:noFill/>
+          <a:ln w="10160"/>
+        </p:spPr>
+        <p:style>
+          <a:lnRef idx="1">
+            <a:schemeClr val="accent1"/>
+          </a:lnRef>
+          <a:fillRef idx="3">
+            <a:schemeClr val="accent1"/>
+          </a:fillRef>
+          <a:effectRef idx="2">
+            <a:schemeClr val="accent1"/>
+          </a:effectRef>
+          <a:fontRef idx="minor">
+            <a:schemeClr val="lt1"/>
+          </a:fontRef>
+        </p:style>
+        <p:txBody>
+          <a:bodyPr rtlCol="0" anchor="ctr"/>
+          <a:lstStyle/>
+          <a:p>
+            <a:pPr algn="ctr"/>
+          </a:p>
+        </p:txBody>
+      </p:sp>
+      <p:sp>
+        <p:nvSpPr>
+          <p:cNvPr id="17" name="TextBox 16"/>
+          <p:cNvSpPr txBox="1"/>
+          <p:nvPr/>
+        </p:nvSpPr>
+        <p:spPr>
+          <a:xfrm>
+            <a:off x="484632" y="5821488"/>
+            <a:ext cx="502920" cy="228600"/>
+          </a:xfrm>
+          <a:prstGeom prst="rect">
+            <a:avLst/>
+          </a:prstGeom>
+          <a:noFill/>
+        </p:spPr>
+        <p:txBody>
+          <a:bodyPr wrap="none">
+            <a:spAutoFit/>
+          </a:bodyPr>
+          <a:lstStyle/>
+          <a:p>
+            <a:pPr algn="ctr"/>
+            <a:r>
+              <a:rPr sz="900" b="1">
+                <a:latin typeface="BIZ UDPGothic"/>
+              </a:rPr>
+              <a:t>#416</a:t>
+            </a:r>
+          </a:p>
+        </p:txBody>
+      </p:sp>
+      <p:pic>
+        <p:nvPicPr>
+          <p:cNvPr id="18" name="Picture 17" descr="honweisel.png"/>
+          <p:cNvPicPr>
+            <a:picLocks noChangeAspect="1"/>
+          </p:cNvPicPr>
+          <p:nvPr/>
+        </p:nvPicPr>
+        <p:blipFill>
+          <a:blip r:embed="rId4"/>
+          <a:stretch>
+            <a:fillRect/>
+          </a:stretch>
+        </p:blipFill>
+        <p:spPr>
+          <a:xfrm>
+            <a:off x="1044180" y="6168960"/>
+            <a:ext cx="1965960" cy="1965960"/>
+          </a:xfrm>
+          <a:prstGeom prst="rect">
+            <a:avLst/>
+          </a:prstGeom>
+        </p:spPr>
+      </p:pic>
+      <p:sp>
+        <p:nvSpPr>
+          <p:cNvPr id="19" name="TextBox 18"/>
+          <p:cNvSpPr txBox="1"/>
+          <p:nvPr/>
+        </p:nvSpPr>
+        <p:spPr>
+          <a:xfrm>
+            <a:off x="521208" y="8454960"/>
+            <a:ext cx="3011904" cy="274320"/>
+          </a:xfrm>
+          <a:prstGeom prst="rect">
+            <a:avLst/>
+          </a:prstGeom>
+          <a:noFill/>
+        </p:spPr>
+        <p:txBody>
+          <a:bodyPr wrap="none">
+            <a:spAutoFit/>
+          </a:bodyPr>
+          <a:lstStyle/>
+          <a:p>
+            <a:pPr algn="ctr"/>
+            <a:r>
+              <a:rPr sz="1400" b="0">
+                <a:latin typeface="BIZ UDPGothic"/>
+              </a:rPr>
+              <a:t>Honweisel</a:t>
+            </a:r>
+          </a:p>
+        </p:txBody>
+      </p:sp>
+      <p:sp>
+        <p:nvSpPr>
+          <p:cNvPr id="20" name="TextBox 19"/>
+          <p:cNvSpPr txBox="1"/>
+          <p:nvPr/>
+        </p:nvSpPr>
+        <p:spPr>
+          <a:xfrm>
+            <a:off x="502920" y="8866440"/>
+            <a:ext cx="3048480" cy="384048"/>
+          </a:xfrm>
+          <a:prstGeom prst="rect">
+            <a:avLst/>
+          </a:prstGeom>
+          <a:noFill/>
+        </p:spPr>
+        <p:txBody>
+          <a:bodyPr wrap="none">
+            <a:spAutoFit/>
+          </a:bodyPr>
+          <a:lstStyle/>
+          <a:p>
+            <a:pPr algn="ctr"/>
+            <a:r>
+              <a:rPr sz="2400" b="1">
+                <a:latin typeface="BIZ UDPGothic"/>
+              </a:rPr>
+              <a:t>び ー く い ん</a:t>
+            </a:r>
+          </a:p>
+        </p:txBody>
+      </p:sp>
+      <p:sp>
+        <p:nvSpPr>
+          <p:cNvPr id="21" name="TextBox 20"/>
+          <p:cNvSpPr txBox="1"/>
+          <p:nvPr/>
+        </p:nvSpPr>
+        <p:spPr>
+          <a:xfrm>
+            <a:off x="502920" y="9415080"/>
+            <a:ext cx="3048480" cy="320040"/>
+          </a:xfrm>
+          <a:prstGeom prst="rect">
+            <a:avLst/>
+          </a:prstGeom>
+          <a:noFill/>
+        </p:spPr>
+        <p:txBody>
+          <a:bodyPr wrap="none">
+            <a:spAutoFit/>
+          </a:bodyPr>
+          <a:lstStyle/>
+          <a:p>
+            <a:pPr algn="ctr"/>
+            <a:r>
+              <a:rPr sz="1500" b="0">
+                <a:latin typeface="BIZ UDPGothic"/>
+              </a:rPr>
+              <a:t>ビークイン</a:t>
+            </a:r>
+          </a:p>
+        </p:txBody>
+      </p:sp>
+      <p:sp>
+        <p:nvSpPr>
+          <p:cNvPr id="22" name="TextBox 21"/>
+          <p:cNvSpPr txBox="1"/>
+          <p:nvPr/>
+        </p:nvSpPr>
+        <p:spPr>
+          <a:xfrm>
+            <a:off x="502920" y="9780840"/>
+            <a:ext cx="3048480" cy="228600"/>
+          </a:xfrm>
+          <a:prstGeom prst="rect">
+            <a:avLst/>
+          </a:prstGeom>
+          <a:noFill/>
+        </p:spPr>
+        <p:txBody>
+          <a:bodyPr wrap="none">
+            <a:spAutoFit/>
+          </a:bodyPr>
+          <a:lstStyle/>
+          <a:p>
+            <a:pPr algn="ctr"/>
+            <a:r>
+              <a:rPr sz="900" b="0">
+                <a:latin typeface="BIZ UDPGothic"/>
+              </a:rPr>
+              <a:t>タイプ：むし / ひこう</a:t>
+            </a:r>
+          </a:p>
+        </p:txBody>
+      </p:sp>
+      <p:sp>
+        <p:nvSpPr>
+          <p:cNvPr id="23" name="Rounded Rectangle 22"/>
+          <p:cNvSpPr/>
+          <p:nvPr/>
+        </p:nvSpPr>
+        <p:spPr>
+          <a:xfrm>
+            <a:off x="3917160" y="5483160"/>
+            <a:ext cx="3231360" cy="4888800"/>
+          </a:xfrm>
+          <a:prstGeom prst="roundRect">
+            <a:avLst/>
+          </a:prstGeom>
+          <a:noFill/>
+          <a:ln w="10160"/>
+        </p:spPr>
+        <p:style>
+          <a:lnRef idx="1">
+            <a:schemeClr val="accent1"/>
+          </a:lnRef>
+          <a:fillRef idx="3">
+            <a:schemeClr val="accent1"/>
+          </a:fillRef>
+          <a:effectRef idx="2">
+            <a:schemeClr val="accent1"/>
+          </a:effectRef>
+          <a:fontRef idx="minor">
+            <a:schemeClr val="lt1"/>
+          </a:fontRef>
+        </p:style>
+        <p:txBody>
+          <a:bodyPr rtlCol="0" anchor="ctr"/>
+          <a:lstStyle/>
+          <a:p>
+            <a:pPr algn="ctr"/>
+          </a:p>
+        </p:txBody>
+      </p:sp>
+      <p:sp>
+        <p:nvSpPr>
+          <p:cNvPr id="24" name="TextBox 23"/>
+          <p:cNvSpPr txBox="1"/>
+          <p:nvPr/>
+        </p:nvSpPr>
+        <p:spPr>
+          <a:xfrm>
+            <a:off x="3990312" y="5821488"/>
+            <a:ext cx="502920" cy="228600"/>
+          </a:xfrm>
+          <a:prstGeom prst="rect">
+            <a:avLst/>
+          </a:prstGeom>
+          <a:noFill/>
+        </p:spPr>
+        <p:txBody>
+          <a:bodyPr wrap="none">
+            <a:spAutoFit/>
+          </a:bodyPr>
+          <a:lstStyle/>
+          <a:p>
+            <a:pPr algn="ctr"/>
+            <a:r>
+              <a:rPr sz="900" b="1">
+                <a:latin typeface="BIZ UDPGothic"/>
+              </a:rPr>
+              <a:t>#422</a:t>
+            </a:r>
+          </a:p>
+        </p:txBody>
+      </p:sp>
+      <p:pic>
+        <p:nvPicPr>
+          <p:cNvPr id="25" name="Picture 24" descr="schalellos.png"/>
+          <p:cNvPicPr>
+            <a:picLocks noChangeAspect="1"/>
+          </p:cNvPicPr>
+          <p:nvPr/>
+        </p:nvPicPr>
+        <p:blipFill>
+          <a:blip r:embed="rId5"/>
+          <a:stretch>
+            <a:fillRect/>
+          </a:stretch>
+        </p:blipFill>
+        <p:spPr>
+          <a:xfrm>
+            <a:off x="4549860" y="6168960"/>
+            <a:ext cx="1965960" cy="1965960"/>
+          </a:xfrm>
+          <a:prstGeom prst="rect">
+            <a:avLst/>
+          </a:prstGeom>
+        </p:spPr>
+      </p:pic>
+      <p:sp>
+        <p:nvSpPr>
+          <p:cNvPr id="26" name="TextBox 25"/>
+          <p:cNvSpPr txBox="1"/>
+          <p:nvPr/>
+        </p:nvSpPr>
+        <p:spPr>
+          <a:xfrm>
+            <a:off x="4026888" y="8454960"/>
+            <a:ext cx="3011904" cy="274320"/>
+          </a:xfrm>
+          <a:prstGeom prst="rect">
+            <a:avLst/>
+          </a:prstGeom>
+          <a:noFill/>
+        </p:spPr>
+        <p:txBody>
+          <a:bodyPr wrap="none">
+            <a:spAutoFit/>
+          </a:bodyPr>
+          <a:lstStyle/>
+          <a:p>
+            <a:pPr algn="ctr"/>
+            <a:r>
+              <a:rPr sz="1400" b="0">
+                <a:latin typeface="BIZ UDPGothic"/>
+              </a:rPr>
+              <a:t>Schalellos</a:t>
+            </a:r>
+          </a:p>
+        </p:txBody>
+      </p:sp>
+      <p:sp>
+        <p:nvSpPr>
+          <p:cNvPr id="27" name="TextBox 26"/>
+          <p:cNvSpPr txBox="1"/>
+          <p:nvPr/>
+        </p:nvSpPr>
+        <p:spPr>
+          <a:xfrm>
+            <a:off x="4008600" y="8866440"/>
+            <a:ext cx="3048480" cy="384048"/>
+          </a:xfrm>
+          <a:prstGeom prst="rect">
+            <a:avLst/>
+          </a:prstGeom>
+          <a:noFill/>
+        </p:spPr>
+        <p:txBody>
+          <a:bodyPr wrap="none">
+            <a:spAutoFit/>
+          </a:bodyPr>
+          <a:lstStyle/>
+          <a:p>
+            <a:pPr algn="ctr"/>
+            <a:r>
+              <a:rPr sz="2400" b="1">
+                <a:latin typeface="BIZ UDPGothic"/>
+              </a:rPr>
+              <a:t>か ら な く し</a:t>
+            </a:r>
+          </a:p>
+        </p:txBody>
+      </p:sp>
+      <p:sp>
+        <p:nvSpPr>
+          <p:cNvPr id="28" name="TextBox 27"/>
+          <p:cNvSpPr txBox="1"/>
+          <p:nvPr/>
+        </p:nvSpPr>
+        <p:spPr>
+          <a:xfrm>
+            <a:off x="4008600" y="9415080"/>
+            <a:ext cx="3048480" cy="320040"/>
+          </a:xfrm>
+          <a:prstGeom prst="rect">
+            <a:avLst/>
+          </a:prstGeom>
+          <a:noFill/>
+        </p:spPr>
+        <p:txBody>
+          <a:bodyPr wrap="none">
+            <a:spAutoFit/>
+          </a:bodyPr>
+          <a:lstStyle/>
+          <a:p>
+            <a:pPr algn="ctr"/>
+            <a:r>
+              <a:rPr sz="1500" b="0">
+                <a:latin typeface="BIZ UDPGothic"/>
+              </a:rPr>
+              <a:t>カラナクシ</a:t>
+            </a:r>
+          </a:p>
+        </p:txBody>
+      </p:sp>
+      <p:sp>
+        <p:nvSpPr>
+          <p:cNvPr id="29" name="TextBox 28"/>
+          <p:cNvSpPr txBox="1"/>
+          <p:nvPr/>
+        </p:nvSpPr>
+        <p:spPr>
+          <a:xfrm>
+            <a:off x="4008600" y="9780840"/>
+            <a:ext cx="3048480" cy="228600"/>
+          </a:xfrm>
+          <a:prstGeom prst="rect">
+            <a:avLst/>
+          </a:prstGeom>
+          <a:noFill/>
+        </p:spPr>
+        <p:txBody>
+          <a:bodyPr wrap="none">
+            <a:spAutoFit/>
+          </a:bodyPr>
+          <a:lstStyle/>
+          <a:p>
+            <a:pPr algn="ctr"/>
+            <a:r>
+              <a:rPr sz="900" b="0">
+                <a:latin typeface="BIZ UDPGothic"/>
+              </a:rPr>
+              <a:t>タイプ：みず</a:t>
+            </a:r>
+          </a:p>
+        </p:txBody>
+      </p:sp>
+    </p:spTree>
+  </p:cSld>
+  <p:clrMapOvr>
+    <a:masterClrMapping/>
+  </p:clrMapOvr>
+</p:sld>
+</file>
+
+<file path=ppt/slides/slide7.xml><?xml version="1.0" encoding="utf-8"?>
+<p:sld xmlns:a="http://schemas.openxmlformats.org/drawingml/2006/main" xmlns:p="http://schemas.openxmlformats.org/presentationml/2006/main" xmlns:r="http://schemas.openxmlformats.org/officeDocument/2006/relationships">
+  <p:cSld>
+    <p:spTree>
+      <p:nvGrpSpPr>
+        <p:cNvPr id="1" name=""/>
+        <p:cNvGrpSpPr/>
+        <p:nvPr/>
+      </p:nvGrpSpPr>
+      <p:grpSpPr/>
+      <p:sp>
+        <p:nvSpPr>
+          <p:cNvPr id="2" name="Rounded Rectangle 1"/>
+          <p:cNvSpPr/>
+          <p:nvPr/>
+        </p:nvSpPr>
+        <p:spPr>
+          <a:xfrm>
+            <a:off x="411480" y="320040"/>
+            <a:ext cx="3231360" cy="4888800"/>
+          </a:xfrm>
+          <a:prstGeom prst="roundRect">
+            <a:avLst/>
+          </a:prstGeom>
+          <a:noFill/>
+          <a:ln w="10160"/>
+        </p:spPr>
+        <p:style>
+          <a:lnRef idx="1">
+            <a:schemeClr val="accent1"/>
+          </a:lnRef>
+          <a:fillRef idx="3">
+            <a:schemeClr val="accent1"/>
+          </a:fillRef>
+          <a:effectRef idx="2">
+            <a:schemeClr val="accent1"/>
+          </a:effectRef>
+          <a:fontRef idx="minor">
+            <a:schemeClr val="lt1"/>
+          </a:fontRef>
+        </p:style>
+        <p:txBody>
+          <a:bodyPr rtlCol="0" anchor="ctr"/>
+          <a:lstStyle/>
+          <a:p>
+            <a:pPr algn="ctr"/>
+          </a:p>
+        </p:txBody>
+      </p:sp>
+      <p:sp>
+        <p:nvSpPr>
+          <p:cNvPr id="3" name="TextBox 2"/>
+          <p:cNvSpPr txBox="1"/>
+          <p:nvPr/>
+        </p:nvSpPr>
+        <p:spPr>
+          <a:xfrm>
+            <a:off x="484632" y="658368"/>
+            <a:ext cx="502920" cy="228600"/>
+          </a:xfrm>
+          <a:prstGeom prst="rect">
+            <a:avLst/>
+          </a:prstGeom>
+          <a:noFill/>
+        </p:spPr>
+        <p:txBody>
+          <a:bodyPr wrap="none">
+            <a:spAutoFit/>
+          </a:bodyPr>
+          <a:lstStyle/>
+          <a:p>
+            <a:pPr algn="ctr"/>
+            <a:r>
+              <a:rPr sz="900" b="1">
+                <a:latin typeface="BIZ UDPGothic"/>
+              </a:rPr>
+              <a:t>#425</a:t>
+            </a:r>
+          </a:p>
+        </p:txBody>
+      </p:sp>
+      <p:pic>
+        <p:nvPicPr>
+          <p:cNvPr id="4" name="Picture 3" descr="driftlon.png"/>
+          <p:cNvPicPr>
+            <a:picLocks noChangeAspect="1"/>
+          </p:cNvPicPr>
+          <p:nvPr/>
+        </p:nvPicPr>
+        <p:blipFill>
+          <a:blip r:embed="rId2"/>
+          <a:stretch>
+            <a:fillRect/>
+          </a:stretch>
+        </p:blipFill>
+        <p:spPr>
+          <a:xfrm>
+            <a:off x="1044180" y="1005840"/>
+            <a:ext cx="1965960" cy="1965960"/>
+          </a:xfrm>
+          <a:prstGeom prst="rect">
+            <a:avLst/>
+          </a:prstGeom>
+        </p:spPr>
+      </p:pic>
+      <p:sp>
+        <p:nvSpPr>
+          <p:cNvPr id="5" name="TextBox 4"/>
+          <p:cNvSpPr txBox="1"/>
+          <p:nvPr/>
+        </p:nvSpPr>
+        <p:spPr>
+          <a:xfrm>
+            <a:off x="521208" y="3291840"/>
+            <a:ext cx="3011904" cy="274320"/>
+          </a:xfrm>
+          <a:prstGeom prst="rect">
+            <a:avLst/>
+          </a:prstGeom>
+          <a:noFill/>
+        </p:spPr>
+        <p:txBody>
+          <a:bodyPr wrap="none">
+            <a:spAutoFit/>
+          </a:bodyPr>
+          <a:lstStyle/>
+          <a:p>
+            <a:pPr algn="ctr"/>
+            <a:r>
+              <a:rPr sz="1400" b="0">
+                <a:latin typeface="BIZ UDPGothic"/>
+              </a:rPr>
+              <a:t>Driftlon</a:t>
+            </a:r>
+          </a:p>
+        </p:txBody>
+      </p:sp>
+      <p:sp>
+        <p:nvSpPr>
+          <p:cNvPr id="6" name="TextBox 5"/>
+          <p:cNvSpPr txBox="1"/>
+          <p:nvPr/>
+        </p:nvSpPr>
+        <p:spPr>
+          <a:xfrm>
+            <a:off x="502920" y="3703320"/>
+            <a:ext cx="3048480" cy="384048"/>
+          </a:xfrm>
+          <a:prstGeom prst="rect">
+            <a:avLst/>
+          </a:prstGeom>
+          <a:noFill/>
+        </p:spPr>
+        <p:txBody>
+          <a:bodyPr wrap="none">
+            <a:spAutoFit/>
+          </a:bodyPr>
+          <a:lstStyle/>
+          <a:p>
+            <a:pPr algn="ctr"/>
+            <a:r>
+              <a:rPr sz="2400" b="1">
+                <a:latin typeface="BIZ UDPGothic"/>
+              </a:rPr>
+              <a:t>ふ わ ん て</a:t>
+            </a:r>
+          </a:p>
+        </p:txBody>
+      </p:sp>
+      <p:sp>
+        <p:nvSpPr>
+          <p:cNvPr id="7" name="TextBox 6"/>
+          <p:cNvSpPr txBox="1"/>
+          <p:nvPr/>
+        </p:nvSpPr>
+        <p:spPr>
+          <a:xfrm>
+            <a:off x="502920" y="4251960"/>
+            <a:ext cx="3048480" cy="320040"/>
+          </a:xfrm>
+          <a:prstGeom prst="rect">
+            <a:avLst/>
+          </a:prstGeom>
+          <a:noFill/>
+        </p:spPr>
+        <p:txBody>
+          <a:bodyPr wrap="none">
+            <a:spAutoFit/>
+          </a:bodyPr>
+          <a:lstStyle/>
+          <a:p>
+            <a:pPr algn="ctr"/>
+            <a:r>
+              <a:rPr sz="1500" b="0">
+                <a:latin typeface="BIZ UDPGothic"/>
+              </a:rPr>
+              <a:t>フワンテ</a:t>
+            </a:r>
+          </a:p>
+        </p:txBody>
+      </p:sp>
+      <p:sp>
+        <p:nvSpPr>
+          <p:cNvPr id="8" name="TextBox 7"/>
+          <p:cNvSpPr txBox="1"/>
+          <p:nvPr/>
+        </p:nvSpPr>
+        <p:spPr>
+          <a:xfrm>
+            <a:off x="502920" y="4617720"/>
+            <a:ext cx="3048480" cy="228600"/>
+          </a:xfrm>
+          <a:prstGeom prst="rect">
+            <a:avLst/>
+          </a:prstGeom>
+          <a:noFill/>
+        </p:spPr>
+        <p:txBody>
+          <a:bodyPr wrap="none">
+            <a:spAutoFit/>
+          </a:bodyPr>
+          <a:lstStyle/>
+          <a:p>
+            <a:pPr algn="ctr"/>
+            <a:r>
+              <a:rPr sz="900" b="0">
+                <a:latin typeface="BIZ UDPGothic"/>
+              </a:rPr>
+              <a:t>タイプ：ゴースト / ひこう</a:t>
+            </a:r>
+          </a:p>
+        </p:txBody>
+      </p:sp>
+      <p:sp>
+        <p:nvSpPr>
+          <p:cNvPr id="9" name="Rounded Rectangle 8"/>
+          <p:cNvSpPr/>
+          <p:nvPr/>
+        </p:nvSpPr>
+        <p:spPr>
+          <a:xfrm>
+            <a:off x="3917160" y="320040"/>
+            <a:ext cx="3231360" cy="4888800"/>
+          </a:xfrm>
+          <a:prstGeom prst="roundRect">
+            <a:avLst/>
+          </a:prstGeom>
+          <a:noFill/>
+          <a:ln w="10160"/>
+        </p:spPr>
+        <p:style>
+          <a:lnRef idx="1">
+            <a:schemeClr val="accent1"/>
+          </a:lnRef>
+          <a:fillRef idx="3">
+            <a:schemeClr val="accent1"/>
+          </a:fillRef>
+          <a:effectRef idx="2">
+            <a:schemeClr val="accent1"/>
+          </a:effectRef>
+          <a:fontRef idx="minor">
+            <a:schemeClr val="lt1"/>
+          </a:fontRef>
+        </p:style>
+        <p:txBody>
+          <a:bodyPr rtlCol="0" anchor="ctr"/>
+          <a:lstStyle/>
+          <a:p>
+            <a:pPr algn="ctr"/>
+          </a:p>
+        </p:txBody>
+      </p:sp>
+      <p:sp>
+        <p:nvSpPr>
+          <p:cNvPr id="10" name="TextBox 9"/>
+          <p:cNvSpPr txBox="1"/>
+          <p:nvPr/>
+        </p:nvSpPr>
+        <p:spPr>
+          <a:xfrm>
+            <a:off x="3990312" y="658368"/>
+            <a:ext cx="502920" cy="228600"/>
+          </a:xfrm>
+          <a:prstGeom prst="rect">
+            <a:avLst/>
+          </a:prstGeom>
+          <a:noFill/>
+        </p:spPr>
+        <p:txBody>
+          <a:bodyPr wrap="none">
+            <a:spAutoFit/>
+          </a:bodyPr>
+          <a:lstStyle/>
+          <a:p>
+            <a:pPr algn="ctr"/>
+            <a:r>
+              <a:rPr sz="900" b="1">
+                <a:latin typeface="BIZ UDPGothic"/>
+              </a:rPr>
+              <a:t>#529</a:t>
+            </a:r>
+          </a:p>
+        </p:txBody>
+      </p:sp>
+      <p:pic>
+        <p:nvPicPr>
+          <p:cNvPr id="11" name="Picture 10" descr="rotomurf.png"/>
+          <p:cNvPicPr>
+            <a:picLocks noChangeAspect="1"/>
+          </p:cNvPicPr>
+          <p:nvPr/>
+        </p:nvPicPr>
+        <p:blipFill>
+          <a:blip r:embed="rId3"/>
+          <a:stretch>
+            <a:fillRect/>
+          </a:stretch>
+        </p:blipFill>
+        <p:spPr>
+          <a:xfrm>
+            <a:off x="4549860" y="1005840"/>
+            <a:ext cx="1965960" cy="1965960"/>
+          </a:xfrm>
+          <a:prstGeom prst="rect">
+            <a:avLst/>
+          </a:prstGeom>
+        </p:spPr>
+      </p:pic>
+      <p:sp>
+        <p:nvSpPr>
+          <p:cNvPr id="12" name="TextBox 11"/>
+          <p:cNvSpPr txBox="1"/>
+          <p:nvPr/>
+        </p:nvSpPr>
+        <p:spPr>
+          <a:xfrm>
+            <a:off x="4026888" y="3291840"/>
+            <a:ext cx="3011904" cy="274320"/>
+          </a:xfrm>
+          <a:prstGeom prst="rect">
+            <a:avLst/>
+          </a:prstGeom>
+          <a:noFill/>
+        </p:spPr>
+        <p:txBody>
+          <a:bodyPr wrap="none">
+            <a:spAutoFit/>
+          </a:bodyPr>
+          <a:lstStyle/>
+          <a:p>
+            <a:pPr algn="ctr"/>
+            <a:r>
+              <a:rPr sz="1400" b="0">
+                <a:latin typeface="BIZ UDPGothic"/>
+              </a:rPr>
+              <a:t>Rotomurf</a:t>
+            </a:r>
+          </a:p>
+        </p:txBody>
+      </p:sp>
+      <p:sp>
+        <p:nvSpPr>
+          <p:cNvPr id="13" name="TextBox 12"/>
+          <p:cNvSpPr txBox="1"/>
+          <p:nvPr/>
+        </p:nvSpPr>
+        <p:spPr>
+          <a:xfrm>
+            <a:off x="4008600" y="3703320"/>
+            <a:ext cx="3048480" cy="384048"/>
+          </a:xfrm>
+          <a:prstGeom prst="rect">
+            <a:avLst/>
+          </a:prstGeom>
+          <a:noFill/>
+        </p:spPr>
+        <p:txBody>
+          <a:bodyPr wrap="none">
+            <a:spAutoFit/>
+          </a:bodyPr>
+          <a:lstStyle/>
+          <a:p>
+            <a:pPr algn="ctr"/>
+            <a:r>
+              <a:rPr sz="2400" b="1">
+                <a:latin typeface="BIZ UDPGothic"/>
+              </a:rPr>
+              <a:t>も ぐ り ゅ ー</a:t>
+            </a:r>
+          </a:p>
+        </p:txBody>
+      </p:sp>
+      <p:sp>
+        <p:nvSpPr>
+          <p:cNvPr id="14" name="TextBox 13"/>
+          <p:cNvSpPr txBox="1"/>
+          <p:nvPr/>
+        </p:nvSpPr>
+        <p:spPr>
+          <a:xfrm>
+            <a:off x="4008600" y="4251960"/>
+            <a:ext cx="3048480" cy="320040"/>
+          </a:xfrm>
+          <a:prstGeom prst="rect">
+            <a:avLst/>
+          </a:prstGeom>
+          <a:noFill/>
+        </p:spPr>
+        <p:txBody>
+          <a:bodyPr wrap="none">
+            <a:spAutoFit/>
+          </a:bodyPr>
+          <a:lstStyle/>
+          <a:p>
+            <a:pPr algn="ctr"/>
+            <a:r>
+              <a:rPr sz="1500" b="0">
+                <a:latin typeface="BIZ UDPGothic"/>
+              </a:rPr>
+              <a:t>モグリュー</a:t>
+            </a:r>
+          </a:p>
+        </p:txBody>
+      </p:sp>
+      <p:sp>
+        <p:nvSpPr>
+          <p:cNvPr id="15" name="TextBox 14"/>
+          <p:cNvSpPr txBox="1"/>
+          <p:nvPr/>
+        </p:nvSpPr>
+        <p:spPr>
+          <a:xfrm>
+            <a:off x="4008600" y="4617720"/>
+            <a:ext cx="3048480" cy="228600"/>
+          </a:xfrm>
+          <a:prstGeom prst="rect">
+            <a:avLst/>
+          </a:prstGeom>
+          <a:noFill/>
+        </p:spPr>
+        <p:txBody>
+          <a:bodyPr wrap="none">
+            <a:spAutoFit/>
+          </a:bodyPr>
+          <a:lstStyle/>
+          <a:p>
+            <a:pPr algn="ctr"/>
+            <a:r>
+              <a:rPr sz="900" b="0">
+                <a:latin typeface="BIZ UDPGothic"/>
+              </a:rPr>
               <a:t>タイプ：じめん</a:t>
+            </a:r>
+          </a:p>
+        </p:txBody>
+      </p:sp>
+      <p:sp>
+        <p:nvSpPr>
+          <p:cNvPr id="16" name="Rounded Rectangle 15"/>
+          <p:cNvSpPr/>
+          <p:nvPr/>
+        </p:nvSpPr>
+        <p:spPr>
+          <a:xfrm>
+            <a:off x="411480" y="5483160"/>
+            <a:ext cx="3231360" cy="4888800"/>
+          </a:xfrm>
+          <a:prstGeom prst="roundRect">
+            <a:avLst/>
+          </a:prstGeom>
+          <a:noFill/>
+          <a:ln w="10160"/>
+        </p:spPr>
+        <p:style>
+          <a:lnRef idx="1">
+            <a:schemeClr val="accent1"/>
+          </a:lnRef>
+          <a:fillRef idx="3">
+            <a:schemeClr val="accent1"/>
+          </a:fillRef>
+          <a:effectRef idx="2">
+            <a:schemeClr val="accent1"/>
+          </a:effectRef>
+          <a:fontRef idx="minor">
+            <a:schemeClr val="lt1"/>
+          </a:fontRef>
+        </p:style>
+        <p:txBody>
+          <a:bodyPr rtlCol="0" anchor="ctr"/>
+          <a:lstStyle/>
+          <a:p>
+            <a:pPr algn="ctr"/>
+          </a:p>
+        </p:txBody>
+      </p:sp>
+      <p:sp>
+        <p:nvSpPr>
+          <p:cNvPr id="17" name="TextBox 16"/>
+          <p:cNvSpPr txBox="1"/>
+          <p:nvPr/>
+        </p:nvSpPr>
+        <p:spPr>
+          <a:xfrm>
+            <a:off x="484632" y="5821488"/>
+            <a:ext cx="502920" cy="228600"/>
+          </a:xfrm>
+          <a:prstGeom prst="rect">
+            <a:avLst/>
+          </a:prstGeom>
+          <a:noFill/>
+        </p:spPr>
+        <p:txBody>
+          <a:bodyPr wrap="none">
+            <a:spAutoFit/>
+          </a:bodyPr>
+          <a:lstStyle/>
+          <a:p>
+            <a:pPr algn="ctr"/>
+            <a:r>
+              <a:rPr sz="900" b="1">
+                <a:latin typeface="BIZ UDPGothic"/>
+              </a:rPr>
+              <a:t>#532</a:t>
+            </a:r>
+          </a:p>
+        </p:txBody>
+      </p:sp>
+      <p:pic>
+        <p:nvPicPr>
+          <p:cNvPr id="18" name="Picture 17" descr="praktibalk.png"/>
+          <p:cNvPicPr>
+            <a:picLocks noChangeAspect="1"/>
+          </p:cNvPicPr>
+          <p:nvPr/>
+        </p:nvPicPr>
+        <p:blipFill>
+          <a:blip r:embed="rId4"/>
+          <a:stretch>
+            <a:fillRect/>
+          </a:stretch>
+        </p:blipFill>
+        <p:spPr>
+          <a:xfrm>
+            <a:off x="1044180" y="6168960"/>
+            <a:ext cx="1965960" cy="1965960"/>
+          </a:xfrm>
+          <a:prstGeom prst="rect">
+            <a:avLst/>
+          </a:prstGeom>
+        </p:spPr>
+      </p:pic>
+      <p:sp>
+        <p:nvSpPr>
+          <p:cNvPr id="19" name="TextBox 18"/>
+          <p:cNvSpPr txBox="1"/>
+          <p:nvPr/>
+        </p:nvSpPr>
+        <p:spPr>
+          <a:xfrm>
+            <a:off x="521208" y="8454960"/>
+            <a:ext cx="3011904" cy="274320"/>
+          </a:xfrm>
+          <a:prstGeom prst="rect">
+            <a:avLst/>
+          </a:prstGeom>
+          <a:noFill/>
+        </p:spPr>
+        <p:txBody>
+          <a:bodyPr wrap="none">
+            <a:spAutoFit/>
+          </a:bodyPr>
+          <a:lstStyle/>
+          <a:p>
+            <a:pPr algn="ctr"/>
+            <a:r>
+              <a:rPr sz="1400" b="0">
+                <a:latin typeface="BIZ UDPGothic"/>
+              </a:rPr>
+              <a:t>Praktibalk</a:t>
+            </a:r>
+          </a:p>
+        </p:txBody>
+      </p:sp>
+      <p:sp>
+        <p:nvSpPr>
+          <p:cNvPr id="20" name="TextBox 19"/>
+          <p:cNvSpPr txBox="1"/>
+          <p:nvPr/>
+        </p:nvSpPr>
+        <p:spPr>
+          <a:xfrm>
+            <a:off x="502920" y="8866440"/>
+            <a:ext cx="3048480" cy="384048"/>
+          </a:xfrm>
+          <a:prstGeom prst="rect">
+            <a:avLst/>
+          </a:prstGeom>
+          <a:noFill/>
+        </p:spPr>
+        <p:txBody>
+          <a:bodyPr wrap="none">
+            <a:spAutoFit/>
+          </a:bodyPr>
+          <a:lstStyle/>
+          <a:p>
+            <a:pPr algn="ctr"/>
+            <a:r>
+              <a:rPr sz="2400" b="1">
+                <a:latin typeface="BIZ UDPGothic"/>
+              </a:rPr>
+              <a:t>ど っ こ ら ー</a:t>
+            </a:r>
+          </a:p>
+        </p:txBody>
+      </p:sp>
+      <p:sp>
+        <p:nvSpPr>
+          <p:cNvPr id="21" name="TextBox 20"/>
+          <p:cNvSpPr txBox="1"/>
+          <p:nvPr/>
+        </p:nvSpPr>
+        <p:spPr>
+          <a:xfrm>
+            <a:off x="502920" y="9415080"/>
+            <a:ext cx="3048480" cy="320040"/>
+          </a:xfrm>
+          <a:prstGeom prst="rect">
+            <a:avLst/>
+          </a:prstGeom>
+          <a:noFill/>
+        </p:spPr>
+        <p:txBody>
+          <a:bodyPr wrap="none">
+            <a:spAutoFit/>
+          </a:bodyPr>
+          <a:lstStyle/>
+          <a:p>
+            <a:pPr algn="ctr"/>
+            <a:r>
+              <a:rPr sz="1500" b="0">
+                <a:latin typeface="BIZ UDPGothic"/>
+              </a:rPr>
+              <a:t>ドッコラー</a:t>
+            </a:r>
+          </a:p>
+        </p:txBody>
+      </p:sp>
+      <p:sp>
+        <p:nvSpPr>
+          <p:cNvPr id="22" name="TextBox 21"/>
+          <p:cNvSpPr txBox="1"/>
+          <p:nvPr/>
+        </p:nvSpPr>
+        <p:spPr>
+          <a:xfrm>
+            <a:off x="502920" y="9780840"/>
+            <a:ext cx="3048480" cy="228600"/>
+          </a:xfrm>
+          <a:prstGeom prst="rect">
+            <a:avLst/>
+          </a:prstGeom>
+          <a:noFill/>
+        </p:spPr>
+        <p:txBody>
+          <a:bodyPr wrap="none">
+            <a:spAutoFit/>
+          </a:bodyPr>
+          <a:lstStyle/>
+          <a:p>
+            <a:pPr algn="ctr"/>
+            <a:r>
+              <a:rPr sz="900" b="0">
+                <a:latin typeface="BIZ UDPGothic"/>
+              </a:rPr>
+              <a:t>タイプ：かくとう</a:t>
+            </a:r>
+          </a:p>
+        </p:txBody>
+      </p:sp>
+      <p:sp>
+        <p:nvSpPr>
+          <p:cNvPr id="23" name="Rounded Rectangle 22"/>
+          <p:cNvSpPr/>
+          <p:nvPr/>
+        </p:nvSpPr>
+        <p:spPr>
+          <a:xfrm>
+            <a:off x="3917160" y="5483160"/>
+            <a:ext cx="3231360" cy="4888800"/>
+          </a:xfrm>
+          <a:prstGeom prst="roundRect">
+            <a:avLst/>
+          </a:prstGeom>
+          <a:noFill/>
+          <a:ln w="10160"/>
+        </p:spPr>
+        <p:style>
+          <a:lnRef idx="1">
+            <a:schemeClr val="accent1"/>
+          </a:lnRef>
+          <a:fillRef idx="3">
+            <a:schemeClr val="accent1"/>
+          </a:fillRef>
+          <a:effectRef idx="2">
+            <a:schemeClr val="accent1"/>
+          </a:effectRef>
+          <a:fontRef idx="minor">
+            <a:schemeClr val="lt1"/>
+          </a:fontRef>
+        </p:style>
+        <p:txBody>
+          <a:bodyPr rtlCol="0" anchor="ctr"/>
+          <a:lstStyle/>
+          <a:p>
+            <a:pPr algn="ctr"/>
+          </a:p>
+        </p:txBody>
+      </p:sp>
+      <p:sp>
+        <p:nvSpPr>
+          <p:cNvPr id="24" name="TextBox 23"/>
+          <p:cNvSpPr txBox="1"/>
+          <p:nvPr/>
+        </p:nvSpPr>
+        <p:spPr>
+          <a:xfrm>
+            <a:off x="3990312" y="5821488"/>
+            <a:ext cx="502920" cy="228600"/>
+          </a:xfrm>
+          <a:prstGeom prst="rect">
+            <a:avLst/>
+          </a:prstGeom>
+          <a:noFill/>
+        </p:spPr>
+        <p:txBody>
+          <a:bodyPr wrap="none">
+            <a:spAutoFit/>
+          </a:bodyPr>
+          <a:lstStyle/>
+          <a:p>
+            <a:pPr algn="ctr"/>
+            <a:r>
+              <a:rPr sz="900" b="1">
+                <a:latin typeface="BIZ UDPGothic"/>
+              </a:rPr>
+              <a:t>#533</a:t>
+            </a:r>
+          </a:p>
+        </p:txBody>
+      </p:sp>
+      <p:pic>
+        <p:nvPicPr>
+          <p:cNvPr id="25" name="Picture 24" descr="strepoli.png"/>
+          <p:cNvPicPr>
+            <a:picLocks noChangeAspect="1"/>
+          </p:cNvPicPr>
+          <p:nvPr/>
+        </p:nvPicPr>
+        <p:blipFill>
+          <a:blip r:embed="rId5"/>
+          <a:stretch>
+            <a:fillRect/>
+          </a:stretch>
+        </p:blipFill>
+        <p:spPr>
+          <a:xfrm>
+            <a:off x="4549860" y="6168960"/>
+            <a:ext cx="1965960" cy="1965960"/>
+          </a:xfrm>
+          <a:prstGeom prst="rect">
+            <a:avLst/>
+          </a:prstGeom>
+        </p:spPr>
+      </p:pic>
+      <p:sp>
+        <p:nvSpPr>
+          <p:cNvPr id="26" name="TextBox 25"/>
+          <p:cNvSpPr txBox="1"/>
+          <p:nvPr/>
+        </p:nvSpPr>
+        <p:spPr>
+          <a:xfrm>
+            <a:off x="4026888" y="8454960"/>
+            <a:ext cx="3011904" cy="274320"/>
+          </a:xfrm>
+          <a:prstGeom prst="rect">
+            <a:avLst/>
+          </a:prstGeom>
+          <a:noFill/>
+        </p:spPr>
+        <p:txBody>
+          <a:bodyPr wrap="none">
+            <a:spAutoFit/>
+          </a:bodyPr>
+          <a:lstStyle/>
+          <a:p>
+            <a:pPr algn="ctr"/>
+            <a:r>
+              <a:rPr sz="1400" b="0">
+                <a:latin typeface="BIZ UDPGothic"/>
+              </a:rPr>
+              <a:t>Strepoli</a:t>
+            </a:r>
+          </a:p>
+        </p:txBody>
+      </p:sp>
+      <p:sp>
+        <p:nvSpPr>
+          <p:cNvPr id="27" name="TextBox 26"/>
+          <p:cNvSpPr txBox="1"/>
+          <p:nvPr/>
+        </p:nvSpPr>
+        <p:spPr>
+          <a:xfrm>
+            <a:off x="4008600" y="8866440"/>
+            <a:ext cx="3048480" cy="384048"/>
+          </a:xfrm>
+          <a:prstGeom prst="rect">
+            <a:avLst/>
+          </a:prstGeom>
+          <a:noFill/>
+        </p:spPr>
+        <p:txBody>
+          <a:bodyPr wrap="none">
+            <a:spAutoFit/>
+          </a:bodyPr>
+          <a:lstStyle/>
+          <a:p>
+            <a:pPr algn="ctr"/>
+            <a:r>
+              <a:rPr sz="2400" b="1">
+                <a:latin typeface="BIZ UDPGothic"/>
+              </a:rPr>
+              <a:t>ど て っ こ つ</a:t>
+            </a:r>
+          </a:p>
+        </p:txBody>
+      </p:sp>
+      <p:sp>
+        <p:nvSpPr>
+          <p:cNvPr id="28" name="TextBox 27"/>
+          <p:cNvSpPr txBox="1"/>
+          <p:nvPr/>
+        </p:nvSpPr>
+        <p:spPr>
+          <a:xfrm>
+            <a:off x="4008600" y="9415080"/>
+            <a:ext cx="3048480" cy="320040"/>
+          </a:xfrm>
+          <a:prstGeom prst="rect">
+            <a:avLst/>
+          </a:prstGeom>
+          <a:noFill/>
+        </p:spPr>
+        <p:txBody>
+          <a:bodyPr wrap="none">
+            <a:spAutoFit/>
+          </a:bodyPr>
+          <a:lstStyle/>
+          <a:p>
+            <a:pPr algn="ctr"/>
+            <a:r>
+              <a:rPr sz="1500" b="0">
+                <a:latin typeface="BIZ UDPGothic"/>
+              </a:rPr>
+              <a:t>ドテッコツ</a:t>
+            </a:r>
+          </a:p>
+        </p:txBody>
+      </p:sp>
+      <p:sp>
+        <p:nvSpPr>
+          <p:cNvPr id="29" name="TextBox 28"/>
+          <p:cNvSpPr txBox="1"/>
+          <p:nvPr/>
+        </p:nvSpPr>
+        <p:spPr>
+          <a:xfrm>
+            <a:off x="4008600" y="9780840"/>
+            <a:ext cx="3048480" cy="228600"/>
+          </a:xfrm>
+          <a:prstGeom prst="rect">
+            <a:avLst/>
+          </a:prstGeom>
+          <a:noFill/>
+        </p:spPr>
+        <p:txBody>
+          <a:bodyPr wrap="none">
+            <a:spAutoFit/>
+          </a:bodyPr>
+          <a:lstStyle/>
+          <a:p>
+            <a:pPr algn="ctr"/>
+            <a:r>
+              <a:rPr sz="900" b="0">
+                <a:latin typeface="BIZ UDPGothic"/>
+              </a:rPr>
+              <a:t>タイプ：かくとう</a:t>
+            </a:r>
+          </a:p>
+        </p:txBody>
+      </p:sp>
+    </p:spTree>
+  </p:cSld>
+  <p:clrMapOvr>
+    <a:masterClrMapping/>
+  </p:clrMapOvr>
+</p:sld>
+</file>
+
+<file path=ppt/slides/slide8.xml><?xml version="1.0" encoding="utf-8"?>
+<p:sld xmlns:a="http://schemas.openxmlformats.org/drawingml/2006/main" xmlns:p="http://schemas.openxmlformats.org/presentationml/2006/main" xmlns:r="http://schemas.openxmlformats.org/officeDocument/2006/relationships">
+  <p:cSld>
+    <p:spTree>
+      <p:nvGrpSpPr>
+        <p:cNvPr id="1" name=""/>
+        <p:cNvGrpSpPr/>
+        <p:nvPr/>
+      </p:nvGrpSpPr>
+      <p:grpSpPr/>
+      <p:sp>
+        <p:nvSpPr>
+          <p:cNvPr id="2" name="Rounded Rectangle 1"/>
+          <p:cNvSpPr/>
+          <p:nvPr/>
+        </p:nvSpPr>
+        <p:spPr>
+          <a:xfrm>
+            <a:off x="411480" y="320040"/>
+            <a:ext cx="3231360" cy="4888800"/>
+          </a:xfrm>
+          <a:prstGeom prst="roundRect">
+            <a:avLst/>
+          </a:prstGeom>
+          <a:noFill/>
+          <a:ln w="10160"/>
+        </p:spPr>
+        <p:style>
+          <a:lnRef idx="1">
+            <a:schemeClr val="accent1"/>
+          </a:lnRef>
+          <a:fillRef idx="3">
+            <a:schemeClr val="accent1"/>
+          </a:fillRef>
+          <a:effectRef idx="2">
+            <a:schemeClr val="accent1"/>
+          </a:effectRef>
+          <a:fontRef idx="minor">
+            <a:schemeClr val="lt1"/>
+          </a:fontRef>
+        </p:style>
+        <p:txBody>
+          <a:bodyPr rtlCol="0" anchor="ctr"/>
+          <a:lstStyle/>
+          <a:p>
+            <a:pPr algn="ctr"/>
+          </a:p>
+        </p:txBody>
+      </p:sp>
+      <p:sp>
+        <p:nvSpPr>
+          <p:cNvPr id="3" name="TextBox 2"/>
+          <p:cNvSpPr txBox="1"/>
+          <p:nvPr/>
+        </p:nvSpPr>
+        <p:spPr>
+          <a:xfrm>
+            <a:off x="484632" y="658368"/>
+            <a:ext cx="502920" cy="228600"/>
+          </a:xfrm>
+          <a:prstGeom prst="rect">
+            <a:avLst/>
+          </a:prstGeom>
+          <a:noFill/>
+        </p:spPr>
+        <p:txBody>
+          <a:bodyPr wrap="none">
+            <a:spAutoFit/>
+          </a:bodyPr>
+          <a:lstStyle/>
+          <a:p>
+            <a:pPr algn="ctr"/>
+            <a:r>
+              <a:rPr sz="900" b="1">
+                <a:latin typeface="BIZ UDPGothic"/>
+              </a:rPr>
+              <a:t>#704</a:t>
+            </a:r>
+          </a:p>
+        </p:txBody>
+      </p:sp>
+      <p:pic>
+        <p:nvPicPr>
+          <p:cNvPr id="4" name="Picture 3" descr="viscora.png"/>
+          <p:cNvPicPr>
+            <a:picLocks noChangeAspect="1"/>
+          </p:cNvPicPr>
+          <p:nvPr/>
+        </p:nvPicPr>
+        <p:blipFill>
+          <a:blip r:embed="rId2"/>
+          <a:stretch>
+            <a:fillRect/>
+          </a:stretch>
+        </p:blipFill>
+        <p:spPr>
+          <a:xfrm>
+            <a:off x="1044180" y="1005840"/>
+            <a:ext cx="1965960" cy="1965960"/>
+          </a:xfrm>
+          <a:prstGeom prst="rect">
+            <a:avLst/>
+          </a:prstGeom>
+        </p:spPr>
+      </p:pic>
+      <p:sp>
+        <p:nvSpPr>
+          <p:cNvPr id="5" name="TextBox 4"/>
+          <p:cNvSpPr txBox="1"/>
+          <p:nvPr/>
+        </p:nvSpPr>
+        <p:spPr>
+          <a:xfrm>
+            <a:off x="521208" y="3291840"/>
+            <a:ext cx="3011904" cy="274320"/>
+          </a:xfrm>
+          <a:prstGeom prst="rect">
+            <a:avLst/>
+          </a:prstGeom>
+          <a:noFill/>
+        </p:spPr>
+        <p:txBody>
+          <a:bodyPr wrap="none">
+            <a:spAutoFit/>
+          </a:bodyPr>
+          <a:lstStyle/>
+          <a:p>
+            <a:pPr algn="ctr"/>
+            <a:r>
+              <a:rPr sz="1400" b="0">
+                <a:latin typeface="BIZ UDPGothic"/>
+              </a:rPr>
+              <a:t>Viscora</a:t>
+            </a:r>
+          </a:p>
+        </p:txBody>
+      </p:sp>
+      <p:sp>
+        <p:nvSpPr>
+          <p:cNvPr id="6" name="TextBox 5"/>
+          <p:cNvSpPr txBox="1"/>
+          <p:nvPr/>
+        </p:nvSpPr>
+        <p:spPr>
+          <a:xfrm>
+            <a:off x="502920" y="3703320"/>
+            <a:ext cx="3048480" cy="384048"/>
+          </a:xfrm>
+          <a:prstGeom prst="rect">
+            <a:avLst/>
+          </a:prstGeom>
+          <a:noFill/>
+        </p:spPr>
+        <p:txBody>
+          <a:bodyPr wrap="none">
+            <a:spAutoFit/>
+          </a:bodyPr>
+          <a:lstStyle/>
+          <a:p>
+            <a:pPr algn="ctr"/>
+            <a:r>
+              <a:rPr sz="2400" b="1">
+                <a:latin typeface="BIZ UDPGothic"/>
+              </a:rPr>
+              <a:t>ぬ め ら</a:t>
+            </a:r>
+          </a:p>
+        </p:txBody>
+      </p:sp>
+      <p:sp>
+        <p:nvSpPr>
+          <p:cNvPr id="7" name="TextBox 6"/>
+          <p:cNvSpPr txBox="1"/>
+          <p:nvPr/>
+        </p:nvSpPr>
+        <p:spPr>
+          <a:xfrm>
+            <a:off x="502920" y="4251960"/>
+            <a:ext cx="3048480" cy="320040"/>
+          </a:xfrm>
+          <a:prstGeom prst="rect">
+            <a:avLst/>
+          </a:prstGeom>
+          <a:noFill/>
+        </p:spPr>
+        <p:txBody>
+          <a:bodyPr wrap="none">
+            <a:spAutoFit/>
+          </a:bodyPr>
+          <a:lstStyle/>
+          <a:p>
+            <a:pPr algn="ctr"/>
+            <a:r>
+              <a:rPr sz="1500" b="0">
+                <a:latin typeface="BIZ UDPGothic"/>
+              </a:rPr>
+              <a:t>ヌメラ</a:t>
+            </a:r>
+          </a:p>
+        </p:txBody>
+      </p:sp>
+      <p:sp>
+        <p:nvSpPr>
+          <p:cNvPr id="8" name="TextBox 7"/>
+          <p:cNvSpPr txBox="1"/>
+          <p:nvPr/>
+        </p:nvSpPr>
+        <p:spPr>
+          <a:xfrm>
+            <a:off x="502920" y="4617720"/>
+            <a:ext cx="3048480" cy="228600"/>
+          </a:xfrm>
+          <a:prstGeom prst="rect">
+            <a:avLst/>
+          </a:prstGeom>
+          <a:noFill/>
+        </p:spPr>
+        <p:txBody>
+          <a:bodyPr wrap="none">
+            <a:spAutoFit/>
+          </a:bodyPr>
+          <a:lstStyle/>
+          <a:p>
+            <a:pPr algn="ctr"/>
+            <a:r>
+              <a:rPr sz="900" b="0">
+                <a:latin typeface="BIZ UDPGothic"/>
+              </a:rPr>
+              <a:t>タイプ：ドラゴン</a:t>
+            </a:r>
+          </a:p>
+        </p:txBody>
+      </p:sp>
+      <p:sp>
+        <p:nvSpPr>
+          <p:cNvPr id="9" name="Rounded Rectangle 8"/>
+          <p:cNvSpPr/>
+          <p:nvPr/>
+        </p:nvSpPr>
+        <p:spPr>
+          <a:xfrm>
+            <a:off x="3917160" y="320040"/>
+            <a:ext cx="3231360" cy="4888800"/>
+          </a:xfrm>
+          <a:prstGeom prst="roundRect">
+            <a:avLst/>
+          </a:prstGeom>
+          <a:noFill/>
+          <a:ln w="10160"/>
+        </p:spPr>
+        <p:style>
+          <a:lnRef idx="1">
+            <a:schemeClr val="accent1"/>
+          </a:lnRef>
+          <a:fillRef idx="3">
+            <a:schemeClr val="accent1"/>
+          </a:fillRef>
+          <a:effectRef idx="2">
+            <a:schemeClr val="accent1"/>
+          </a:effectRef>
+          <a:fontRef idx="minor">
+            <a:schemeClr val="lt1"/>
+          </a:fontRef>
+        </p:style>
+        <p:txBody>
+          <a:bodyPr rtlCol="0" anchor="ctr"/>
+          <a:lstStyle/>
+          <a:p>
+            <a:pPr algn="ctr"/>
+          </a:p>
+        </p:txBody>
+      </p:sp>
+      <p:sp>
+        <p:nvSpPr>
+          <p:cNvPr id="10" name="TextBox 9"/>
+          <p:cNvSpPr txBox="1"/>
+          <p:nvPr/>
+        </p:nvSpPr>
+        <p:spPr>
+          <a:xfrm>
+            <a:off x="3990312" y="658368"/>
+            <a:ext cx="502920" cy="228600"/>
+          </a:xfrm>
+          <a:prstGeom prst="rect">
+            <a:avLst/>
+          </a:prstGeom>
+          <a:noFill/>
+        </p:spPr>
+        <p:txBody>
+          <a:bodyPr wrap="none">
+            <a:spAutoFit/>
+          </a:bodyPr>
+          <a:lstStyle/>
+          <a:p>
+            <a:pPr algn="ctr"/>
+            <a:r>
+              <a:rPr sz="900" b="1">
+                <a:latin typeface="BIZ UDPGothic"/>
+              </a:rPr>
+              <a:t>#052</a:t>
+            </a:r>
+          </a:p>
+        </p:txBody>
+      </p:sp>
+      <p:pic>
+        <p:nvPicPr>
+          <p:cNvPr id="11" name="Picture 10" descr="mauzi.png"/>
+          <p:cNvPicPr>
+            <a:picLocks noChangeAspect="1"/>
+          </p:cNvPicPr>
+          <p:nvPr/>
+        </p:nvPicPr>
+        <p:blipFill>
+          <a:blip r:embed="rId3"/>
+          <a:stretch>
+            <a:fillRect/>
+          </a:stretch>
+        </p:blipFill>
+        <p:spPr>
+          <a:xfrm>
+            <a:off x="4549860" y="1005840"/>
+            <a:ext cx="1965960" cy="1965960"/>
+          </a:xfrm>
+          <a:prstGeom prst="rect">
+            <a:avLst/>
+          </a:prstGeom>
+        </p:spPr>
+      </p:pic>
+      <p:sp>
+        <p:nvSpPr>
+          <p:cNvPr id="12" name="TextBox 11"/>
+          <p:cNvSpPr txBox="1"/>
+          <p:nvPr/>
+        </p:nvSpPr>
+        <p:spPr>
+          <a:xfrm>
+            <a:off x="4026888" y="3291840"/>
+            <a:ext cx="3011904" cy="274320"/>
+          </a:xfrm>
+          <a:prstGeom prst="rect">
+            <a:avLst/>
+          </a:prstGeom>
+          <a:noFill/>
+        </p:spPr>
+        <p:txBody>
+          <a:bodyPr wrap="none">
+            <a:spAutoFit/>
+          </a:bodyPr>
+          <a:lstStyle/>
+          <a:p>
+            <a:pPr algn="ctr"/>
+            <a:r>
+              <a:rPr sz="1400" b="0">
+                <a:latin typeface="BIZ UDPGothic"/>
+              </a:rPr>
+              <a:t>Mauzi</a:t>
+            </a:r>
+          </a:p>
+        </p:txBody>
+      </p:sp>
+      <p:sp>
+        <p:nvSpPr>
+          <p:cNvPr id="13" name="TextBox 12"/>
+          <p:cNvSpPr txBox="1"/>
+          <p:nvPr/>
+        </p:nvSpPr>
+        <p:spPr>
+          <a:xfrm>
+            <a:off x="4008600" y="3703320"/>
+            <a:ext cx="3048480" cy="384048"/>
+          </a:xfrm>
+          <a:prstGeom prst="rect">
+            <a:avLst/>
+          </a:prstGeom>
+          <a:noFill/>
+        </p:spPr>
+        <p:txBody>
+          <a:bodyPr wrap="none">
+            <a:spAutoFit/>
+          </a:bodyPr>
+          <a:lstStyle/>
+          <a:p>
+            <a:pPr algn="ctr"/>
+            <a:r>
+              <a:rPr sz="2400" b="1">
+                <a:latin typeface="BIZ UDPGothic"/>
+              </a:rPr>
+              <a:t>に ゃ ー す</a:t>
+            </a:r>
+          </a:p>
+        </p:txBody>
+      </p:sp>
+      <p:sp>
+        <p:nvSpPr>
+          <p:cNvPr id="14" name="TextBox 13"/>
+          <p:cNvSpPr txBox="1"/>
+          <p:nvPr/>
+        </p:nvSpPr>
+        <p:spPr>
+          <a:xfrm>
+            <a:off x="4008600" y="4251960"/>
+            <a:ext cx="3048480" cy="320040"/>
+          </a:xfrm>
+          <a:prstGeom prst="rect">
+            <a:avLst/>
+          </a:prstGeom>
+          <a:noFill/>
+        </p:spPr>
+        <p:txBody>
+          <a:bodyPr wrap="none">
+            <a:spAutoFit/>
+          </a:bodyPr>
+          <a:lstStyle/>
+          <a:p>
+            <a:pPr algn="ctr"/>
+            <a:r>
+              <a:rPr sz="1500" b="0">
+                <a:latin typeface="BIZ UDPGothic"/>
+              </a:rPr>
+              <a:t>ニャース</a:t>
+            </a:r>
+          </a:p>
+        </p:txBody>
+      </p:sp>
+      <p:sp>
+        <p:nvSpPr>
+          <p:cNvPr id="15" name="TextBox 14"/>
+          <p:cNvSpPr txBox="1"/>
+          <p:nvPr/>
+        </p:nvSpPr>
+        <p:spPr>
+          <a:xfrm>
+            <a:off x="4008600" y="4617720"/>
+            <a:ext cx="3048480" cy="228600"/>
+          </a:xfrm>
+          <a:prstGeom prst="rect">
+            <a:avLst/>
+          </a:prstGeom>
+          <a:noFill/>
+        </p:spPr>
+        <p:txBody>
+          <a:bodyPr wrap="none">
+            <a:spAutoFit/>
+          </a:bodyPr>
+          <a:lstStyle/>
+          <a:p>
+            <a:pPr algn="ctr"/>
+            <a:r>
+              <a:rPr sz="900" b="0">
+                <a:latin typeface="BIZ UDPGothic"/>
+              </a:rPr>
+              <a:t>タイプ：ノーマル</a:t>
+            </a:r>
+          </a:p>
+        </p:txBody>
+      </p:sp>
+      <p:sp>
+        <p:nvSpPr>
+          <p:cNvPr id="16" name="Rounded Rectangle 15"/>
+          <p:cNvSpPr/>
+          <p:nvPr/>
+        </p:nvSpPr>
+        <p:spPr>
+          <a:xfrm>
+            <a:off x="411480" y="5483160"/>
+            <a:ext cx="3231360" cy="4888800"/>
+          </a:xfrm>
+          <a:prstGeom prst="roundRect">
+            <a:avLst/>
+          </a:prstGeom>
+          <a:noFill/>
+          <a:ln w="10160"/>
+        </p:spPr>
+        <p:style>
+          <a:lnRef idx="1">
+            <a:schemeClr val="accent1"/>
+          </a:lnRef>
+          <a:fillRef idx="3">
+            <a:schemeClr val="accent1"/>
+          </a:fillRef>
+          <a:effectRef idx="2">
+            <a:schemeClr val="accent1"/>
+          </a:effectRef>
+          <a:fontRef idx="minor">
+            <a:schemeClr val="lt1"/>
+          </a:fontRef>
+        </p:style>
+        <p:txBody>
+          <a:bodyPr rtlCol="0" anchor="ctr"/>
+          <a:lstStyle/>
+          <a:p>
+            <a:pPr algn="ctr"/>
+          </a:p>
+        </p:txBody>
+      </p:sp>
+      <p:sp>
+        <p:nvSpPr>
+          <p:cNvPr id="17" name="TextBox 16"/>
+          <p:cNvSpPr txBox="1"/>
+          <p:nvPr/>
+        </p:nvSpPr>
+        <p:spPr>
+          <a:xfrm>
+            <a:off x="484632" y="5821488"/>
+            <a:ext cx="502920" cy="228600"/>
+          </a:xfrm>
+          <a:prstGeom prst="rect">
+            <a:avLst/>
+          </a:prstGeom>
+          <a:noFill/>
+        </p:spPr>
+        <p:txBody>
+          <a:bodyPr wrap="none">
+            <a:spAutoFit/>
+          </a:bodyPr>
+          <a:lstStyle/>
+          <a:p>
+            <a:pPr algn="ctr"/>
+            <a:r>
+              <a:rPr sz="900" b="1">
+                <a:latin typeface="BIZ UDPGothic"/>
+              </a:rPr>
+              <a:t>#066</a:t>
+            </a:r>
+          </a:p>
+        </p:txBody>
+      </p:sp>
+      <p:pic>
+        <p:nvPicPr>
+          <p:cNvPr id="18" name="Picture 17" descr="machollo.png"/>
+          <p:cNvPicPr>
+            <a:picLocks noChangeAspect="1"/>
+          </p:cNvPicPr>
+          <p:nvPr/>
+        </p:nvPicPr>
+        <p:blipFill>
+          <a:blip r:embed="rId4"/>
+          <a:stretch>
+            <a:fillRect/>
+          </a:stretch>
+        </p:blipFill>
+        <p:spPr>
+          <a:xfrm>
+            <a:off x="1044180" y="6168960"/>
+            <a:ext cx="1965960" cy="1965960"/>
+          </a:xfrm>
+          <a:prstGeom prst="rect">
+            <a:avLst/>
+          </a:prstGeom>
+        </p:spPr>
+      </p:pic>
+      <p:sp>
+        <p:nvSpPr>
+          <p:cNvPr id="19" name="TextBox 18"/>
+          <p:cNvSpPr txBox="1"/>
+          <p:nvPr/>
+        </p:nvSpPr>
+        <p:spPr>
+          <a:xfrm>
+            <a:off x="521208" y="8454960"/>
+            <a:ext cx="3011904" cy="274320"/>
+          </a:xfrm>
+          <a:prstGeom prst="rect">
+            <a:avLst/>
+          </a:prstGeom>
+          <a:noFill/>
+        </p:spPr>
+        <p:txBody>
+          <a:bodyPr wrap="none">
+            <a:spAutoFit/>
+          </a:bodyPr>
+          <a:lstStyle/>
+          <a:p>
+            <a:pPr algn="ctr"/>
+            <a:r>
+              <a:rPr sz="1400" b="0">
+                <a:latin typeface="BIZ UDPGothic"/>
+              </a:rPr>
+              <a:t>Machollo</a:t>
+            </a:r>
+          </a:p>
+        </p:txBody>
+      </p:sp>
+      <p:sp>
+        <p:nvSpPr>
+          <p:cNvPr id="20" name="TextBox 19"/>
+          <p:cNvSpPr txBox="1"/>
+          <p:nvPr/>
+        </p:nvSpPr>
+        <p:spPr>
+          <a:xfrm>
+            <a:off x="502920" y="8866440"/>
+            <a:ext cx="3048480" cy="384048"/>
+          </a:xfrm>
+          <a:prstGeom prst="rect">
+            <a:avLst/>
+          </a:prstGeom>
+          <a:noFill/>
+        </p:spPr>
+        <p:txBody>
+          <a:bodyPr wrap="none">
+            <a:spAutoFit/>
+          </a:bodyPr>
+          <a:lstStyle/>
+          <a:p>
+            <a:pPr algn="ctr"/>
+            <a:r>
+              <a:rPr sz="2400" b="1">
+                <a:latin typeface="BIZ UDPGothic"/>
+              </a:rPr>
+              <a:t>わ ん り き ー</a:t>
+            </a:r>
+          </a:p>
+        </p:txBody>
+      </p:sp>
+      <p:sp>
+        <p:nvSpPr>
+          <p:cNvPr id="21" name="TextBox 20"/>
+          <p:cNvSpPr txBox="1"/>
+          <p:nvPr/>
+        </p:nvSpPr>
+        <p:spPr>
+          <a:xfrm>
+            <a:off x="502920" y="9415080"/>
+            <a:ext cx="3048480" cy="320040"/>
+          </a:xfrm>
+          <a:prstGeom prst="rect">
+            <a:avLst/>
+          </a:prstGeom>
+          <a:noFill/>
+        </p:spPr>
+        <p:txBody>
+          <a:bodyPr wrap="none">
+            <a:spAutoFit/>
+          </a:bodyPr>
+          <a:lstStyle/>
+          <a:p>
+            <a:pPr algn="ctr"/>
+            <a:r>
+              <a:rPr sz="1500" b="0">
+                <a:latin typeface="BIZ UDPGothic"/>
+              </a:rPr>
+              <a:t>ワンリキー</a:t>
+            </a:r>
+          </a:p>
+        </p:txBody>
+      </p:sp>
+      <p:sp>
+        <p:nvSpPr>
+          <p:cNvPr id="22" name="TextBox 21"/>
+          <p:cNvSpPr txBox="1"/>
+          <p:nvPr/>
+        </p:nvSpPr>
+        <p:spPr>
+          <a:xfrm>
+            <a:off x="502920" y="9780840"/>
+            <a:ext cx="3048480" cy="228600"/>
+          </a:xfrm>
+          <a:prstGeom prst="rect">
+            <a:avLst/>
+          </a:prstGeom>
+          <a:noFill/>
+        </p:spPr>
+        <p:txBody>
+          <a:bodyPr wrap="none">
+            <a:spAutoFit/>
+          </a:bodyPr>
+          <a:lstStyle/>
+          <a:p>
+            <a:pPr algn="ctr"/>
+            <a:r>
+              <a:rPr sz="900" b="0">
+                <a:latin typeface="BIZ UDPGothic"/>
+              </a:rPr>
+              <a:t>タイプ：かくとう</a:t>
+            </a:r>
+          </a:p>
+        </p:txBody>
+      </p:sp>
+      <p:sp>
+        <p:nvSpPr>
+          <p:cNvPr id="23" name="Rounded Rectangle 22"/>
+          <p:cNvSpPr/>
+          <p:nvPr/>
+        </p:nvSpPr>
+        <p:spPr>
+          <a:xfrm>
+            <a:off x="3917160" y="5483160"/>
+            <a:ext cx="3231360" cy="4888800"/>
+          </a:xfrm>
+          <a:prstGeom prst="roundRect">
+            <a:avLst/>
+          </a:prstGeom>
+          <a:noFill/>
+          <a:ln w="10160"/>
+        </p:spPr>
+        <p:style>
+          <a:lnRef idx="1">
+            <a:schemeClr val="accent1"/>
+          </a:lnRef>
+          <a:fillRef idx="3">
+            <a:schemeClr val="accent1"/>
+          </a:fillRef>
+          <a:effectRef idx="2">
+            <a:schemeClr val="accent1"/>
+          </a:effectRef>
+          <a:fontRef idx="minor">
+            <a:schemeClr val="lt1"/>
+          </a:fontRef>
+        </p:style>
+        <p:txBody>
+          <a:bodyPr rtlCol="0" anchor="ctr"/>
+          <a:lstStyle/>
+          <a:p>
+            <a:pPr algn="ctr"/>
+          </a:p>
+        </p:txBody>
+      </p:sp>
+      <p:sp>
+        <p:nvSpPr>
+          <p:cNvPr id="24" name="TextBox 23"/>
+          <p:cNvSpPr txBox="1"/>
+          <p:nvPr/>
+        </p:nvSpPr>
+        <p:spPr>
+          <a:xfrm>
+            <a:off x="3990312" y="5821488"/>
+            <a:ext cx="502920" cy="228600"/>
+          </a:xfrm>
+          <a:prstGeom prst="rect">
+            <a:avLst/>
+          </a:prstGeom>
+          <a:noFill/>
+        </p:spPr>
+        <p:txBody>
+          <a:bodyPr wrap="none">
+            <a:spAutoFit/>
+          </a:bodyPr>
+          <a:lstStyle/>
+          <a:p>
+            <a:pPr algn="ctr"/>
+            <a:r>
+              <a:rPr sz="900" b="1">
+                <a:latin typeface="BIZ UDPGothic"/>
+              </a:rPr>
+              <a:t>#067</a:t>
+            </a:r>
+          </a:p>
+        </p:txBody>
+      </p:sp>
+      <p:pic>
+        <p:nvPicPr>
+          <p:cNvPr id="25" name="Picture 24" descr="maschock.png"/>
+          <p:cNvPicPr>
+            <a:picLocks noChangeAspect="1"/>
+          </p:cNvPicPr>
+          <p:nvPr/>
+        </p:nvPicPr>
+        <p:blipFill>
+          <a:blip r:embed="rId5"/>
+          <a:stretch>
+            <a:fillRect/>
+          </a:stretch>
+        </p:blipFill>
+        <p:spPr>
+          <a:xfrm>
+            <a:off x="4549860" y="6168960"/>
+            <a:ext cx="1965960" cy="1965960"/>
+          </a:xfrm>
+          <a:prstGeom prst="rect">
+            <a:avLst/>
+          </a:prstGeom>
+        </p:spPr>
+      </p:pic>
+      <p:sp>
+        <p:nvSpPr>
+          <p:cNvPr id="26" name="TextBox 25"/>
+          <p:cNvSpPr txBox="1"/>
+          <p:nvPr/>
+        </p:nvSpPr>
+        <p:spPr>
+          <a:xfrm>
+            <a:off x="4026888" y="8454960"/>
+            <a:ext cx="3011904" cy="274320"/>
+          </a:xfrm>
+          <a:prstGeom prst="rect">
+            <a:avLst/>
+          </a:prstGeom>
+          <a:noFill/>
+        </p:spPr>
+        <p:txBody>
+          <a:bodyPr wrap="none">
+            <a:spAutoFit/>
+          </a:bodyPr>
+          <a:lstStyle/>
+          <a:p>
+            <a:pPr algn="ctr"/>
+            <a:r>
+              <a:rPr sz="1400" b="0">
+                <a:latin typeface="BIZ UDPGothic"/>
+              </a:rPr>
+              <a:t>Maschock</a:t>
+            </a:r>
+          </a:p>
+        </p:txBody>
+      </p:sp>
+      <p:sp>
+        <p:nvSpPr>
+          <p:cNvPr id="27" name="TextBox 26"/>
+          <p:cNvSpPr txBox="1"/>
+          <p:nvPr/>
+        </p:nvSpPr>
+        <p:spPr>
+          <a:xfrm>
+            <a:off x="4008600" y="8866440"/>
+            <a:ext cx="3048480" cy="384048"/>
+          </a:xfrm>
+          <a:prstGeom prst="rect">
+            <a:avLst/>
+          </a:prstGeom>
+          <a:noFill/>
+        </p:spPr>
+        <p:txBody>
+          <a:bodyPr wrap="none">
+            <a:spAutoFit/>
+          </a:bodyPr>
+          <a:lstStyle/>
+          <a:p>
+            <a:pPr algn="ctr"/>
+            <a:r>
+              <a:rPr sz="2400" b="1">
+                <a:latin typeface="BIZ UDPGothic"/>
+              </a:rPr>
+              <a:t>ご ー り き ー</a:t>
+            </a:r>
+          </a:p>
+        </p:txBody>
+      </p:sp>
+      <p:sp>
+        <p:nvSpPr>
+          <p:cNvPr id="28" name="TextBox 27"/>
+          <p:cNvSpPr txBox="1"/>
+          <p:nvPr/>
+        </p:nvSpPr>
+        <p:spPr>
+          <a:xfrm>
+            <a:off x="4008600" y="9415080"/>
+            <a:ext cx="3048480" cy="320040"/>
+          </a:xfrm>
+          <a:prstGeom prst="rect">
+            <a:avLst/>
+          </a:prstGeom>
+          <a:noFill/>
+        </p:spPr>
+        <p:txBody>
+          <a:bodyPr wrap="none">
+            <a:spAutoFit/>
+          </a:bodyPr>
+          <a:lstStyle/>
+          <a:p>
+            <a:pPr algn="ctr"/>
+            <a:r>
+              <a:rPr sz="1500" b="0">
+                <a:latin typeface="BIZ UDPGothic"/>
+              </a:rPr>
+              <a:t>ゴーリキー</a:t>
+            </a:r>
+          </a:p>
+        </p:txBody>
+      </p:sp>
+      <p:sp>
+        <p:nvSpPr>
+          <p:cNvPr id="29" name="TextBox 28"/>
+          <p:cNvSpPr txBox="1"/>
+          <p:nvPr/>
+        </p:nvSpPr>
+        <p:spPr>
+          <a:xfrm>
+            <a:off x="4008600" y="9780840"/>
+            <a:ext cx="3048480" cy="228600"/>
+          </a:xfrm>
+          <a:prstGeom prst="rect">
+            <a:avLst/>
+          </a:prstGeom>
+          <a:noFill/>
+        </p:spPr>
+        <p:txBody>
+          <a:bodyPr wrap="none">
+            <a:spAutoFit/>
+          </a:bodyPr>
+          <a:lstStyle/>
+          <a:p>
+            <a:pPr algn="ctr"/>
+            <a:r>
+              <a:rPr sz="900" b="0">
+                <a:latin typeface="BIZ UDPGothic"/>
+              </a:rPr>
+              <a:t>タイプ：かくとう</a:t>
+            </a:r>
+          </a:p>
+        </p:txBody>
+      </p:sp>
+    </p:spTree>
+  </p:cSld>
+  <p:clrMapOvr>
+    <a:masterClrMapping/>
+  </p:clrMapOvr>
+</p:sld>
+</file>
+
+<file path=ppt/slides/slide9.xml><?xml version="1.0" encoding="utf-8"?>
+<p:sld xmlns:a="http://schemas.openxmlformats.org/drawingml/2006/main" xmlns:p="http://schemas.openxmlformats.org/presentationml/2006/main" xmlns:r="http://schemas.openxmlformats.org/officeDocument/2006/relationships">
+  <p:cSld>
+    <p:spTree>
+      <p:nvGrpSpPr>
+        <p:cNvPr id="1" name=""/>
+        <p:cNvGrpSpPr/>
+        <p:nvPr/>
+      </p:nvGrpSpPr>
+      <p:grpSpPr/>
+      <p:sp>
+        <p:nvSpPr>
+          <p:cNvPr id="2" name="Rounded Rectangle 1"/>
+          <p:cNvSpPr/>
+          <p:nvPr/>
+        </p:nvSpPr>
+        <p:spPr>
+          <a:xfrm>
+            <a:off x="411480" y="320040"/>
+            <a:ext cx="3231360" cy="4888800"/>
+          </a:xfrm>
+          <a:prstGeom prst="roundRect">
+            <a:avLst/>
+          </a:prstGeom>
+          <a:noFill/>
+          <a:ln w="10160"/>
+        </p:spPr>
+        <p:style>
+          <a:lnRef idx="1">
+            <a:schemeClr val="accent1"/>
+          </a:lnRef>
+          <a:fillRef idx="3">
+            <a:schemeClr val="accent1"/>
+          </a:fillRef>
+          <a:effectRef idx="2">
+            <a:schemeClr val="accent1"/>
+          </a:effectRef>
+          <a:fontRef idx="minor">
+            <a:schemeClr val="lt1"/>
+          </a:fontRef>
+        </p:style>
+        <p:txBody>
+          <a:bodyPr rtlCol="0" anchor="ctr"/>
+          <a:lstStyle/>
+          <a:p>
+            <a:pPr algn="ctr"/>
+          </a:p>
+        </p:txBody>
+      </p:sp>
+      <p:sp>
+        <p:nvSpPr>
+          <p:cNvPr id="3" name="TextBox 2"/>
+          <p:cNvSpPr txBox="1"/>
+          <p:nvPr/>
+        </p:nvSpPr>
+        <p:spPr>
+          <a:xfrm>
+            <a:off x="484632" y="658368"/>
+            <a:ext cx="502920" cy="228600"/>
+          </a:xfrm>
+          <a:prstGeom prst="rect">
+            <a:avLst/>
+          </a:prstGeom>
+          <a:noFill/>
+        </p:spPr>
+        <p:txBody>
+          <a:bodyPr wrap="none">
+            <a:spAutoFit/>
+          </a:bodyPr>
+          <a:lstStyle/>
+          <a:p>
+            <a:pPr algn="ctr"/>
+            <a:r>
+              <a:rPr sz="900" b="1">
+                <a:latin typeface="BIZ UDPGothic"/>
+              </a:rPr>
+              <a:t>#074</a:t>
+            </a:r>
+          </a:p>
+        </p:txBody>
+      </p:sp>
+      <p:pic>
+        <p:nvPicPr>
+          <p:cNvPr id="4" name="Picture 3" descr="kleinstein.png"/>
+          <p:cNvPicPr>
+            <a:picLocks noChangeAspect="1"/>
+          </p:cNvPicPr>
+          <p:nvPr/>
+        </p:nvPicPr>
+        <p:blipFill>
+          <a:blip r:embed="rId2"/>
+          <a:stretch>
+            <a:fillRect/>
+          </a:stretch>
+        </p:blipFill>
+        <p:spPr>
+          <a:xfrm>
+            <a:off x="1044180" y="1005840"/>
+            <a:ext cx="1965960" cy="1965960"/>
+          </a:xfrm>
+          <a:prstGeom prst="rect">
+            <a:avLst/>
+          </a:prstGeom>
+        </p:spPr>
+      </p:pic>
+      <p:sp>
+        <p:nvSpPr>
+          <p:cNvPr id="5" name="TextBox 4"/>
+          <p:cNvSpPr txBox="1"/>
+          <p:nvPr/>
+        </p:nvSpPr>
+        <p:spPr>
+          <a:xfrm>
+            <a:off x="521208" y="3291840"/>
+            <a:ext cx="3011904" cy="274320"/>
+          </a:xfrm>
+          <a:prstGeom prst="rect">
+            <a:avLst/>
+          </a:prstGeom>
+          <a:noFill/>
+        </p:spPr>
+        <p:txBody>
+          <a:bodyPr wrap="none">
+            <a:spAutoFit/>
+          </a:bodyPr>
+          <a:lstStyle/>
+          <a:p>
+            <a:pPr algn="ctr"/>
+            <a:r>
+              <a:rPr sz="1400" b="0">
+                <a:latin typeface="BIZ UDPGothic"/>
+              </a:rPr>
+              <a:t>Kleinstein</a:t>
+            </a:r>
+          </a:p>
+        </p:txBody>
+      </p:sp>
+      <p:sp>
+        <p:nvSpPr>
+          <p:cNvPr id="6" name="TextBox 5"/>
+          <p:cNvSpPr txBox="1"/>
+          <p:nvPr/>
+        </p:nvSpPr>
+        <p:spPr>
+          <a:xfrm>
+            <a:off x="502920" y="3703320"/>
+            <a:ext cx="3048480" cy="384048"/>
+          </a:xfrm>
+          <a:prstGeom prst="rect">
+            <a:avLst/>
+          </a:prstGeom>
+          <a:noFill/>
+        </p:spPr>
+        <p:txBody>
+          <a:bodyPr wrap="none">
+            <a:spAutoFit/>
+          </a:bodyPr>
+          <a:lstStyle/>
+          <a:p>
+            <a:pPr algn="ctr"/>
+            <a:r>
+              <a:rPr sz="2400" b="1">
+                <a:latin typeface="BIZ UDPGothic"/>
+              </a:rPr>
+              <a:t>い し つ ぶ て</a:t>
+            </a:r>
+          </a:p>
+        </p:txBody>
+      </p:sp>
+      <p:sp>
+        <p:nvSpPr>
+          <p:cNvPr id="7" name="TextBox 6"/>
+          <p:cNvSpPr txBox="1"/>
+          <p:nvPr/>
+        </p:nvSpPr>
+        <p:spPr>
+          <a:xfrm>
+            <a:off x="502920" y="4251960"/>
+            <a:ext cx="3048480" cy="320040"/>
+          </a:xfrm>
+          <a:prstGeom prst="rect">
+            <a:avLst/>
+          </a:prstGeom>
+          <a:noFill/>
+        </p:spPr>
+        <p:txBody>
+          <a:bodyPr wrap="none">
+            <a:spAutoFit/>
+          </a:bodyPr>
+          <a:lstStyle/>
+          <a:p>
+            <a:pPr algn="ctr"/>
+            <a:r>
+              <a:rPr sz="1500" b="0">
+                <a:latin typeface="BIZ UDPGothic"/>
+              </a:rPr>
+              <a:t>イシツブテ</a:t>
+            </a:r>
+          </a:p>
+        </p:txBody>
+      </p:sp>
+      <p:sp>
+        <p:nvSpPr>
+          <p:cNvPr id="8" name="TextBox 7"/>
+          <p:cNvSpPr txBox="1"/>
+          <p:nvPr/>
+        </p:nvSpPr>
+        <p:spPr>
+          <a:xfrm>
+            <a:off x="502920" y="4617720"/>
+            <a:ext cx="3048480" cy="228600"/>
+          </a:xfrm>
+          <a:prstGeom prst="rect">
+            <a:avLst/>
+          </a:prstGeom>
+          <a:noFill/>
+        </p:spPr>
+        <p:txBody>
+          <a:bodyPr wrap="none">
+            <a:spAutoFit/>
+          </a:bodyPr>
+          <a:lstStyle/>
+          <a:p>
+            <a:pPr algn="ctr"/>
+            <a:r>
+              <a:rPr sz="900" b="0">
+                <a:latin typeface="BIZ UDPGothic"/>
+              </a:rPr>
+              <a:t>タイプ：いわ / じめん</a:t>
+            </a:r>
+          </a:p>
+        </p:txBody>
+      </p:sp>
+      <p:sp>
+        <p:nvSpPr>
+          <p:cNvPr id="9" name="Rounded Rectangle 8"/>
+          <p:cNvSpPr/>
+          <p:nvPr/>
+        </p:nvSpPr>
+        <p:spPr>
+          <a:xfrm>
+            <a:off x="3917160" y="320040"/>
+            <a:ext cx="3231360" cy="4888800"/>
+          </a:xfrm>
+          <a:prstGeom prst="roundRect">
+            <a:avLst/>
+          </a:prstGeom>
+          <a:noFill/>
+          <a:ln w="10160"/>
+        </p:spPr>
+        <p:style>
+          <a:lnRef idx="1">
+            <a:schemeClr val="accent1"/>
+          </a:lnRef>
+          <a:fillRef idx="3">
+            <a:schemeClr val="accent1"/>
+          </a:fillRef>
+          <a:effectRef idx="2">
+            <a:schemeClr val="accent1"/>
+          </a:effectRef>
+          <a:fontRef idx="minor">
+            <a:schemeClr val="lt1"/>
+          </a:fontRef>
+        </p:style>
+        <p:txBody>
+          <a:bodyPr rtlCol="0" anchor="ctr"/>
+          <a:lstStyle/>
+          <a:p>
+            <a:pPr algn="ctr"/>
+          </a:p>
+        </p:txBody>
+      </p:sp>
+      <p:sp>
+        <p:nvSpPr>
+          <p:cNvPr id="10" name="TextBox 9"/>
+          <p:cNvSpPr txBox="1"/>
+          <p:nvPr/>
+        </p:nvSpPr>
+        <p:spPr>
+          <a:xfrm>
+            <a:off x="3990312" y="658368"/>
+            <a:ext cx="502920" cy="228600"/>
+          </a:xfrm>
+          <a:prstGeom prst="rect">
+            <a:avLst/>
+          </a:prstGeom>
+          <a:noFill/>
+        </p:spPr>
+        <p:txBody>
+          <a:bodyPr wrap="none">
+            <a:spAutoFit/>
+          </a:bodyPr>
+          <a:lstStyle/>
+          <a:p>
+            <a:pPr algn="ctr"/>
+            <a:r>
+              <a:rPr sz="900" b="1">
+                <a:latin typeface="BIZ UDPGothic"/>
+              </a:rPr>
+              <a:t>#240</a:t>
+            </a:r>
+          </a:p>
+        </p:txBody>
+      </p:sp>
+      <p:pic>
+        <p:nvPicPr>
+          <p:cNvPr id="11" name="Picture 10" descr="magby.png"/>
+          <p:cNvPicPr>
+            <a:picLocks noChangeAspect="1"/>
+          </p:cNvPicPr>
+          <p:nvPr/>
+        </p:nvPicPr>
+        <p:blipFill>
+          <a:blip r:embed="rId3"/>
+          <a:stretch>
+            <a:fillRect/>
+          </a:stretch>
+        </p:blipFill>
+        <p:spPr>
+          <a:xfrm>
+            <a:off x="4549860" y="1005840"/>
+            <a:ext cx="1965960" cy="1965960"/>
+          </a:xfrm>
+          <a:prstGeom prst="rect">
+            <a:avLst/>
+          </a:prstGeom>
+        </p:spPr>
+      </p:pic>
+      <p:sp>
+        <p:nvSpPr>
+          <p:cNvPr id="12" name="TextBox 11"/>
+          <p:cNvSpPr txBox="1"/>
+          <p:nvPr/>
+        </p:nvSpPr>
+        <p:spPr>
+          <a:xfrm>
+            <a:off x="4026888" y="3291840"/>
+            <a:ext cx="3011904" cy="274320"/>
+          </a:xfrm>
+          <a:prstGeom prst="rect">
+            <a:avLst/>
+          </a:prstGeom>
+          <a:noFill/>
+        </p:spPr>
+        <p:txBody>
+          <a:bodyPr wrap="none">
+            <a:spAutoFit/>
+          </a:bodyPr>
+          <a:lstStyle/>
+          <a:p>
+            <a:pPr algn="ctr"/>
+            <a:r>
+              <a:rPr sz="1400" b="0">
+                <a:latin typeface="BIZ UDPGothic"/>
+              </a:rPr>
+              <a:t>Magby</a:t>
+            </a:r>
+          </a:p>
+        </p:txBody>
+      </p:sp>
+      <p:sp>
+        <p:nvSpPr>
+          <p:cNvPr id="13" name="TextBox 12"/>
+          <p:cNvSpPr txBox="1"/>
+          <p:nvPr/>
+        </p:nvSpPr>
+        <p:spPr>
+          <a:xfrm>
+            <a:off x="4008600" y="3703320"/>
+            <a:ext cx="3048480" cy="384048"/>
+          </a:xfrm>
+          <a:prstGeom prst="rect">
+            <a:avLst/>
+          </a:prstGeom>
+          <a:noFill/>
+        </p:spPr>
+        <p:txBody>
+          <a:bodyPr wrap="none">
+            <a:spAutoFit/>
+          </a:bodyPr>
+          <a:lstStyle/>
+          <a:p>
+            <a:pPr algn="ctr"/>
+            <a:r>
+              <a:rPr sz="2400" b="1">
+                <a:latin typeface="BIZ UDPGothic"/>
+              </a:rPr>
+              <a:t>ぶ び ぃ</a:t>
+            </a:r>
+          </a:p>
+        </p:txBody>
+      </p:sp>
+      <p:sp>
+        <p:nvSpPr>
+          <p:cNvPr id="14" name="TextBox 13"/>
+          <p:cNvSpPr txBox="1"/>
+          <p:nvPr/>
+        </p:nvSpPr>
+        <p:spPr>
+          <a:xfrm>
+            <a:off x="4008600" y="4251960"/>
+            <a:ext cx="3048480" cy="320040"/>
+          </a:xfrm>
+          <a:prstGeom prst="rect">
+            <a:avLst/>
+          </a:prstGeom>
+          <a:noFill/>
+        </p:spPr>
+        <p:txBody>
+          <a:bodyPr wrap="none">
+            <a:spAutoFit/>
+          </a:bodyPr>
+          <a:lstStyle/>
+          <a:p>
+            <a:pPr algn="ctr"/>
+            <a:r>
+              <a:rPr sz="1500" b="0">
+                <a:latin typeface="BIZ UDPGothic"/>
+              </a:rPr>
+              <a:t>ブビィ</a:t>
+            </a:r>
+          </a:p>
+        </p:txBody>
+      </p:sp>
+      <p:sp>
+        <p:nvSpPr>
+          <p:cNvPr id="15" name="TextBox 14"/>
+          <p:cNvSpPr txBox="1"/>
+          <p:nvPr/>
+        </p:nvSpPr>
+        <p:spPr>
+          <a:xfrm>
+            <a:off x="4008600" y="4617720"/>
+            <a:ext cx="3048480" cy="228600"/>
+          </a:xfrm>
+          <a:prstGeom prst="rect">
+            <a:avLst/>
+          </a:prstGeom>
+          <a:noFill/>
+        </p:spPr>
+        <p:txBody>
+          <a:bodyPr wrap="none">
+            <a:spAutoFit/>
+          </a:bodyPr>
+          <a:lstStyle/>
+          <a:p>
+            <a:pPr algn="ctr"/>
+            <a:r>
+              <a:rPr sz="900" b="0">
+                <a:latin typeface="BIZ UDPGothic"/>
+              </a:rPr>
+              <a:t>タイプ：ほのお</a:t>
+            </a:r>
+          </a:p>
+        </p:txBody>
+      </p:sp>
+      <p:sp>
+        <p:nvSpPr>
+          <p:cNvPr id="16" name="Rounded Rectangle 15"/>
+          <p:cNvSpPr/>
+          <p:nvPr/>
+        </p:nvSpPr>
+        <p:spPr>
+          <a:xfrm>
+            <a:off x="411480" y="5483160"/>
+            <a:ext cx="3231360" cy="4888800"/>
+          </a:xfrm>
+          <a:prstGeom prst="roundRect">
+            <a:avLst/>
+          </a:prstGeom>
+          <a:noFill/>
+          <a:ln w="10160"/>
+        </p:spPr>
+        <p:style>
+          <a:lnRef idx="1">
+            <a:schemeClr val="accent1"/>
+          </a:lnRef>
+          <a:fillRef idx="3">
+            <a:schemeClr val="accent1"/>
+          </a:fillRef>
+          <a:effectRef idx="2">
+            <a:schemeClr val="accent1"/>
+          </a:effectRef>
+          <a:fontRef idx="minor">
+            <a:schemeClr val="lt1"/>
+          </a:fontRef>
+        </p:style>
+        <p:txBody>
+          <a:bodyPr rtlCol="0" anchor="ctr"/>
+          <a:lstStyle/>
+          <a:p>
+            <a:pPr algn="ctr"/>
+          </a:p>
+        </p:txBody>
+      </p:sp>
+      <p:sp>
+        <p:nvSpPr>
+          <p:cNvPr id="17" name="TextBox 16"/>
+          <p:cNvSpPr txBox="1"/>
+          <p:nvPr/>
+        </p:nvSpPr>
+        <p:spPr>
+          <a:xfrm>
+            <a:off x="484632" y="5821488"/>
+            <a:ext cx="502920" cy="228600"/>
+          </a:xfrm>
+          <a:prstGeom prst="rect">
+            <a:avLst/>
+          </a:prstGeom>
+          <a:noFill/>
+        </p:spPr>
+        <p:txBody>
+          <a:bodyPr wrap="none">
+            <a:spAutoFit/>
+          </a:bodyPr>
+          <a:lstStyle/>
+          <a:p>
+            <a:pPr algn="ctr"/>
+            <a:r>
+              <a:rPr sz="900" b="1">
+                <a:latin typeface="BIZ UDPGothic"/>
+              </a:rPr>
+              <a:t>#813</a:t>
+            </a:r>
+          </a:p>
+        </p:txBody>
+      </p:sp>
+      <p:pic>
+        <p:nvPicPr>
+          <p:cNvPr id="18" name="Picture 17" descr="hopplo.png"/>
+          <p:cNvPicPr>
+            <a:picLocks noChangeAspect="1"/>
+          </p:cNvPicPr>
+          <p:nvPr/>
+        </p:nvPicPr>
+        <p:blipFill>
+          <a:blip r:embed="rId4"/>
+          <a:stretch>
+            <a:fillRect/>
+          </a:stretch>
+        </p:blipFill>
+        <p:spPr>
+          <a:xfrm>
+            <a:off x="1044180" y="6168960"/>
+            <a:ext cx="1965960" cy="1965960"/>
+          </a:xfrm>
+          <a:prstGeom prst="rect">
+            <a:avLst/>
+          </a:prstGeom>
+        </p:spPr>
+      </p:pic>
+      <p:sp>
+        <p:nvSpPr>
+          <p:cNvPr id="19" name="TextBox 18"/>
+          <p:cNvSpPr txBox="1"/>
+          <p:nvPr/>
+        </p:nvSpPr>
+        <p:spPr>
+          <a:xfrm>
+            <a:off x="521208" y="8454960"/>
+            <a:ext cx="3011904" cy="274320"/>
+          </a:xfrm>
+          <a:prstGeom prst="rect">
+            <a:avLst/>
+          </a:prstGeom>
+          <a:noFill/>
+        </p:spPr>
+        <p:txBody>
+          <a:bodyPr wrap="none">
+            <a:spAutoFit/>
+          </a:bodyPr>
+          <a:lstStyle/>
+          <a:p>
+            <a:pPr algn="ctr"/>
+            <a:r>
+              <a:rPr sz="1400" b="0">
+                <a:latin typeface="BIZ UDPGothic"/>
+              </a:rPr>
+              <a:t>Hopplo</a:t>
+            </a:r>
+          </a:p>
+        </p:txBody>
+      </p:sp>
+      <p:sp>
+        <p:nvSpPr>
+          <p:cNvPr id="20" name="TextBox 19"/>
+          <p:cNvSpPr txBox="1"/>
+          <p:nvPr/>
+        </p:nvSpPr>
+        <p:spPr>
+          <a:xfrm>
+            <a:off x="502920" y="8866440"/>
+            <a:ext cx="3048480" cy="384048"/>
+          </a:xfrm>
+          <a:prstGeom prst="rect">
+            <a:avLst/>
+          </a:prstGeom>
+          <a:noFill/>
+        </p:spPr>
+        <p:txBody>
+          <a:bodyPr wrap="none">
+            <a:spAutoFit/>
+          </a:bodyPr>
+          <a:lstStyle/>
+          <a:p>
+            <a:pPr algn="ctr"/>
+            <a:r>
+              <a:rPr sz="2400" b="1">
+                <a:latin typeface="BIZ UDPGothic"/>
+              </a:rPr>
+              <a:t>ひ ば に ー</a:t>
+            </a:r>
+          </a:p>
+        </p:txBody>
+      </p:sp>
+      <p:sp>
+        <p:nvSpPr>
+          <p:cNvPr id="21" name="TextBox 20"/>
+          <p:cNvSpPr txBox="1"/>
+          <p:nvPr/>
+        </p:nvSpPr>
+        <p:spPr>
+          <a:xfrm>
+            <a:off x="502920" y="9415080"/>
+            <a:ext cx="3048480" cy="320040"/>
+          </a:xfrm>
+          <a:prstGeom prst="rect">
+            <a:avLst/>
+          </a:prstGeom>
+          <a:noFill/>
+        </p:spPr>
+        <p:txBody>
+          <a:bodyPr wrap="none">
+            <a:spAutoFit/>
+          </a:bodyPr>
+          <a:lstStyle/>
+          <a:p>
+            <a:pPr algn="ctr"/>
+            <a:r>
+              <a:rPr sz="1500" b="0">
+                <a:latin typeface="BIZ UDPGothic"/>
+              </a:rPr>
+              <a:t>ヒバニー</a:t>
+            </a:r>
+          </a:p>
+        </p:txBody>
+      </p:sp>
+      <p:sp>
+        <p:nvSpPr>
+          <p:cNvPr id="22" name="TextBox 21"/>
+          <p:cNvSpPr txBox="1"/>
+          <p:nvPr/>
+        </p:nvSpPr>
+        <p:spPr>
+          <a:xfrm>
+            <a:off x="502920" y="9780840"/>
+            <a:ext cx="3048480" cy="228600"/>
+          </a:xfrm>
+          <a:prstGeom prst="rect">
+            <a:avLst/>
+          </a:prstGeom>
+          <a:noFill/>
+        </p:spPr>
+        <p:txBody>
+          <a:bodyPr wrap="none">
+            <a:spAutoFit/>
+          </a:bodyPr>
+          <a:lstStyle/>
+          <a:p>
+            <a:pPr algn="ctr"/>
+            <a:r>
+              <a:rPr sz="900" b="0">
+                <a:latin typeface="BIZ UDPGothic"/>
+              </a:rPr>
+              <a:t>タイプ：ほのお</a:t>
+            </a:r>
+          </a:p>
+        </p:txBody>
+      </p:sp>
+      <p:sp>
+        <p:nvSpPr>
+          <p:cNvPr id="23" name="Rounded Rectangle 22"/>
+          <p:cNvSpPr/>
+          <p:nvPr/>
+        </p:nvSpPr>
+        <p:spPr>
+          <a:xfrm>
+            <a:off x="3917160" y="5483160"/>
+            <a:ext cx="3231360" cy="4888800"/>
+          </a:xfrm>
+          <a:prstGeom prst="roundRect">
+            <a:avLst/>
+          </a:prstGeom>
+          <a:noFill/>
+          <a:ln w="10160"/>
+        </p:spPr>
+        <p:style>
+          <a:lnRef idx="1">
+            <a:schemeClr val="accent1"/>
+          </a:lnRef>
+          <a:fillRef idx="3">
+            <a:schemeClr val="accent1"/>
+          </a:fillRef>
+          <a:effectRef idx="2">
+            <a:schemeClr val="accent1"/>
+          </a:effectRef>
+          <a:fontRef idx="minor">
+            <a:schemeClr val="lt1"/>
+          </a:fontRef>
+        </p:style>
+        <p:txBody>
+          <a:bodyPr rtlCol="0" anchor="ctr"/>
+          <a:lstStyle/>
+          <a:p>
+            <a:pPr algn="ctr"/>
+          </a:p>
+        </p:txBody>
+      </p:sp>
+      <p:sp>
+        <p:nvSpPr>
+          <p:cNvPr id="24" name="TextBox 23"/>
+          <p:cNvSpPr txBox="1"/>
+          <p:nvPr/>
+        </p:nvSpPr>
+        <p:spPr>
+          <a:xfrm>
+            <a:off x="3990312" y="5821488"/>
+            <a:ext cx="502920" cy="228600"/>
+          </a:xfrm>
+          <a:prstGeom prst="rect">
+            <a:avLst/>
+          </a:prstGeom>
+          <a:noFill/>
+        </p:spPr>
+        <p:txBody>
+          <a:bodyPr wrap="none">
+            <a:spAutoFit/>
+          </a:bodyPr>
+          <a:lstStyle/>
+          <a:p>
+            <a:pPr algn="ctr"/>
+            <a:r>
+              <a:rPr sz="900" b="1">
+                <a:latin typeface="BIZ UDPGothic"/>
+              </a:rPr>
+              <a:t>#133</a:t>
+            </a:r>
+          </a:p>
+        </p:txBody>
+      </p:sp>
+      <p:pic>
+        <p:nvPicPr>
+          <p:cNvPr id="25" name="Picture 24" descr="evoli.png"/>
+          <p:cNvPicPr>
+            <a:picLocks noChangeAspect="1"/>
+          </p:cNvPicPr>
+          <p:nvPr/>
+        </p:nvPicPr>
+        <p:blipFill>
+          <a:blip r:embed="rId5"/>
+          <a:stretch>
+            <a:fillRect/>
+          </a:stretch>
+        </p:blipFill>
+        <p:spPr>
+          <a:xfrm>
+            <a:off x="4549860" y="6168960"/>
+            <a:ext cx="1965960" cy="1965960"/>
+          </a:xfrm>
+          <a:prstGeom prst="rect">
+            <a:avLst/>
+          </a:prstGeom>
+        </p:spPr>
+      </p:pic>
+      <p:sp>
+        <p:nvSpPr>
+          <p:cNvPr id="26" name="TextBox 25"/>
+          <p:cNvSpPr txBox="1"/>
+          <p:nvPr/>
+        </p:nvSpPr>
+        <p:spPr>
+          <a:xfrm>
+            <a:off x="4026888" y="8454960"/>
+            <a:ext cx="3011904" cy="274320"/>
+          </a:xfrm>
+          <a:prstGeom prst="rect">
+            <a:avLst/>
+          </a:prstGeom>
+          <a:noFill/>
+        </p:spPr>
+        <p:txBody>
+          <a:bodyPr wrap="none">
+            <a:spAutoFit/>
+          </a:bodyPr>
+          <a:lstStyle/>
+          <a:p>
+            <a:pPr algn="ctr"/>
+            <a:r>
+              <a:rPr sz="1400" b="0">
+                <a:latin typeface="BIZ UDPGothic"/>
+              </a:rPr>
+              <a:t>Evoli</a:t>
+            </a:r>
+          </a:p>
+        </p:txBody>
+      </p:sp>
+      <p:sp>
+        <p:nvSpPr>
+          <p:cNvPr id="27" name="TextBox 26"/>
+          <p:cNvSpPr txBox="1"/>
+          <p:nvPr/>
+        </p:nvSpPr>
+        <p:spPr>
+          <a:xfrm>
+            <a:off x="4008600" y="8866440"/>
+            <a:ext cx="3048480" cy="384048"/>
+          </a:xfrm>
+          <a:prstGeom prst="rect">
+            <a:avLst/>
+          </a:prstGeom>
+          <a:noFill/>
+        </p:spPr>
+        <p:txBody>
+          <a:bodyPr wrap="none">
+            <a:spAutoFit/>
+          </a:bodyPr>
+          <a:lstStyle/>
+          <a:p>
+            <a:pPr algn="ctr"/>
+            <a:r>
+              <a:rPr sz="2400" b="1">
+                <a:latin typeface="BIZ UDPGothic"/>
+              </a:rPr>
+              <a:t>い ー ぶ い</a:t>
+            </a:r>
+          </a:p>
+        </p:txBody>
+      </p:sp>
+      <p:sp>
+        <p:nvSpPr>
+          <p:cNvPr id="28" name="TextBox 27"/>
+          <p:cNvSpPr txBox="1"/>
+          <p:nvPr/>
+        </p:nvSpPr>
+        <p:spPr>
+          <a:xfrm>
+            <a:off x="4008600" y="9415080"/>
+            <a:ext cx="3048480" cy="320040"/>
+          </a:xfrm>
+          <a:prstGeom prst="rect">
+            <a:avLst/>
+          </a:prstGeom>
+          <a:noFill/>
+        </p:spPr>
+        <p:txBody>
+          <a:bodyPr wrap="none">
+            <a:spAutoFit/>
+          </a:bodyPr>
+          <a:lstStyle/>
+          <a:p>
+            <a:pPr algn="ctr"/>
+            <a:r>
+              <a:rPr sz="1500" b="0">
+                <a:latin typeface="BIZ UDPGothic"/>
+              </a:rPr>
+              <a:t>イーブイ</a:t>
+            </a:r>
+          </a:p>
+        </p:txBody>
+      </p:sp>
+      <p:sp>
+        <p:nvSpPr>
+          <p:cNvPr id="29" name="TextBox 28"/>
+          <p:cNvSpPr txBox="1"/>
+          <p:nvPr/>
+        </p:nvSpPr>
+        <p:spPr>
+          <a:xfrm>
+            <a:off x="4008600" y="9780840"/>
+            <a:ext cx="3048480" cy="228600"/>
+          </a:xfrm>
+          <a:prstGeom prst="rect">
+            <a:avLst/>
+          </a:prstGeom>
+          <a:noFill/>
+        </p:spPr>
+        <p:txBody>
+          <a:bodyPr wrap="none">
+            <a:spAutoFit/>
+          </a:bodyPr>
+          <a:lstStyle/>
+          <a:p>
+            <a:pPr algn="ctr"/>
+            <a:r>
+              <a:rPr sz="900" b="0">
+                <a:latin typeface="BIZ UDPGothic"/>
+              </a:rPr>
+              <a:t>タイプ：ノーマル</a:t>
             </a:r>
           </a:p>
         </p:txBody>
